--- a/presentation_assets/slide_exports/Team_GeoLogicAnalytics_PPT_V1.pptx
+++ b/presentation_assets/slide_exports/Team_GeoLogicAnalytics_PPT_V1.pptx
@@ -4,6 +4,9 @@
   <p:sldMasterIdLst>
     <p:sldMasterId id="2147483648" r:id="rId1"/>
   </p:sldMasterIdLst>
+  <p:notesMasterIdLst>
+    <p:notesMasterId r:id="rId17"/>
+  </p:notesMasterIdLst>
   <p:sldIdLst>
     <p:sldId id="256" r:id="rId2"/>
     <p:sldId id="257" r:id="rId3"/>
@@ -21,9 +24,6 @@
     <p:sldId id="269" r:id="rId15"/>
     <p:sldId id="270" r:id="rId16"/>
   </p:sldIdLst>
-  <p:notesMasterIdLst>
-    <p:notesMasterId r:id="rId17"/>
-  </p:notesMasterIdLst>
   <p:sldSz cx="12192000" cy="6858000"/>
   <p:notesSz cx="6858000" cy="12192000"/>
   <p:defaultTextStyle>
@@ -118,6 +118,11 @@
       </a:defRPr>
     </a:lvl9pPr>
   </p:defaultTextStyle>
+  <p:extLst>
+    <p:ext uri="{EFAFB233-063F-42B5-8137-9DF3F51BA10A}">
+      <p15:sldGuideLst xmlns:p15="http://schemas.microsoft.com/office/powerpoint/2012/main"/>
+    </p:ext>
+  </p:extLst>
 </p:presentation>
 </file>
 
@@ -143,234 +148,10 @@
           <a:chExt cx="0" cy="0"/>
         </a:xfrm>
       </p:grpSpPr>
-      <p:sp>
-        <p:nvSpPr>
-          <p:cNvPr id="2" name="Header Placeholder 1"/>
-          <p:cNvSpPr>
-            <a:spLocks noGrp="1"/>
-          </p:cNvSpPr>
-          <p:nvPr>
-            <p:ph type="hdr" sz="quarter"/>
-          </p:nvPr>
-        </p:nvSpPr>
-        <p:spPr>
-          <a:xfrm>
-            <a:off x="0" y="0"/>
-            <a:ext cx="2971800" cy="458788"/>
-          </a:xfrm>
-          <a:prstGeom prst="rect">
-            <a:avLst/>
-          </a:prstGeom>
-        </p:spPr>
-        <p:txBody>
-          <a:bodyPr vert="horz" lIns="91440" tIns="45720" rIns="91440" bIns="45720" rtlCol="0"/>
-          <a:lstStyle>
-            <a:lvl1pPr algn="l">
-              <a:defRPr sz="1200"/>
-            </a:lvl1pPr>
-          </a:lstStyle>
-          <a:p>
-            <a:endParaRPr lang="en-US"/>
-          </a:p>
-        </p:txBody>
-      </p:sp>
-      <p:sp>
-        <p:nvSpPr>
-          <p:cNvPr id="3" name="Date Placeholder 2"/>
-          <p:cNvSpPr>
-            <a:spLocks noGrp="1"/>
-          </p:cNvSpPr>
-          <p:nvPr>
-            <p:ph type="dt" idx="1"/>
-          </p:nvPr>
-        </p:nvSpPr>
-        <p:spPr>
-          <a:xfrm>
-            <a:off x="3884613" y="0"/>
-            <a:ext cx="2971800" cy="458788"/>
-          </a:xfrm>
-          <a:prstGeom prst="rect">
-            <a:avLst/>
-          </a:prstGeom>
-        </p:spPr>
-        <p:txBody>
-          <a:bodyPr vert="horz" lIns="91440" tIns="45720" rIns="91440" bIns="45720" rtlCol="0"/>
-          <a:lstStyle>
-            <a:lvl1pPr algn="r">
-              <a:defRPr sz="1200"/>
-            </a:lvl1pPr>
-          </a:lstStyle>
-          <a:p>
-            <a:fld id="{5282F153-3F37-0F45-9E97-73ACFA13230C}" type="datetimeFigureOut">
-              <a:rPr lang="en-US"/>
-              <a:t>7/23/19</a:t>
-            </a:fld>
-            <a:endParaRPr lang="en-US"/>
-          </a:p>
-        </p:txBody>
-      </p:sp>
-      <p:sp>
-        <p:nvSpPr>
-          <p:cNvPr id="4" name="Slide Image Placeholder 3"/>
-          <p:cNvSpPr>
-            <a:spLocks noGrp="1" noRot="1" noChangeAspect="1"/>
-          </p:cNvSpPr>
-          <p:nvPr>
-            <p:ph type="sldImg" idx="2"/>
-          </p:nvPr>
-        </p:nvSpPr>
-        <p:spPr>
-          <a:xfrm>
-            <a:off x="685800" y="1143000"/>
-            <a:ext cx="5486400" cy="3086100"/>
-          </a:xfrm>
-          <a:prstGeom prst="rect">
-            <a:avLst/>
-          </a:prstGeom>
-          <a:noFill/>
-          <a:ln w="12700">
-            <a:solidFill>
-              <a:prstClr val="black"/>
-            </a:solidFill>
-          </a:ln>
-        </p:spPr>
-        <p:txBody>
-          <a:bodyPr vert="horz" lIns="91440" tIns="45720" rIns="91440" bIns="45720" rtlCol="0" anchor="ctr"/>
-          <a:lstStyle/>
-          <a:p>
-            <a:endParaRPr lang="en-US"/>
-          </a:p>
-        </p:txBody>
-      </p:sp>
-      <p:sp>
-        <p:nvSpPr>
-          <p:cNvPr id="5" name="Notes Placeholder 4"/>
-          <p:cNvSpPr>
-            <a:spLocks noGrp="1"/>
-          </p:cNvSpPr>
-          <p:nvPr>
-            <p:ph type="body" sz="quarter" idx="3"/>
-          </p:nvPr>
-        </p:nvSpPr>
-        <p:spPr>
-          <a:xfrm>
-            <a:off x="685800" y="4400550"/>
-            <a:ext cx="5486400" cy="3600450"/>
-          </a:xfrm>
-          <a:prstGeom prst="rect">
-            <a:avLst/>
-          </a:prstGeom>
-        </p:spPr>
-        <p:txBody>
-          <a:bodyPr vert="horz" lIns="91440" tIns="45720" rIns="91440" bIns="45720" rtlCol="0"/>
-          <a:lstStyle/>
-          <a:p>
-            <a:pPr lvl="0"/>
-            <a:r>
-              <a:rPr lang="en-US"/>
-              <a:t>Click to edit Master text styles</a:t>
-            </a:r>
-          </a:p>
-          <a:p>
-            <a:pPr lvl="1"/>
-            <a:r>
-              <a:rPr lang="en-US"/>
-              <a:t>Second level</a:t>
-            </a:r>
-          </a:p>
-          <a:p>
-            <a:pPr lvl="2"/>
-            <a:r>
-              <a:rPr lang="en-US"/>
-              <a:t>Third level</a:t>
-            </a:r>
-          </a:p>
-          <a:p>
-            <a:pPr lvl="3"/>
-            <a:r>
-              <a:rPr lang="en-US"/>
-              <a:t>Fourth level</a:t>
-            </a:r>
-          </a:p>
-          <a:p>
-            <a:pPr lvl="4"/>
-            <a:r>
-              <a:rPr lang="en-US"/>
-              <a:t>Fifth level</a:t>
-            </a:r>
-          </a:p>
-        </p:txBody>
-      </p:sp>
-      <p:sp>
-        <p:nvSpPr>
-          <p:cNvPr id="6" name="Footer Placeholder 5"/>
-          <p:cNvSpPr>
-            <a:spLocks noGrp="1"/>
-          </p:cNvSpPr>
-          <p:nvPr>
-            <p:ph type="ftr" sz="quarter" idx="4"/>
-          </p:nvPr>
-        </p:nvSpPr>
-        <p:spPr>
-          <a:xfrm>
-            <a:off x="0" y="8685213"/>
-            <a:ext cx="2971800" cy="458787"/>
-          </a:xfrm>
-          <a:prstGeom prst="rect">
-            <a:avLst/>
-          </a:prstGeom>
-        </p:spPr>
-        <p:txBody>
-          <a:bodyPr vert="horz" lIns="91440" tIns="45720" rIns="91440" bIns="45720" rtlCol="0" anchor="b"/>
-          <a:lstStyle>
-            <a:lvl1pPr algn="l">
-              <a:defRPr sz="1200"/>
-            </a:lvl1pPr>
-          </a:lstStyle>
-          <a:p>
-            <a:endParaRPr lang="en-US"/>
-          </a:p>
-        </p:txBody>
-      </p:sp>
-      <p:sp>
-        <p:nvSpPr>
-          <p:cNvPr id="7" name="Slide Number Placeholder 6"/>
-          <p:cNvSpPr>
-            <a:spLocks noGrp="1"/>
-          </p:cNvSpPr>
-          <p:nvPr>
-            <p:ph type="sldNum" sz="quarter" idx="5"/>
-          </p:nvPr>
-        </p:nvSpPr>
-        <p:spPr>
-          <a:xfrm>
-            <a:off x="3884613" y="8685213"/>
-            <a:ext cx="2971800" cy="458787"/>
-          </a:xfrm>
-          <a:prstGeom prst="rect">
-            <a:avLst/>
-          </a:prstGeom>
-        </p:spPr>
-        <p:txBody>
-          <a:bodyPr vert="horz" lIns="91440" tIns="45720" rIns="91440" bIns="45720" rtlCol="0" anchor="b"/>
-          <a:lstStyle>
-            <a:lvl1pPr algn="r">
-              <a:defRPr sz="1200"/>
-            </a:lvl1pPr>
-          </a:lstStyle>
-          <a:p>
-            <a:fld id="{CE5E9CC1-C706-0F49-92D6-E571CC5EEA8F}" type="slidenum">
-              <a:rPr lang="en-US"/>
-              <a:t>‹#›</a:t>
-            </a:fld>
-            <a:endParaRPr lang="en-US"/>
-          </a:p>
-        </p:txBody>
-      </p:sp>
     </p:spTree>
     <p:extLst>
       <p:ext uri="{BB962C8B-B14F-4D97-AF65-F5344CB8AC3E}">
-        <p14:creationId xmlns:p14="http://schemas.microsoft.com/office/powerpoint/2010/main" val="1024086991"/>
+        <p14:creationId xmlns:p14="http://schemas.microsoft.com/office/powerpoint/2010/main" val="2151948962"/>
       </p:ext>
     </p:extLst>
   </p:cSld>
@@ -514,10 +295,6 @@
           <a:bodyPr/>
           <a:lstStyle/>
           <a:p>
-            <a:r>
-              <a:rPr lang="en-US" dirty="0"/>
-              <a:t/>
-            </a:r>
             <a:endParaRPr lang="en-US" dirty="0"/>
           </a:p>
         </p:txBody>
@@ -602,10 +379,6 @@
           <a:bodyPr/>
           <a:lstStyle/>
           <a:p>
-            <a:r>
-              <a:rPr lang="en-US" dirty="0"/>
-              <a:t/>
-            </a:r>
             <a:endParaRPr lang="en-US" dirty="0"/>
           </a:p>
         </p:txBody>
@@ -690,10 +463,6 @@
           <a:bodyPr/>
           <a:lstStyle/>
           <a:p>
-            <a:r>
-              <a:rPr lang="en-US" dirty="0"/>
-              <a:t/>
-            </a:r>
             <a:endParaRPr lang="en-US" dirty="0"/>
           </a:p>
         </p:txBody>
@@ -778,10 +547,6 @@
           <a:bodyPr/>
           <a:lstStyle/>
           <a:p>
-            <a:r>
-              <a:rPr lang="en-US" dirty="0"/>
-              <a:t/>
-            </a:r>
             <a:endParaRPr lang="en-US" dirty="0"/>
           </a:p>
         </p:txBody>
@@ -866,10 +631,6 @@
           <a:bodyPr/>
           <a:lstStyle/>
           <a:p>
-            <a:r>
-              <a:rPr lang="en-US" dirty="0"/>
-              <a:t/>
-            </a:r>
             <a:endParaRPr lang="en-US" dirty="0"/>
           </a:p>
         </p:txBody>
@@ -954,10 +715,6 @@
           <a:bodyPr/>
           <a:lstStyle/>
           <a:p>
-            <a:r>
-              <a:rPr lang="en-US" dirty="0"/>
-              <a:t/>
-            </a:r>
             <a:endParaRPr lang="en-US" dirty="0"/>
           </a:p>
         </p:txBody>
@@ -1042,10 +799,6 @@
           <a:bodyPr/>
           <a:lstStyle/>
           <a:p>
-            <a:r>
-              <a:rPr lang="en-US" dirty="0"/>
-              <a:t/>
-            </a:r>
             <a:endParaRPr lang="en-US" dirty="0"/>
           </a:p>
         </p:txBody>
@@ -1130,10 +883,6 @@
           <a:bodyPr/>
           <a:lstStyle/>
           <a:p>
-            <a:r>
-              <a:rPr lang="en-US" dirty="0"/>
-              <a:t/>
-            </a:r>
             <a:endParaRPr lang="en-US" dirty="0"/>
           </a:p>
         </p:txBody>
@@ -1218,10 +967,6 @@
           <a:bodyPr/>
           <a:lstStyle/>
           <a:p>
-            <a:r>
-              <a:rPr lang="en-US" dirty="0"/>
-              <a:t/>
-            </a:r>
             <a:endParaRPr lang="en-US" dirty="0"/>
           </a:p>
         </p:txBody>
@@ -1306,10 +1051,6 @@
           <a:bodyPr/>
           <a:lstStyle/>
           <a:p>
-            <a:r>
-              <a:rPr lang="en-US" dirty="0"/>
-              <a:t/>
-            </a:r>
             <a:endParaRPr lang="en-US" dirty="0"/>
           </a:p>
         </p:txBody>
@@ -1394,10 +1135,6 @@
           <a:bodyPr/>
           <a:lstStyle/>
           <a:p>
-            <a:r>
-              <a:rPr lang="en-US" dirty="0"/>
-              <a:t/>
-            </a:r>
             <a:endParaRPr lang="en-US" dirty="0"/>
           </a:p>
         </p:txBody>
@@ -1482,10 +1219,6 @@
           <a:bodyPr/>
           <a:lstStyle/>
           <a:p>
-            <a:r>
-              <a:rPr lang="en-US" dirty="0"/>
-              <a:t/>
-            </a:r>
             <a:endParaRPr lang="en-US" dirty="0"/>
           </a:p>
         </p:txBody>
@@ -1570,10 +1303,6 @@
           <a:bodyPr/>
           <a:lstStyle/>
           <a:p>
-            <a:r>
-              <a:rPr lang="en-US" dirty="0"/>
-              <a:t/>
-            </a:r>
             <a:endParaRPr lang="en-US" dirty="0"/>
           </a:p>
         </p:txBody>
@@ -1658,10 +1387,6 @@
           <a:bodyPr/>
           <a:lstStyle/>
           <a:p>
-            <a:r>
-              <a:rPr lang="en-US" dirty="0"/>
-              <a:t/>
-            </a:r>
             <a:endParaRPr lang="en-US" dirty="0"/>
           </a:p>
         </p:txBody>
@@ -1746,10 +1471,6 @@
           <a:bodyPr/>
           <a:lstStyle/>
           <a:p>
-            <a:r>
-              <a:rPr lang="en-US" dirty="0"/>
-              <a:t/>
-            </a:r>
             <a:endParaRPr lang="en-US" dirty="0"/>
           </a:p>
         </p:txBody>
@@ -1823,6 +1544,11 @@
 <file path=ppt/slideMasters/slideMaster1.xml><?xml version="1.0" encoding="utf-8"?>
 <p:sldMaster xmlns:a="http://schemas.openxmlformats.org/drawingml/2006/main" xmlns:r="http://schemas.openxmlformats.org/officeDocument/2006/relationships" xmlns:p="http://schemas.openxmlformats.org/presentationml/2006/main">
   <p:cSld>
+    <p:bg>
+      <p:bgRef idx="1001">
+        <a:schemeClr val="bg1"/>
+      </p:bgRef>
+    </p:bg>
     <p:spTree>
       <p:nvGrpSpPr>
         <p:cNvPr id="1" name=""/>
@@ -2105,6 +1831,7 @@
         <a:solidFill>
           <a:srgbClr val="0E2A47"/>
         </a:solidFill>
+        <a:effectLst/>
       </p:bgPr>
     </p:bg>
     <p:spTree>
@@ -2140,6 +1867,13 @@
           </a:solidFill>
           <a:ln/>
         </p:spPr>
+        <p:txBody>
+          <a:bodyPr/>
+          <a:lstStyle/>
+          <a:p>
+            <a:endParaRPr lang="en-US"/>
+          </a:p>
+        </p:txBody>
       </p:sp>
       <p:sp>
         <p:nvSpPr>
@@ -2160,6 +1894,13 @@
           </a:solidFill>
           <a:ln/>
         </p:spPr>
+        <p:txBody>
+          <a:bodyPr/>
+          <a:lstStyle/>
+          <a:p>
+            <a:endParaRPr lang="en-US"/>
+          </a:p>
+        </p:txBody>
       </p:sp>
       <p:sp>
         <p:nvSpPr>
@@ -2182,11 +1923,11 @@
           <a:bodyPr wrap="square" lIns="0" tIns="0" rIns="0" bIns="0" rtlCol="0" anchor="ctr"/>
           <a:lstStyle/>
           <a:p>
-            <a:pPr indent="0" marL="0">
-              <a:buNone/>
-            </a:pPr>
-            <a:r>
-              <a:rPr lang="en-US" sz="1400" b="1" spc="300" kern="0" dirty="0">
+            <a:pPr marL="0" indent="0">
+              <a:buNone/>
+            </a:pPr>
+            <a:r>
+              <a:rPr lang="en-US" sz="1400" b="1" kern="0" spc="300" dirty="0">
                 <a:solidFill>
                   <a:srgbClr val="4FC3C3"/>
                 </a:solidFill>
@@ -2221,7 +1962,7 @@
           <a:bodyPr wrap="square" lIns="0" tIns="0" rIns="0" bIns="0" rtlCol="0" anchor="ctr"/>
           <a:lstStyle/>
           <a:p>
-            <a:pPr indent="0" marL="0">
+            <a:pPr marL="0" indent="0">
               <a:lnSpc>
                 <a:spcPct val="104000"/>
               </a:lnSpc>
@@ -2241,7 +1982,7 @@
             <a:endParaRPr lang="en-US" sz="3000" dirty="0"/>
           </a:p>
           <a:p>
-            <a:pPr indent="0" marL="0">
+            <a:pPr marL="0" indent="0">
               <a:lnSpc>
                 <a:spcPct val="104000"/>
               </a:lnSpc>
@@ -2288,6 +2029,13 @@
             <a:prstDash val="solid"/>
           </a:ln>
         </p:spPr>
+        <p:txBody>
+          <a:bodyPr/>
+          <a:lstStyle/>
+          <a:p>
+            <a:endParaRPr lang="en-US"/>
+          </a:p>
+        </p:txBody>
       </p:sp>
       <p:sp>
         <p:nvSpPr>
@@ -2310,7 +2058,7 @@
           <a:bodyPr wrap="square" lIns="0" tIns="0" rIns="0" bIns="0" rtlCol="0" anchor="ctr"/>
           <a:lstStyle/>
           <a:p>
-            <a:pPr indent="0" marL="0">
+            <a:pPr marL="0" indent="0">
               <a:buNone/>
             </a:pPr>
             <a:r>
@@ -2349,7 +2097,7 @@
           <a:bodyPr wrap="square" lIns="0" tIns="0" rIns="0" bIns="0" rtlCol="0" anchor="ctr"/>
           <a:lstStyle/>
           <a:p>
-            <a:pPr indent="0" marL="0">
+            <a:pPr marL="0" indent="0">
               <a:buNone/>
             </a:pPr>
             <a:r>
@@ -2390,6 +2138,13 @@
             <a:prstDash val="solid"/>
           </a:ln>
         </p:spPr>
+        <p:txBody>
+          <a:bodyPr/>
+          <a:lstStyle/>
+          <a:p>
+            <a:endParaRPr lang="en-US"/>
+          </a:p>
+        </p:txBody>
       </p:sp>
       <p:sp>
         <p:nvSpPr>
@@ -2412,7 +2167,7 @@
           <a:bodyPr wrap="square" lIns="0" tIns="0" rIns="0" bIns="0" rtlCol="0" anchor="ctr"/>
           <a:lstStyle/>
           <a:p>
-            <a:pPr indent="0" marL="0">
+            <a:pPr marL="0" indent="0">
               <a:buNone/>
             </a:pPr>
             <a:r>
@@ -2451,7 +2206,7 @@
           <a:bodyPr wrap="square" lIns="0" tIns="0" rIns="0" bIns="0" rtlCol="0" anchor="ctr"/>
           <a:lstStyle/>
           <a:p>
-            <a:pPr indent="0" marL="0">
+            <a:pPr marL="0" indent="0">
               <a:buNone/>
             </a:pPr>
             <a:r>
@@ -2492,6 +2247,13 @@
             <a:prstDash val="solid"/>
           </a:ln>
         </p:spPr>
+        <p:txBody>
+          <a:bodyPr/>
+          <a:lstStyle/>
+          <a:p>
+            <a:endParaRPr lang="en-US"/>
+          </a:p>
+        </p:txBody>
       </p:sp>
       <p:sp>
         <p:nvSpPr>
@@ -2514,7 +2276,7 @@
           <a:bodyPr wrap="square" lIns="0" tIns="0" rIns="0" bIns="0" rtlCol="0" anchor="ctr"/>
           <a:lstStyle/>
           <a:p>
-            <a:pPr indent="0" marL="0">
+            <a:pPr marL="0" indent="0">
               <a:buNone/>
             </a:pPr>
             <a:r>
@@ -2553,7 +2315,7 @@
           <a:bodyPr wrap="square" lIns="0" tIns="0" rIns="0" bIns="0" rtlCol="0" anchor="ctr"/>
           <a:lstStyle/>
           <a:p>
-            <a:pPr indent="0" marL="0">
+            <a:pPr marL="0" indent="0">
               <a:buNone/>
             </a:pPr>
             <a:r>
@@ -2589,13 +2351,20 @@
           </a:solidFill>
           <a:ln/>
           <a:effectLst>
-            <a:outerShdw sx="100000" sy="100000" kx="0" ky="0" algn="bl" rotWithShape="0" blurRad="114300" dist="38100" dir="8100000">
+            <a:outerShdw blurRad="114300" dist="38100" dir="8100000" algn="bl" rotWithShape="0">
               <a:srgbClr val="0A1722">
                 <a:alpha val="22000"/>
               </a:srgbClr>
             </a:outerShdw>
           </a:effectLst>
         </p:spPr>
+        <p:txBody>
+          <a:bodyPr/>
+          <a:lstStyle/>
+          <a:p>
+            <a:endParaRPr lang="en-US"/>
+          </a:p>
+        </p:txBody>
       </p:sp>
       <p:sp>
         <p:nvSpPr>
@@ -2618,16 +2387,32 @@
           <a:bodyPr wrap="square" lIns="0" tIns="0" rIns="0" bIns="0" rtlCol="0" anchor="ctr"/>
           <a:lstStyle/>
           <a:p>
-            <a:pPr indent="0" marL="0">
-              <a:buNone/>
-            </a:pPr>
-            <a:r>
-              <a:rPr lang="en-US" sz="1300" b="1" spc="200" kern="0" dirty="0">
+            <a:pPr marL="0" indent="0">
+              <a:buNone/>
+            </a:pPr>
+            <a:r>
+              <a:rPr lang="en-US" sz="1300" b="1" kern="0" spc="200" dirty="0">
                 <a:solidFill>
                   <a:srgbClr val="E8B84B"/>
                 </a:solidFill>
               </a:rPr>
-              <a:t>TEAM GEOLOGIC ANALYTICS</a:t>
+              <a:t>TEAM </a:t>
+            </a:r>
+            <a:r>
+              <a:rPr lang="en-US" sz="1300" b="1" kern="0" spc="200" dirty="0" err="1">
+                <a:solidFill>
+                  <a:srgbClr val="E8B84B"/>
+                </a:solidFill>
+              </a:rPr>
+              <a:t>GeoLogic</a:t>
+            </a:r>
+            <a:r>
+              <a:rPr lang="en-US" sz="1300" b="1" kern="0" spc="200" dirty="0">
+                <a:solidFill>
+                  <a:srgbClr val="E8B84B"/>
+                </a:solidFill>
+              </a:rPr>
+              <a:t> Analytics</a:t>
             </a:r>
             <a:endParaRPr lang="en-US" sz="1300" dirty="0"/>
           </a:p>
@@ -2642,40 +2427,88 @@
         <p:spPr>
           <a:xfrm>
             <a:off x="1005840" y="4206240"/>
-            <a:ext cx="5029200" cy="365760"/>
-          </a:xfrm>
-          <a:prstGeom prst="rect">
-            <a:avLst/>
-          </a:prstGeom>
-          <a:noFill/>
-          <a:ln/>
-        </p:spPr>
-        <p:txBody>
-          <a:bodyPr wrap="square" lIns="0" tIns="0" rIns="0" bIns="0" rtlCol="0" anchor="ctr"/>
-          <a:lstStyle/>
-          <a:p>
-            <a:pPr indent="0" marL="0">
-              <a:buNone/>
-            </a:pPr>
+            <a:ext cx="4494628" cy="365760"/>
+          </a:xfrm>
+          <a:prstGeom prst="rect">
+            <a:avLst/>
+          </a:prstGeom>
+          <a:noFill/>
+          <a:ln/>
+          <a:effectLst/>
+        </p:spPr>
+        <p:txBody>
+          <a:bodyPr wrap="square" lIns="0" tIns="0" rIns="0" bIns="0" rtlCol="0" anchor="ctr"/>
+          <a:lstStyle/>
+          <a:p>
+            <a:pPr marL="0" indent="0">
+              <a:buNone/>
+            </a:pPr>
+            <a:endParaRPr lang="en-US" sz="1250" b="1" dirty="0">
+              <a:solidFill>
+                <a:srgbClr val="16395E"/>
+              </a:solidFill>
+            </a:endParaRPr>
+          </a:p>
+          <a:p>
+            <a:r>
+              <a:rPr lang="en-US" sz="1300" b="1" dirty="0">
+                <a:solidFill>
+                  <a:schemeClr val="bg1"/>
+                </a:solidFill>
+              </a:rPr>
+              <a:t>Uadia Moses </a:t>
+            </a:r>
+            <a:r>
+              <a:rPr lang="en-US" sz="1300" b="1" dirty="0" err="1">
+                <a:solidFill>
+                  <a:schemeClr val="bg1"/>
+                </a:solidFill>
+              </a:rPr>
+              <a:t>Imoukhedeh</a:t>
+            </a:r>
             <a:r>
               <a:rPr lang="en-US" sz="1250" b="1" dirty="0">
                 <a:solidFill>
-                  <a:srgbClr val="FFFFFF"/>
-                </a:solidFill>
-              </a:rPr>
-              <a:t>Uadia Moses Imoukhedeh   </a:t>
-            </a:r>
-            <a:pPr indent="0" marL="0">
-              <a:buNone/>
-            </a:pPr>
+                  <a:schemeClr val="bg1"/>
+                </a:solidFill>
+              </a:rPr>
+              <a:t>			</a:t>
+            </a:r>
+            <a:r>
+              <a:rPr lang="en-US" sz="900" dirty="0">
+                <a:solidFill>
+                  <a:schemeClr val="bg1">
+                    <a:lumMod val="85000"/>
+                  </a:schemeClr>
+                </a:solidFill>
+              </a:rPr>
+              <a:t>SPE ID </a:t>
+            </a:r>
             <a:r>
               <a:rPr lang="en-US" sz="1100" dirty="0">
                 <a:solidFill>
                   <a:srgbClr val="4FC3C3"/>
                 </a:solidFill>
               </a:rPr>
-              <a:t>SPE 5174626</a:t>
-            </a:r>
+              <a:t>5174626</a:t>
+            </a:r>
+          </a:p>
+          <a:p>
+            <a:r>
+              <a:rPr lang="en-US" sz="1000" dirty="0">
+                <a:solidFill>
+                  <a:schemeClr val="bg1">
+                    <a:lumMod val="85000"/>
+                  </a:schemeClr>
+                </a:solidFill>
+              </a:rPr>
+              <a:t>Project Lead · Subsurface &amp; Resource Assessment</a:t>
+            </a:r>
+          </a:p>
+          <a:p>
+            <a:pPr marL="0" indent="0">
+              <a:buNone/>
+            </a:pPr>
             <a:endParaRPr lang="en-US" sz="1250" dirty="0"/>
           </a:p>
         </p:txBody>
@@ -2701,28 +2534,89 @@
           <a:bodyPr wrap="square" lIns="0" tIns="0" rIns="0" bIns="0" rtlCol="0" anchor="ctr"/>
           <a:lstStyle/>
           <a:p>
-            <a:pPr indent="0" marL="0">
-              <a:buNone/>
-            </a:pPr>
+            <a:pPr marL="0" indent="0">
+              <a:buNone/>
+            </a:pPr>
+            <a:endParaRPr lang="en-US" sz="1250" b="1" dirty="0">
+              <a:solidFill>
+                <a:srgbClr val="FFFFFF"/>
+              </a:solidFill>
+            </a:endParaRPr>
+          </a:p>
+          <a:p>
+            <a:endParaRPr lang="en-US" sz="1250" b="1" dirty="0">
+              <a:solidFill>
+                <a:srgbClr val="FFFFFF"/>
+              </a:solidFill>
+            </a:endParaRPr>
+          </a:p>
+          <a:p>
+            <a:r>
+              <a:rPr lang="en-US" sz="1300" b="1" dirty="0" err="1">
+                <a:solidFill>
+                  <a:srgbClr val="FFFFFF"/>
+                </a:solidFill>
+              </a:rPr>
+              <a:t>Ogundimu</a:t>
+            </a:r>
+            <a:r>
+              <a:rPr lang="en-US" sz="1300" b="1" dirty="0">
+                <a:solidFill>
+                  <a:srgbClr val="FFFFFF"/>
+                </a:solidFill>
+              </a:rPr>
+              <a:t> Samuel Oluwaseun </a:t>
+            </a:r>
             <a:r>
               <a:rPr lang="en-US" sz="1250" b="1" dirty="0">
                 <a:solidFill>
                   <a:srgbClr val="FFFFFF"/>
                 </a:solidFill>
               </a:rPr>
-              <a:t>Ogundimu Samuel Oluwaseun   </a:t>
-            </a:r>
-            <a:pPr indent="0" marL="0">
-              <a:buNone/>
-            </a:pPr>
+              <a:t>		</a:t>
+            </a:r>
+            <a:r>
+              <a:rPr lang="en-US" sz="900" dirty="0">
+                <a:solidFill>
+                  <a:schemeClr val="bg1">
+                    <a:lumMod val="85000"/>
+                  </a:schemeClr>
+                </a:solidFill>
+              </a:rPr>
+              <a:t>SPE ID</a:t>
+            </a:r>
             <a:r>
               <a:rPr lang="en-US" sz="1100" dirty="0">
                 <a:solidFill>
                   <a:srgbClr val="4FC3C3"/>
                 </a:solidFill>
               </a:rPr>
-              <a:t>SPE 5408045</a:t>
-            </a:r>
+              <a:t> 5408045</a:t>
+            </a:r>
+          </a:p>
+          <a:p>
+            <a:r>
+              <a:rPr lang="en-US" sz="1000" dirty="0">
+                <a:solidFill>
+                  <a:schemeClr val="bg1">
+                    <a:lumMod val="85000"/>
+                  </a:schemeClr>
+                </a:solidFill>
+              </a:rPr>
+              <a:t>Surface Facilities &amp; Thermodynamic Design</a:t>
+            </a:r>
+          </a:p>
+          <a:p>
+            <a:endParaRPr lang="en-US" sz="1100" dirty="0">
+              <a:solidFill>
+                <a:srgbClr val="4FC3C3"/>
+              </a:solidFill>
+            </a:endParaRPr>
+          </a:p>
+          <a:p>
+            <a:pPr marL="0" indent="0">
+              <a:buNone/>
+            </a:pPr>
             <a:endParaRPr lang="en-US" sz="1250" dirty="0"/>
           </a:p>
         </p:txBody>
@@ -2736,40 +2630,90 @@
         <p:spPr>
           <a:xfrm>
             <a:off x="1005840" y="4773168"/>
-            <a:ext cx="5029200" cy="365760"/>
-          </a:xfrm>
-          <a:prstGeom prst="rect">
-            <a:avLst/>
-          </a:prstGeom>
-          <a:noFill/>
-          <a:ln/>
-        </p:spPr>
-        <p:txBody>
-          <a:bodyPr wrap="square" lIns="0" tIns="0" rIns="0" bIns="0" rtlCol="0" anchor="ctr"/>
-          <a:lstStyle/>
-          <a:p>
-            <a:pPr indent="0" marL="0">
-              <a:buNone/>
-            </a:pPr>
-            <a:r>
-              <a:rPr lang="en-US" sz="1250" b="1" dirty="0">
+            <a:ext cx="4494628" cy="365760"/>
+          </a:xfrm>
+          <a:prstGeom prst="rect">
+            <a:avLst/>
+          </a:prstGeom>
+          <a:noFill/>
+          <a:ln/>
+        </p:spPr>
+        <p:txBody>
+          <a:bodyPr wrap="square" lIns="0" tIns="0" rIns="0" bIns="0" rtlCol="0" anchor="ctr"/>
+          <a:lstStyle/>
+          <a:p>
+            <a:endParaRPr lang="en-US" sz="1300" b="1" dirty="0">
+              <a:solidFill>
+                <a:srgbClr val="FFFFFF"/>
+              </a:solidFill>
+            </a:endParaRPr>
+          </a:p>
+          <a:p>
+            <a:r>
+              <a:rPr lang="en-US" sz="1300" b="1" dirty="0" err="1">
                 <a:solidFill>
                   <a:srgbClr val="FFFFFF"/>
                 </a:solidFill>
               </a:rPr>
-              <a:t>Akanmu Oluwaseun Emmanuel   </a:t>
-            </a:r>
-            <a:pPr indent="0" marL="0">
-              <a:buNone/>
-            </a:pPr>
+              <a:t>Akanmu</a:t>
+            </a:r>
+            <a:r>
+              <a:rPr lang="en-US" sz="1300" b="1" dirty="0">
+                <a:solidFill>
+                  <a:srgbClr val="FFFFFF"/>
+                </a:solidFill>
+              </a:rPr>
+              <a:t> Oluwaseun Emmanuel 		</a:t>
+            </a:r>
+            <a:r>
+              <a:rPr lang="en-US" sz="900" dirty="0">
+                <a:solidFill>
+                  <a:schemeClr val="bg1">
+                    <a:lumMod val="85000"/>
+                  </a:schemeClr>
+                </a:solidFill>
+              </a:rPr>
+              <a:t>SPE ID </a:t>
+            </a:r>
             <a:r>
               <a:rPr lang="en-US" sz="1100" dirty="0">
                 <a:solidFill>
                   <a:srgbClr val="4FC3C3"/>
                 </a:solidFill>
               </a:rPr>
-              <a:t>SPE 5436014</a:t>
-            </a:r>
+              <a:t>5436014</a:t>
+            </a:r>
+          </a:p>
+          <a:p>
+            <a:r>
+              <a:rPr lang="en-US" sz="1000" dirty="0">
+                <a:solidFill>
+                  <a:schemeClr val="bg1">
+                    <a:lumMod val="85000"/>
+                  </a:schemeClr>
+                </a:solidFill>
+              </a:rPr>
+              <a:t>Presentation, Storytelling &amp; </a:t>
+            </a:r>
+            <a:r>
+              <a:rPr lang="en-US" sz="1000" dirty="0" err="1">
+                <a:solidFill>
+                  <a:schemeClr val="bg1">
+                    <a:lumMod val="85000"/>
+                  </a:schemeClr>
+                </a:solidFill>
+              </a:rPr>
+              <a:t>Visualisation</a:t>
+            </a:r>
+            <a:endParaRPr lang="en-US" sz="1000" dirty="0">
+              <a:solidFill>
+                <a:schemeClr val="bg1">
+                  <a:lumMod val="85000"/>
+                </a:schemeClr>
+              </a:solidFill>
+            </a:endParaRPr>
+          </a:p>
+          <a:p>
             <a:endParaRPr lang="en-US" sz="1250" dirty="0"/>
           </a:p>
         </p:txBody>
@@ -2795,75 +2739,216 @@
           <a:bodyPr wrap="square" lIns="0" tIns="0" rIns="0" bIns="0" rtlCol="0" anchor="ctr"/>
           <a:lstStyle/>
           <a:p>
-            <a:pPr indent="0" marL="0">
-              <a:buNone/>
-            </a:pPr>
+            <a:endParaRPr lang="en-US" sz="1300" b="1" dirty="0">
+              <a:solidFill>
+                <a:srgbClr val="FFFFFF"/>
+              </a:solidFill>
+            </a:endParaRPr>
+          </a:p>
+          <a:p>
+            <a:r>
+              <a:rPr lang="en-US" sz="1300" b="1" dirty="0" err="1">
+                <a:solidFill>
+                  <a:srgbClr val="FFFFFF"/>
+                </a:solidFill>
+              </a:rPr>
+              <a:t>Adejor</a:t>
+            </a:r>
+            <a:r>
+              <a:rPr lang="en-US" sz="1300" b="1" dirty="0">
+                <a:solidFill>
+                  <a:srgbClr val="FFFFFF"/>
+                </a:solidFill>
+              </a:rPr>
+              <a:t> Friday Emmanuel 			</a:t>
+            </a:r>
+            <a:r>
+              <a:rPr lang="en-US" sz="900" dirty="0">
+                <a:solidFill>
+                  <a:schemeClr val="bg1">
+                    <a:lumMod val="85000"/>
+                  </a:schemeClr>
+                </a:solidFill>
+              </a:rPr>
+              <a:t>SPE ID</a:t>
+            </a:r>
+            <a:r>
+              <a:rPr lang="en-US" sz="900" dirty="0">
+                <a:solidFill>
+                  <a:srgbClr val="4FC3C3"/>
+                </a:solidFill>
+              </a:rPr>
+              <a:t> </a:t>
+            </a:r>
+            <a:r>
+              <a:rPr lang="en-US" sz="1100" dirty="0">
+                <a:solidFill>
+                  <a:srgbClr val="4FC3C3"/>
+                </a:solidFill>
+              </a:rPr>
+              <a:t>5510461</a:t>
+            </a:r>
+          </a:p>
+          <a:p>
+            <a:r>
+              <a:rPr lang="en-US" sz="1000" dirty="0">
+                <a:solidFill>
+                  <a:schemeClr val="bg1">
+                    <a:lumMod val="85000"/>
+                  </a:schemeClr>
+                </a:solidFill>
+              </a:rPr>
+              <a:t>Well Scouting &amp; </a:t>
+            </a:r>
+            <a:r>
+              <a:rPr lang="en-US" sz="1000" dirty="0" err="1">
+                <a:solidFill>
+                  <a:schemeClr val="bg1">
+                    <a:lumMod val="85000"/>
+                  </a:schemeClr>
+                </a:solidFill>
+              </a:rPr>
+              <a:t>ThermoGIS</a:t>
+            </a:r>
+            <a:r>
+              <a:rPr lang="en-US" sz="1000" dirty="0">
+                <a:solidFill>
+                  <a:schemeClr val="bg1">
+                    <a:lumMod val="85000"/>
+                  </a:schemeClr>
+                </a:solidFill>
+              </a:rPr>
+              <a:t> </a:t>
+            </a:r>
+            <a:r>
+              <a:rPr lang="en-US" sz="1000" dirty="0" err="1">
+                <a:solidFill>
+                  <a:schemeClr val="bg1">
+                    <a:lumMod val="85000"/>
+                  </a:schemeClr>
+                </a:solidFill>
+              </a:rPr>
+              <a:t>Characterisation</a:t>
+            </a:r>
+            <a:endParaRPr lang="en-US" sz="1000" dirty="0">
+              <a:solidFill>
+                <a:schemeClr val="bg1">
+                  <a:lumMod val="85000"/>
+                </a:schemeClr>
+              </a:solidFill>
+            </a:endParaRPr>
+          </a:p>
+          <a:p>
+            <a:endParaRPr lang="en-US" sz="1250" dirty="0"/>
+          </a:p>
+        </p:txBody>
+      </p:sp>
+      <p:sp>
+        <p:nvSpPr>
+          <p:cNvPr id="21" name="Text 19"/>
+          <p:cNvSpPr/>
+          <p:nvPr/>
+        </p:nvSpPr>
+        <p:spPr>
+          <a:xfrm>
+            <a:off x="1005840" y="5340096"/>
+            <a:ext cx="4494628" cy="365760"/>
+          </a:xfrm>
+          <a:prstGeom prst="rect">
+            <a:avLst/>
+          </a:prstGeom>
+          <a:noFill/>
+          <a:ln/>
+        </p:spPr>
+        <p:txBody>
+          <a:bodyPr wrap="square" lIns="0" tIns="0" rIns="0" bIns="0" rtlCol="0" anchor="ctr"/>
+          <a:lstStyle/>
+          <a:p>
+            <a:pPr marL="0" indent="0">
+              <a:buNone/>
+            </a:pPr>
+            <a:endParaRPr lang="en-US" sz="1250" b="1" dirty="0">
+              <a:solidFill>
+                <a:srgbClr val="FFFFFF"/>
+              </a:solidFill>
+            </a:endParaRPr>
+          </a:p>
+          <a:p>
+            <a:r>
+              <a:rPr lang="en-US" sz="1300" b="1" dirty="0">
+                <a:solidFill>
+                  <a:srgbClr val="FFFFFF"/>
+                </a:solidFill>
+              </a:rPr>
+              <a:t>Favour Ifeanyichukwu </a:t>
+            </a:r>
+            <a:r>
+              <a:rPr lang="en-US" sz="1300" b="1" dirty="0" err="1">
+                <a:solidFill>
+                  <a:srgbClr val="FFFFFF"/>
+                </a:solidFill>
+              </a:rPr>
+              <a:t>Ogboi</a:t>
+            </a:r>
+            <a:r>
+              <a:rPr lang="en-US" sz="1300" b="1" dirty="0">
+                <a:solidFill>
+                  <a:srgbClr val="FFFFFF"/>
+                </a:solidFill>
+              </a:rPr>
+              <a:t> </a:t>
+            </a:r>
             <a:r>
               <a:rPr lang="en-US" sz="1250" b="1" dirty="0">
                 <a:solidFill>
                   <a:srgbClr val="FFFFFF"/>
                 </a:solidFill>
               </a:rPr>
-              <a:t>Adejor Friday Emmanuel   </a:t>
-            </a:r>
-            <a:pPr indent="0" marL="0">
-              <a:buNone/>
-            </a:pPr>
+              <a:t>		</a:t>
+            </a:r>
+            <a:r>
+              <a:rPr lang="en-US" sz="900" dirty="0">
+                <a:solidFill>
+                  <a:schemeClr val="bg1">
+                    <a:lumMod val="85000"/>
+                  </a:schemeClr>
+                </a:solidFill>
+              </a:rPr>
+              <a:t>SPE ID</a:t>
+            </a:r>
+            <a:r>
+              <a:rPr lang="en-US" sz="900" dirty="0">
+                <a:solidFill>
+                  <a:srgbClr val="4FC3C3"/>
+                </a:solidFill>
+              </a:rPr>
+              <a:t> </a:t>
+            </a:r>
             <a:r>
               <a:rPr lang="en-US" sz="1100" dirty="0">
                 <a:solidFill>
                   <a:srgbClr val="4FC3C3"/>
                 </a:solidFill>
               </a:rPr>
-              <a:t>SPE 5510461</a:t>
-            </a:r>
-            <a:endParaRPr lang="en-US" sz="1250" dirty="0"/>
-          </a:p>
-        </p:txBody>
-      </p:sp>
-      <p:sp>
-        <p:nvSpPr>
-          <p:cNvPr id="21" name="Text 19"/>
-          <p:cNvSpPr/>
-          <p:nvPr/>
-        </p:nvSpPr>
-        <p:spPr>
-          <a:xfrm>
-            <a:off x="1005840" y="5340096"/>
-            <a:ext cx="5029200" cy="365760"/>
-          </a:xfrm>
-          <a:prstGeom prst="rect">
-            <a:avLst/>
-          </a:prstGeom>
-          <a:noFill/>
-          <a:ln/>
-        </p:spPr>
-        <p:txBody>
-          <a:bodyPr wrap="square" lIns="0" tIns="0" rIns="0" bIns="0" rtlCol="0" anchor="ctr"/>
-          <a:lstStyle/>
-          <a:p>
-            <a:pPr indent="0" marL="0">
-              <a:buNone/>
-            </a:pPr>
-            <a:r>
-              <a:rPr lang="en-US" sz="1250" b="1" dirty="0">
-                <a:solidFill>
-                  <a:srgbClr val="FFFFFF"/>
-                </a:solidFill>
-              </a:rPr>
-              <a:t>Favour Ifeanyichukwu Ogboi   </a:t>
-            </a:r>
-            <a:pPr indent="0" marL="0">
-              <a:buNone/>
-            </a:pPr>
-            <a:r>
-              <a:rPr lang="en-US" sz="1100" dirty="0">
-                <a:solidFill>
-                  <a:srgbClr val="4FC3C3"/>
-                </a:solidFill>
-              </a:rPr>
-              <a:t>SPE 5898562</a:t>
-            </a:r>
+              <a:t>5898562</a:t>
+            </a:r>
+          </a:p>
+          <a:p>
+            <a:r>
+              <a:rPr lang="en-US" sz="1000" dirty="0">
+                <a:solidFill>
+                  <a:schemeClr val="bg1">
+                    <a:lumMod val="85000"/>
+                  </a:schemeClr>
+                </a:solidFill>
+              </a:rPr>
+              <a:t>Data Engineering &amp; Economic Modelling</a:t>
+            </a:r>
+          </a:p>
+          <a:p>
+            <a:pPr marL="0" indent="0">
+              <a:buNone/>
+            </a:pPr>
             <a:endParaRPr lang="en-US" sz="1250" dirty="0"/>
           </a:p>
         </p:txBody>
@@ -2889,7 +2974,7 @@
           <a:bodyPr wrap="square" lIns="0" tIns="0" rIns="0" bIns="0" rtlCol="0" anchor="ctr"/>
           <a:lstStyle/>
           <a:p>
-            <a:pPr indent="0" marL="0">
+            <a:pPr marL="0" indent="0">
               <a:buNone/>
             </a:pPr>
             <a:r>
@@ -2923,6 +3008,7 @@
         <a:solidFill>
           <a:srgbClr val="F7FAFB"/>
         </a:solidFill>
+        <a:effectLst/>
       </p:bgPr>
     </p:bg>
     <p:spTree>
@@ -2958,6 +3044,13 @@
           </a:solidFill>
           <a:ln/>
         </p:spPr>
+        <p:txBody>
+          <a:bodyPr/>
+          <a:lstStyle/>
+          <a:p>
+            <a:endParaRPr lang="en-US"/>
+          </a:p>
+        </p:txBody>
       </p:sp>
       <p:sp>
         <p:nvSpPr>
@@ -2980,11 +3073,11 @@
           <a:bodyPr wrap="square" lIns="0" tIns="0" rIns="0" bIns="0" rtlCol="0" anchor="ctr"/>
           <a:lstStyle/>
           <a:p>
-            <a:pPr indent="0" marL="0">
-              <a:buNone/>
-            </a:pPr>
-            <a:r>
-              <a:rPr lang="en-US" sz="1200" b="1" spc="300" kern="0" dirty="0">
+            <a:pPr marL="0" indent="0">
+              <a:buNone/>
+            </a:pPr>
+            <a:r>
+              <a:rPr lang="en-US" sz="1200" b="1" kern="0" spc="300" dirty="0">
                 <a:solidFill>
                   <a:srgbClr val="1C8C8C"/>
                 </a:solidFill>
@@ -3019,7 +3112,7 @@
           <a:bodyPr wrap="square" lIns="0" tIns="0" rIns="0" bIns="0" rtlCol="0" anchor="ctr"/>
           <a:lstStyle/>
           <a:p>
-            <a:pPr indent="0" marL="0">
+            <a:pPr marL="0" indent="0">
               <a:buNone/>
             </a:pPr>
             <a:r>
@@ -3063,24 +3156,31 @@
             <a:prstDash val="solid"/>
           </a:ln>
           <a:effectLst>
-            <a:outerShdw sx="100000" sy="100000" kx="0" ky="0" algn="bl" rotWithShape="0" blurRad="88900" dist="25400" dir="8100000">
+            <a:outerShdw blurRad="88900" dist="25400" dir="8100000" algn="bl" rotWithShape="0">
               <a:srgbClr val="1B2A38">
                 <a:alpha val="14000"/>
               </a:srgbClr>
             </a:outerShdw>
           </a:effectLst>
         </p:spPr>
+        <p:txBody>
+          <a:bodyPr/>
+          <a:lstStyle/>
+          <a:p>
+            <a:endParaRPr lang="en-US"/>
+          </a:p>
+        </p:txBody>
       </p:sp>
       <p:pic>
         <p:nvPicPr>
-          <p:cNvPr id="6" name="Image 0" descr="assets/district_demand_curve.png">    </p:cNvPr>
+          <p:cNvPr id="6" name="Image 0" descr="assets/district_demand_curve.png"/>
           <p:cNvPicPr>
             <a:picLocks noChangeAspect="1"/>
           </p:cNvPicPr>
           <p:nvPr/>
         </p:nvPicPr>
         <p:blipFill>
-          <a:blip r:embed="rId1"/>
+          <a:blip r:embed="rId3"/>
           <a:stretch>
             <a:fillRect/>
           </a:stretch>
@@ -3116,7 +3216,7 @@
           <a:bodyPr wrap="square" lIns="0" tIns="0" rIns="0" bIns="0" rtlCol="0" anchor="ctr"/>
           <a:lstStyle/>
           <a:p>
-            <a:pPr algn="ctr" indent="0" marL="0">
+            <a:pPr marL="0" indent="0" algn="ctr">
               <a:buNone/>
             </a:pPr>
             <a:r>
@@ -3157,24 +3257,31 @@
             <a:prstDash val="solid"/>
           </a:ln>
           <a:effectLst>
-            <a:outerShdw sx="100000" sy="100000" kx="0" ky="0" algn="bl" rotWithShape="0" blurRad="88900" dist="25400" dir="8100000">
+            <a:outerShdw blurRad="88900" dist="25400" dir="8100000" algn="bl" rotWithShape="0">
               <a:srgbClr val="1B2A38">
                 <a:alpha val="14000"/>
               </a:srgbClr>
             </a:outerShdw>
           </a:effectLst>
         </p:spPr>
+        <p:txBody>
+          <a:bodyPr/>
+          <a:lstStyle/>
+          <a:p>
+            <a:endParaRPr lang="en-US"/>
+          </a:p>
+        </p:txBody>
       </p:sp>
       <p:pic>
         <p:nvPicPr>
-          <p:cNvPr id="9" name="Image 1" descr="assets/integrated_system_dispatch.png">    </p:cNvPr>
+          <p:cNvPr id="9" name="Image 1" descr="assets/integrated_system_dispatch.png"/>
           <p:cNvPicPr>
             <a:picLocks noChangeAspect="1"/>
           </p:cNvPicPr>
           <p:nvPr/>
         </p:nvPicPr>
         <p:blipFill>
-          <a:blip r:embed="rId2"/>
+          <a:blip r:embed="rId4"/>
           <a:stretch>
             <a:fillRect/>
           </a:stretch>
@@ -3210,7 +3317,7 @@
           <a:bodyPr wrap="square" lIns="0" tIns="0" rIns="0" bIns="0" rtlCol="0" anchor="ctr"/>
           <a:lstStyle/>
           <a:p>
-            <a:pPr algn="ctr" indent="0" marL="0">
+            <a:pPr marL="0" indent="0" algn="ctr">
               <a:buNone/>
             </a:pPr>
             <a:r>
@@ -3251,13 +3358,20 @@
             <a:prstDash val="solid"/>
           </a:ln>
           <a:effectLst>
-            <a:outerShdw sx="100000" sy="100000" kx="0" ky="0" algn="bl" rotWithShape="0" blurRad="88900" dist="25400" dir="8100000">
+            <a:outerShdw blurRad="88900" dist="25400" dir="8100000" algn="bl" rotWithShape="0">
               <a:srgbClr val="1B2A38">
                 <a:alpha val="14000"/>
               </a:srgbClr>
             </a:outerShdw>
           </a:effectLst>
         </p:spPr>
+        <p:txBody>
+          <a:bodyPr/>
+          <a:lstStyle/>
+          <a:p>
+            <a:endParaRPr lang="en-US"/>
+          </a:p>
+        </p:txBody>
       </p:sp>
       <p:sp>
         <p:nvSpPr>
@@ -3278,6 +3392,13 @@
           </a:solidFill>
           <a:ln/>
         </p:spPr>
+        <p:txBody>
+          <a:bodyPr/>
+          <a:lstStyle/>
+          <a:p>
+            <a:endParaRPr lang="en-US"/>
+          </a:p>
+        </p:txBody>
       </p:sp>
       <p:sp>
         <p:nvSpPr>
@@ -3300,7 +3421,7 @@
           <a:bodyPr wrap="square" lIns="0" tIns="0" rIns="0" bIns="0" rtlCol="0" anchor="ctr"/>
           <a:lstStyle/>
           <a:p>
-            <a:pPr algn="l" indent="0" marL="0">
+            <a:pPr marL="0" indent="0" algn="l">
               <a:buNone/>
             </a:pPr>
             <a:r>
@@ -3339,7 +3460,7 @@
           <a:bodyPr wrap="square" lIns="0" tIns="0" rIns="0" bIns="0" rtlCol="0" anchor="t"/>
           <a:lstStyle/>
           <a:p>
-            <a:pPr algn="l" indent="0" marL="0">
+            <a:pPr marL="0" indent="0" algn="l">
               <a:buNone/>
             </a:pPr>
             <a:r>
@@ -3383,13 +3504,20 @@
             <a:prstDash val="solid"/>
           </a:ln>
           <a:effectLst>
-            <a:outerShdw sx="100000" sy="100000" kx="0" ky="0" algn="bl" rotWithShape="0" blurRad="88900" dist="25400" dir="8100000">
+            <a:outerShdw blurRad="88900" dist="25400" dir="8100000" algn="bl" rotWithShape="0">
               <a:srgbClr val="1B2A38">
                 <a:alpha val="14000"/>
               </a:srgbClr>
             </a:outerShdw>
           </a:effectLst>
         </p:spPr>
+        <p:txBody>
+          <a:bodyPr/>
+          <a:lstStyle/>
+          <a:p>
+            <a:endParaRPr lang="en-US"/>
+          </a:p>
+        </p:txBody>
       </p:sp>
       <p:sp>
         <p:nvSpPr>
@@ -3410,6 +3538,13 @@
           </a:solidFill>
           <a:ln/>
         </p:spPr>
+        <p:txBody>
+          <a:bodyPr/>
+          <a:lstStyle/>
+          <a:p>
+            <a:endParaRPr lang="en-US"/>
+          </a:p>
+        </p:txBody>
       </p:sp>
       <p:sp>
         <p:nvSpPr>
@@ -3432,7 +3567,7 @@
           <a:bodyPr wrap="square" lIns="0" tIns="0" rIns="0" bIns="0" rtlCol="0" anchor="ctr"/>
           <a:lstStyle/>
           <a:p>
-            <a:pPr algn="l" indent="0" marL="0">
+            <a:pPr marL="0" indent="0" algn="l">
               <a:buNone/>
             </a:pPr>
             <a:r>
@@ -3471,7 +3606,7 @@
           <a:bodyPr wrap="square" lIns="0" tIns="0" rIns="0" bIns="0" rtlCol="0" anchor="t"/>
           <a:lstStyle/>
           <a:p>
-            <a:pPr algn="l" indent="0" marL="0">
+            <a:pPr marL="0" indent="0" algn="l">
               <a:buNone/>
             </a:pPr>
             <a:r>
@@ -3515,13 +3650,20 @@
             <a:prstDash val="solid"/>
           </a:ln>
           <a:effectLst>
-            <a:outerShdw sx="100000" sy="100000" kx="0" ky="0" algn="bl" rotWithShape="0" blurRad="88900" dist="25400" dir="8100000">
+            <a:outerShdw blurRad="88900" dist="25400" dir="8100000" algn="bl" rotWithShape="0">
               <a:srgbClr val="1B2A38">
                 <a:alpha val="14000"/>
               </a:srgbClr>
             </a:outerShdw>
           </a:effectLst>
         </p:spPr>
+        <p:txBody>
+          <a:bodyPr/>
+          <a:lstStyle/>
+          <a:p>
+            <a:endParaRPr lang="en-US"/>
+          </a:p>
+        </p:txBody>
       </p:sp>
       <p:sp>
         <p:nvSpPr>
@@ -3542,6 +3684,13 @@
           </a:solidFill>
           <a:ln/>
         </p:spPr>
+        <p:txBody>
+          <a:bodyPr/>
+          <a:lstStyle/>
+          <a:p>
+            <a:endParaRPr lang="en-US"/>
+          </a:p>
+        </p:txBody>
       </p:sp>
       <p:sp>
         <p:nvSpPr>
@@ -3564,7 +3713,7 @@
           <a:bodyPr wrap="square" lIns="0" tIns="0" rIns="0" bIns="0" rtlCol="0" anchor="ctr"/>
           <a:lstStyle/>
           <a:p>
-            <a:pPr algn="l" indent="0" marL="0">
+            <a:pPr marL="0" indent="0" algn="l">
               <a:buNone/>
             </a:pPr>
             <a:r>
@@ -3603,7 +3752,7 @@
           <a:bodyPr wrap="square" lIns="0" tIns="0" rIns="0" bIns="0" rtlCol="0" anchor="t"/>
           <a:lstStyle/>
           <a:p>
-            <a:pPr algn="l" indent="0" marL="0">
+            <a:pPr marL="0" indent="0" algn="l">
               <a:buNone/>
             </a:pPr>
             <a:r>
@@ -3642,7 +3791,7 @@
           <a:bodyPr wrap="square" lIns="0" tIns="0" rIns="0" bIns="0" rtlCol="0" anchor="ctr"/>
           <a:lstStyle/>
           <a:p>
-            <a:pPr algn="r" indent="0" marL="0">
+            <a:pPr marL="0" indent="0" algn="r">
               <a:buNone/>
             </a:pPr>
             <a:r>
@@ -3678,7 +3827,7 @@
           <a:bodyPr wrap="square" lIns="0" tIns="0" rIns="0" bIns="0" rtlCol="0" anchor="ctr"/>
           <a:lstStyle/>
           <a:p>
-            <a:pPr indent="0" marL="0">
+            <a:pPr marL="0" indent="0">
               <a:buNone/>
             </a:pPr>
             <a:r>
@@ -3709,6 +3858,7 @@
         <a:solidFill>
           <a:srgbClr val="F7FAFB"/>
         </a:solidFill>
+        <a:effectLst/>
       </p:bgPr>
     </p:bg>
     <p:spTree>
@@ -3744,6 +3894,13 @@
           </a:solidFill>
           <a:ln/>
         </p:spPr>
+        <p:txBody>
+          <a:bodyPr/>
+          <a:lstStyle/>
+          <a:p>
+            <a:endParaRPr lang="en-US"/>
+          </a:p>
+        </p:txBody>
       </p:sp>
       <p:sp>
         <p:nvSpPr>
@@ -3766,11 +3923,11 @@
           <a:bodyPr wrap="square" lIns="0" tIns="0" rIns="0" bIns="0" rtlCol="0" anchor="ctr"/>
           <a:lstStyle/>
           <a:p>
-            <a:pPr indent="0" marL="0">
-              <a:buNone/>
-            </a:pPr>
-            <a:r>
-              <a:rPr lang="en-US" sz="1200" b="1" spc="300" kern="0" dirty="0">
+            <a:pPr marL="0" indent="0">
+              <a:buNone/>
+            </a:pPr>
+            <a:r>
+              <a:rPr lang="en-US" sz="1200" b="1" kern="0" spc="300" dirty="0">
                 <a:solidFill>
                   <a:srgbClr val="E8B84B"/>
                 </a:solidFill>
@@ -3805,7 +3962,7 @@
           <a:bodyPr wrap="square" lIns="0" tIns="0" rIns="0" bIns="0" rtlCol="0" anchor="ctr"/>
           <a:lstStyle/>
           <a:p>
-            <a:pPr indent="0" marL="0">
+            <a:pPr marL="0" indent="0">
               <a:buNone/>
             </a:pPr>
             <a:r>
@@ -3849,24 +4006,31 @@
             <a:prstDash val="solid"/>
           </a:ln>
           <a:effectLst>
-            <a:outerShdw sx="100000" sy="100000" kx="0" ky="0" algn="bl" rotWithShape="0" blurRad="88900" dist="25400" dir="8100000">
+            <a:outerShdw blurRad="88900" dist="25400" dir="8100000" algn="bl" rotWithShape="0">
               <a:srgbClr val="1B2A38">
                 <a:alpha val="14000"/>
               </a:srgbClr>
             </a:outerShdw>
           </a:effectLst>
         </p:spPr>
+        <p:txBody>
+          <a:bodyPr/>
+          <a:lstStyle/>
+          <a:p>
+            <a:endParaRPr lang="en-US"/>
+          </a:p>
+        </p:txBody>
       </p:sp>
       <p:pic>
         <p:nvPicPr>
-          <p:cNvPr id="6" name="Image 0" descr="assets/capex_opex_breakdown.png">    </p:cNvPr>
+          <p:cNvPr id="6" name="Image 0" descr="assets/capex_opex_breakdown.png"/>
           <p:cNvPicPr>
             <a:picLocks noChangeAspect="1"/>
           </p:cNvPicPr>
           <p:nvPr/>
         </p:nvPicPr>
         <p:blipFill>
-          <a:blip r:embed="rId1"/>
+          <a:blip r:embed="rId3"/>
           <a:stretch>
             <a:fillRect/>
           </a:stretch>
@@ -3902,7 +4066,7 @@
           <a:bodyPr wrap="square" lIns="0" tIns="0" rIns="0" bIns="0" rtlCol="0" anchor="ctr"/>
           <a:lstStyle/>
           <a:p>
-            <a:pPr algn="ctr" indent="0" marL="0">
+            <a:pPr marL="0" indent="0" algn="ctr">
               <a:buNone/>
             </a:pPr>
             <a:r>
@@ -3938,6 +4102,13 @@
           </a:solidFill>
           <a:ln/>
         </p:spPr>
+        <p:txBody>
+          <a:bodyPr/>
+          <a:lstStyle/>
+          <a:p>
+            <a:endParaRPr lang="en-US"/>
+          </a:p>
+        </p:txBody>
       </p:sp>
       <p:sp>
         <p:nvSpPr>
@@ -3960,7 +4131,7 @@
           <a:bodyPr wrap="square" lIns="0" tIns="0" rIns="0" bIns="0" rtlCol="0" anchor="ctr"/>
           <a:lstStyle/>
           <a:p>
-            <a:pPr indent="0" marL="0">
+            <a:pPr marL="0" indent="0">
               <a:lnSpc>
                 <a:spcPct val="102000"/>
               </a:lnSpc>
@@ -3974,12 +4145,6 @@
               </a:rPr>
               <a:t>Depth-based drilling:  </a:t>
             </a:r>
-            <a:pPr indent="0" marL="0">
-              <a:lnSpc>
-                <a:spcPct val="102000"/>
-              </a:lnSpc>
-              <a:buNone/>
-            </a:pPr>
             <a:r>
               <a:rPr lang="en-US" sz="1100" dirty="0">
                 <a:solidFill>
@@ -4018,13 +4183,20 @@
             <a:prstDash val="solid"/>
           </a:ln>
           <a:effectLst>
-            <a:outerShdw sx="100000" sy="100000" kx="0" ky="0" algn="bl" rotWithShape="0" blurRad="88900" dist="25400" dir="8100000">
+            <a:outerShdw blurRad="88900" dist="25400" dir="8100000" algn="bl" rotWithShape="0">
               <a:srgbClr val="1B2A38">
                 <a:alpha val="14000"/>
               </a:srgbClr>
             </a:outerShdw>
           </a:effectLst>
         </p:spPr>
+        <p:txBody>
+          <a:bodyPr/>
+          <a:lstStyle/>
+          <a:p>
+            <a:endParaRPr lang="en-US"/>
+          </a:p>
+        </p:txBody>
       </p:sp>
       <p:sp>
         <p:nvSpPr>
@@ -4045,6 +4217,13 @@
           </a:solidFill>
           <a:ln/>
         </p:spPr>
+        <p:txBody>
+          <a:bodyPr/>
+          <a:lstStyle/>
+          <a:p>
+            <a:endParaRPr lang="en-US"/>
+          </a:p>
+        </p:txBody>
       </p:sp>
       <p:sp>
         <p:nvSpPr>
@@ -4067,7 +4246,7 @@
           <a:bodyPr wrap="square" lIns="0" tIns="0" rIns="0" bIns="0" rtlCol="0" anchor="ctr"/>
           <a:lstStyle/>
           <a:p>
-            <a:pPr algn="l" indent="0" marL="0">
+            <a:pPr marL="0" indent="0" algn="l">
               <a:buNone/>
             </a:pPr>
             <a:r>
@@ -4106,7 +4285,7 @@
           <a:bodyPr wrap="square" lIns="0" tIns="0" rIns="0" bIns="0" rtlCol="0" anchor="t"/>
           <a:lstStyle/>
           <a:p>
-            <a:pPr algn="l" indent="0" marL="0">
+            <a:pPr marL="0" indent="0" algn="l">
               <a:buNone/>
             </a:pPr>
             <a:r>
@@ -4150,13 +4329,20 @@
             <a:prstDash val="solid"/>
           </a:ln>
           <a:effectLst>
-            <a:outerShdw sx="100000" sy="100000" kx="0" ky="0" algn="bl" rotWithShape="0" blurRad="88900" dist="25400" dir="8100000">
+            <a:outerShdw blurRad="88900" dist="25400" dir="8100000" algn="bl" rotWithShape="0">
               <a:srgbClr val="1B2A38">
                 <a:alpha val="14000"/>
               </a:srgbClr>
             </a:outerShdw>
           </a:effectLst>
         </p:spPr>
+        <p:txBody>
+          <a:bodyPr/>
+          <a:lstStyle/>
+          <a:p>
+            <a:endParaRPr lang="en-US"/>
+          </a:p>
+        </p:txBody>
       </p:sp>
       <p:sp>
         <p:nvSpPr>
@@ -4177,6 +4363,13 @@
           </a:solidFill>
           <a:ln/>
         </p:spPr>
+        <p:txBody>
+          <a:bodyPr/>
+          <a:lstStyle/>
+          <a:p>
+            <a:endParaRPr lang="en-US"/>
+          </a:p>
+        </p:txBody>
       </p:sp>
       <p:sp>
         <p:nvSpPr>
@@ -4199,7 +4392,7 @@
           <a:bodyPr wrap="square" lIns="0" tIns="0" rIns="0" bIns="0" rtlCol="0" anchor="ctr"/>
           <a:lstStyle/>
           <a:p>
-            <a:pPr algn="l" indent="0" marL="0">
+            <a:pPr marL="0" indent="0" algn="l">
               <a:buNone/>
             </a:pPr>
             <a:r>
@@ -4238,7 +4431,7 @@
           <a:bodyPr wrap="square" lIns="0" tIns="0" rIns="0" bIns="0" rtlCol="0" anchor="t"/>
           <a:lstStyle/>
           <a:p>
-            <a:pPr algn="l" indent="0" marL="0">
+            <a:pPr marL="0" indent="0" algn="l">
               <a:buNone/>
             </a:pPr>
             <a:r>
@@ -4282,13 +4475,20 @@
             <a:prstDash val="solid"/>
           </a:ln>
           <a:effectLst>
-            <a:outerShdw sx="100000" sy="100000" kx="0" ky="0" algn="bl" rotWithShape="0" blurRad="88900" dist="25400" dir="8100000">
+            <a:outerShdw blurRad="88900" dist="25400" dir="8100000" algn="bl" rotWithShape="0">
               <a:srgbClr val="1B2A38">
                 <a:alpha val="14000"/>
               </a:srgbClr>
             </a:outerShdw>
           </a:effectLst>
         </p:spPr>
+        <p:txBody>
+          <a:bodyPr/>
+          <a:lstStyle/>
+          <a:p>
+            <a:endParaRPr lang="en-US"/>
+          </a:p>
+        </p:txBody>
       </p:sp>
       <p:sp>
         <p:nvSpPr>
@@ -4309,6 +4509,13 @@
           </a:solidFill>
           <a:ln/>
         </p:spPr>
+        <p:txBody>
+          <a:bodyPr/>
+          <a:lstStyle/>
+          <a:p>
+            <a:endParaRPr lang="en-US"/>
+          </a:p>
+        </p:txBody>
       </p:sp>
       <p:sp>
         <p:nvSpPr>
@@ -4331,7 +4538,7 @@
           <a:bodyPr wrap="square" lIns="0" tIns="0" rIns="0" bIns="0" rtlCol="0" anchor="ctr"/>
           <a:lstStyle/>
           <a:p>
-            <a:pPr algn="l" indent="0" marL="0">
+            <a:pPr marL="0" indent="0" algn="l">
               <a:buNone/>
             </a:pPr>
             <a:r>
@@ -4370,7 +4577,7 @@
           <a:bodyPr wrap="square" lIns="0" tIns="0" rIns="0" bIns="0" rtlCol="0" anchor="t"/>
           <a:lstStyle/>
           <a:p>
-            <a:pPr algn="l" indent="0" marL="0">
+            <a:pPr marL="0" indent="0" algn="l">
               <a:buNone/>
             </a:pPr>
             <a:r>
@@ -4409,7 +4616,7 @@
           <a:bodyPr wrap="square" lIns="0" tIns="0" rIns="0" bIns="0" rtlCol="0" anchor="ctr"/>
           <a:lstStyle/>
           <a:p>
-            <a:pPr algn="r" indent="0" marL="0">
+            <a:pPr marL="0" indent="0" algn="r">
               <a:buNone/>
             </a:pPr>
             <a:r>
@@ -4445,7 +4652,7 @@
           <a:bodyPr wrap="square" lIns="0" tIns="0" rIns="0" bIns="0" rtlCol="0" anchor="ctr"/>
           <a:lstStyle/>
           <a:p>
-            <a:pPr indent="0" marL="0">
+            <a:pPr marL="0" indent="0">
               <a:buNone/>
             </a:pPr>
             <a:r>
@@ -4476,6 +4683,7 @@
         <a:solidFill>
           <a:srgbClr val="F7FAFB"/>
         </a:solidFill>
+        <a:effectLst/>
       </p:bgPr>
     </p:bg>
     <p:spTree>
@@ -4511,6 +4719,13 @@
           </a:solidFill>
           <a:ln/>
         </p:spPr>
+        <p:txBody>
+          <a:bodyPr/>
+          <a:lstStyle/>
+          <a:p>
+            <a:endParaRPr lang="en-US"/>
+          </a:p>
+        </p:txBody>
       </p:sp>
       <p:sp>
         <p:nvSpPr>
@@ -4533,11 +4748,11 @@
           <a:bodyPr wrap="square" lIns="0" tIns="0" rIns="0" bIns="0" rtlCol="0" anchor="ctr"/>
           <a:lstStyle/>
           <a:p>
-            <a:pPr indent="0" marL="0">
-              <a:buNone/>
-            </a:pPr>
-            <a:r>
-              <a:rPr lang="en-US" sz="1200" b="1" spc="300" kern="0" dirty="0">
+            <a:pPr marL="0" indent="0">
+              <a:buNone/>
+            </a:pPr>
+            <a:r>
+              <a:rPr lang="en-US" sz="1200" b="1" kern="0" spc="300" dirty="0">
                 <a:solidFill>
                   <a:srgbClr val="E8B84B"/>
                 </a:solidFill>
@@ -4572,7 +4787,7 @@
           <a:bodyPr wrap="square" lIns="0" tIns="0" rIns="0" bIns="0" rtlCol="0" anchor="ctr"/>
           <a:lstStyle/>
           <a:p>
-            <a:pPr indent="0" marL="0">
+            <a:pPr marL="0" indent="0">
               <a:buNone/>
             </a:pPr>
             <a:r>
@@ -4616,24 +4831,31 @@
             <a:prstDash val="solid"/>
           </a:ln>
           <a:effectLst>
-            <a:outerShdw sx="100000" sy="100000" kx="0" ky="0" algn="bl" rotWithShape="0" blurRad="88900" dist="25400" dir="8100000">
+            <a:outerShdw blurRad="88900" dist="25400" dir="8100000" algn="bl" rotWithShape="0">
               <a:srgbClr val="1B2A38">
                 <a:alpha val="14000"/>
               </a:srgbClr>
             </a:outerShdw>
           </a:effectLst>
         </p:spPr>
+        <p:txBody>
+          <a:bodyPr/>
+          <a:lstStyle/>
+          <a:p>
+            <a:endParaRPr lang="en-US"/>
+          </a:p>
+        </p:txBody>
       </p:sp>
       <p:pic>
         <p:nvPicPr>
-          <p:cNvPr id="6" name="Image 0" descr="assets/monte_carlo_lcoe.png">    </p:cNvPr>
+          <p:cNvPr id="6" name="Image 0" descr="assets/monte_carlo_lcoe.png"/>
           <p:cNvPicPr>
             <a:picLocks noChangeAspect="1"/>
           </p:cNvPicPr>
           <p:nvPr/>
         </p:nvPicPr>
         <p:blipFill>
-          <a:blip r:embed="rId1"/>
+          <a:blip r:embed="rId3"/>
           <a:stretch>
             <a:fillRect/>
           </a:stretch>
@@ -4669,7 +4891,7 @@
           <a:bodyPr wrap="square" lIns="0" tIns="0" rIns="0" bIns="0" rtlCol="0" anchor="ctr"/>
           <a:lstStyle/>
           <a:p>
-            <a:pPr algn="ctr" indent="0" marL="0">
+            <a:pPr marL="0" indent="0" algn="ctr">
               <a:buNone/>
             </a:pPr>
             <a:r>
@@ -4710,24 +4932,31 @@
             <a:prstDash val="solid"/>
           </a:ln>
           <a:effectLst>
-            <a:outerShdw sx="100000" sy="100000" kx="0" ky="0" algn="bl" rotWithShape="0" blurRad="88900" dist="25400" dir="8100000">
+            <a:outerShdw blurRad="88900" dist="25400" dir="8100000" algn="bl" rotWithShape="0">
               <a:srgbClr val="1B2A38">
                 <a:alpha val="14000"/>
               </a:srgbClr>
             </a:outerShdw>
           </a:effectLst>
         </p:spPr>
+        <p:txBody>
+          <a:bodyPr/>
+          <a:lstStyle/>
+          <a:p>
+            <a:endParaRPr lang="en-US"/>
+          </a:p>
+        </p:txBody>
       </p:sp>
       <p:pic>
         <p:nvPicPr>
-          <p:cNvPr id="9" name="Image 1" descr="assets/tornado_sensitivity.png">    </p:cNvPr>
+          <p:cNvPr id="9" name="Image 1" descr="assets/tornado_sensitivity.png"/>
           <p:cNvPicPr>
             <a:picLocks noChangeAspect="1"/>
           </p:cNvPicPr>
           <p:nvPr/>
         </p:nvPicPr>
         <p:blipFill>
-          <a:blip r:embed="rId2"/>
+          <a:blip r:embed="rId4"/>
           <a:stretch>
             <a:fillRect/>
           </a:stretch>
@@ -4763,7 +4992,7 @@
           <a:bodyPr wrap="square" lIns="0" tIns="0" rIns="0" bIns="0" rtlCol="0" anchor="ctr"/>
           <a:lstStyle/>
           <a:p>
-            <a:pPr algn="ctr" indent="0" marL="0">
+            <a:pPr marL="0" indent="0" algn="ctr">
               <a:buNone/>
             </a:pPr>
             <a:r>
@@ -4804,13 +5033,20 @@
             <a:prstDash val="solid"/>
           </a:ln>
           <a:effectLst>
-            <a:outerShdw sx="100000" sy="100000" kx="0" ky="0" algn="bl" rotWithShape="0" blurRad="88900" dist="25400" dir="8100000">
+            <a:outerShdw blurRad="88900" dist="25400" dir="8100000" algn="bl" rotWithShape="0">
               <a:srgbClr val="1B2A38">
                 <a:alpha val="14000"/>
               </a:srgbClr>
             </a:outerShdw>
           </a:effectLst>
         </p:spPr>
+        <p:txBody>
+          <a:bodyPr/>
+          <a:lstStyle/>
+          <a:p>
+            <a:endParaRPr lang="en-US"/>
+          </a:p>
+        </p:txBody>
       </p:sp>
       <p:sp>
         <p:nvSpPr>
@@ -4833,7 +5069,7 @@
           <a:bodyPr wrap="square" lIns="0" tIns="0" rIns="0" bIns="0" rtlCol="0" anchor="ctr"/>
           <a:lstStyle/>
           <a:p>
-            <a:pPr indent="0" marL="0">
+            <a:pPr marL="0" indent="0">
               <a:buNone/>
             </a:pPr>
             <a:r>
@@ -4869,7 +5105,7 @@
           <a:bodyPr wrap="square" lIns="0" tIns="0" rIns="0" bIns="0" rtlCol="0" anchor="ctr"/>
           <a:lstStyle/>
           <a:p>
-            <a:pPr indent="0" marL="0">
+            <a:pPr marL="0" indent="0">
               <a:buNone/>
             </a:pPr>
             <a:r>
@@ -4908,7 +5144,7 @@
           <a:bodyPr wrap="square" lIns="0" tIns="0" rIns="0" bIns="0" rtlCol="0" anchor="ctr"/>
           <a:lstStyle/>
           <a:p>
-            <a:pPr indent="0" marL="0">
+            <a:pPr marL="0" indent="0">
               <a:buNone/>
             </a:pPr>
             <a:r>
@@ -4949,13 +5185,20 @@
             <a:prstDash val="solid"/>
           </a:ln>
           <a:effectLst>
-            <a:outerShdw sx="100000" sy="100000" kx="0" ky="0" algn="bl" rotWithShape="0" blurRad="88900" dist="25400" dir="8100000">
+            <a:outerShdw blurRad="88900" dist="25400" dir="8100000" algn="bl" rotWithShape="0">
               <a:srgbClr val="1B2A38">
                 <a:alpha val="14000"/>
               </a:srgbClr>
             </a:outerShdw>
           </a:effectLst>
         </p:spPr>
+        <p:txBody>
+          <a:bodyPr/>
+          <a:lstStyle/>
+          <a:p>
+            <a:endParaRPr lang="en-US"/>
+          </a:p>
+        </p:txBody>
       </p:sp>
       <p:sp>
         <p:nvSpPr>
@@ -4978,7 +5221,7 @@
           <a:bodyPr wrap="square" lIns="0" tIns="0" rIns="0" bIns="0" rtlCol="0" anchor="ctr"/>
           <a:lstStyle/>
           <a:p>
-            <a:pPr indent="0" marL="0">
+            <a:pPr marL="0" indent="0">
               <a:buNone/>
             </a:pPr>
             <a:r>
@@ -5014,7 +5257,7 @@
           <a:bodyPr wrap="square" lIns="0" tIns="0" rIns="0" bIns="0" rtlCol="0" anchor="ctr"/>
           <a:lstStyle/>
           <a:p>
-            <a:pPr indent="0" marL="0">
+            <a:pPr marL="0" indent="0">
               <a:buNone/>
             </a:pPr>
             <a:r>
@@ -5053,7 +5296,7 @@
           <a:bodyPr wrap="square" lIns="0" tIns="0" rIns="0" bIns="0" rtlCol="0" anchor="ctr"/>
           <a:lstStyle/>
           <a:p>
-            <a:pPr indent="0" marL="0">
+            <a:pPr marL="0" indent="0">
               <a:buNone/>
             </a:pPr>
             <a:r>
@@ -5094,13 +5337,20 @@
             <a:prstDash val="solid"/>
           </a:ln>
           <a:effectLst>
-            <a:outerShdw sx="100000" sy="100000" kx="0" ky="0" algn="bl" rotWithShape="0" blurRad="88900" dist="25400" dir="8100000">
+            <a:outerShdw blurRad="88900" dist="25400" dir="8100000" algn="bl" rotWithShape="0">
               <a:srgbClr val="1B2A38">
                 <a:alpha val="14000"/>
               </a:srgbClr>
             </a:outerShdw>
           </a:effectLst>
         </p:spPr>
+        <p:txBody>
+          <a:bodyPr/>
+          <a:lstStyle/>
+          <a:p>
+            <a:endParaRPr lang="en-US"/>
+          </a:p>
+        </p:txBody>
       </p:sp>
       <p:sp>
         <p:nvSpPr>
@@ -5123,7 +5373,7 @@
           <a:bodyPr wrap="square" lIns="0" tIns="0" rIns="0" bIns="0" rtlCol="0" anchor="ctr"/>
           <a:lstStyle/>
           <a:p>
-            <a:pPr indent="0" marL="0">
+            <a:pPr marL="0" indent="0">
               <a:buNone/>
             </a:pPr>
             <a:r>
@@ -5159,7 +5409,7 @@
           <a:bodyPr wrap="square" lIns="0" tIns="0" rIns="0" bIns="0" rtlCol="0" anchor="ctr"/>
           <a:lstStyle/>
           <a:p>
-            <a:pPr indent="0" marL="0">
+            <a:pPr marL="0" indent="0">
               <a:buNone/>
             </a:pPr>
             <a:r>
@@ -5198,7 +5448,7 @@
           <a:bodyPr wrap="square" lIns="0" tIns="0" rIns="0" bIns="0" rtlCol="0" anchor="ctr"/>
           <a:lstStyle/>
           <a:p>
-            <a:pPr indent="0" marL="0">
+            <a:pPr marL="0" indent="0">
               <a:buNone/>
             </a:pPr>
             <a:r>
@@ -5234,13 +5484,20 @@
           </a:solidFill>
           <a:ln/>
           <a:effectLst>
-            <a:outerShdw sx="100000" sy="100000" kx="0" ky="0" algn="bl" rotWithShape="0" blurRad="114300" dist="38100" dir="8100000">
+            <a:outerShdw blurRad="114300" dist="38100" dir="8100000" algn="bl" rotWithShape="0">
               <a:srgbClr val="0A1722">
                 <a:alpha val="22000"/>
               </a:srgbClr>
             </a:outerShdw>
           </a:effectLst>
         </p:spPr>
+        <p:txBody>
+          <a:bodyPr/>
+          <a:lstStyle/>
+          <a:p>
+            <a:endParaRPr lang="en-US"/>
+          </a:p>
+        </p:txBody>
       </p:sp>
       <p:sp>
         <p:nvSpPr>
@@ -5263,7 +5520,7 @@
           <a:bodyPr wrap="square" lIns="0" tIns="0" rIns="0" bIns="0" rtlCol="0" anchor="ctr"/>
           <a:lstStyle/>
           <a:p>
-            <a:pPr indent="0" marL="0">
+            <a:pPr marL="0" indent="0">
               <a:lnSpc>
                 <a:spcPct val="105000"/>
               </a:lnSpc>
@@ -5277,12 +5534,6 @@
               </a:rPr>
               <a:t>Why this matters:  </a:t>
             </a:r>
-            <a:pPr indent="0" marL="0">
-              <a:lnSpc>
-                <a:spcPct val="105000"/>
-              </a:lnSpc>
-              <a:buNone/>
-            </a:pPr>
             <a:r>
               <a:rPr lang="en-US" sz="1200" dirty="0">
                 <a:solidFill>
@@ -5316,7 +5567,7 @@
           <a:bodyPr wrap="square" lIns="0" tIns="0" rIns="0" bIns="0" rtlCol="0" anchor="ctr"/>
           <a:lstStyle/>
           <a:p>
-            <a:pPr algn="r" indent="0" marL="0">
+            <a:pPr marL="0" indent="0" algn="r">
               <a:buNone/>
             </a:pPr>
             <a:r>
@@ -5352,7 +5603,7 @@
           <a:bodyPr wrap="square" lIns="0" tIns="0" rIns="0" bIns="0" rtlCol="0" anchor="ctr"/>
           <a:lstStyle/>
           <a:p>
-            <a:pPr indent="0" marL="0">
+            <a:pPr marL="0" indent="0">
               <a:buNone/>
             </a:pPr>
             <a:r>
@@ -5383,6 +5634,7 @@
         <a:solidFill>
           <a:srgbClr val="F7FAFB"/>
         </a:solidFill>
+        <a:effectLst/>
       </p:bgPr>
     </p:bg>
     <p:spTree>
@@ -5418,6 +5670,13 @@
           </a:solidFill>
           <a:ln/>
         </p:spPr>
+        <p:txBody>
+          <a:bodyPr/>
+          <a:lstStyle/>
+          <a:p>
+            <a:endParaRPr lang="en-US"/>
+          </a:p>
+        </p:txBody>
       </p:sp>
       <p:sp>
         <p:nvSpPr>
@@ -5440,11 +5699,11 @@
           <a:bodyPr wrap="square" lIns="0" tIns="0" rIns="0" bIns="0" rtlCol="0" anchor="ctr"/>
           <a:lstStyle/>
           <a:p>
-            <a:pPr indent="0" marL="0">
-              <a:buNone/>
-            </a:pPr>
-            <a:r>
-              <a:rPr lang="en-US" sz="1200" b="1" spc="300" kern="0" dirty="0">
+            <a:pPr marL="0" indent="0">
+              <a:buNone/>
+            </a:pPr>
+            <a:r>
+              <a:rPr lang="en-US" sz="1200" b="1" kern="0" spc="300" dirty="0">
                 <a:solidFill>
                   <a:srgbClr val="16395E"/>
                 </a:solidFill>
@@ -5479,7 +5738,7 @@
           <a:bodyPr wrap="square" lIns="0" tIns="0" rIns="0" bIns="0" rtlCol="0" anchor="ctr"/>
           <a:lstStyle/>
           <a:p>
-            <a:pPr indent="0" marL="0">
+            <a:pPr marL="0" indent="0">
               <a:buNone/>
             </a:pPr>
             <a:r>
@@ -5518,7 +5777,7 @@
           <a:bodyPr wrap="square" lIns="0" tIns="0" rIns="0" bIns="0" rtlCol="0" anchor="ctr"/>
           <a:lstStyle/>
           <a:p>
-            <a:pPr indent="0" marL="0">
+            <a:pPr marL="0" indent="0">
               <a:buNone/>
             </a:pPr>
             <a:r>
@@ -5559,13 +5818,20 @@
             <a:prstDash val="solid"/>
           </a:ln>
           <a:effectLst>
-            <a:outerShdw sx="100000" sy="100000" kx="0" ky="0" algn="bl" rotWithShape="0" blurRad="88900" dist="25400" dir="8100000">
+            <a:outerShdw blurRad="88900" dist="25400" dir="8100000" algn="bl" rotWithShape="0">
               <a:srgbClr val="1B2A38">
                 <a:alpha val="14000"/>
               </a:srgbClr>
             </a:outerShdw>
           </a:effectLst>
         </p:spPr>
+        <p:txBody>
+          <a:bodyPr/>
+          <a:lstStyle/>
+          <a:p>
+            <a:endParaRPr lang="en-US"/>
+          </a:p>
+        </p:txBody>
       </p:sp>
       <p:sp>
         <p:nvSpPr>
@@ -5586,24 +5852,31 @@
           </a:solidFill>
           <a:ln/>
           <a:effectLst>
-            <a:outerShdw sx="100000" sy="100000" kx="0" ky="0" algn="bl" rotWithShape="0" blurRad="88900" dist="25400" dir="8100000">
+            <a:outerShdw blurRad="88900" dist="25400" dir="8100000" algn="bl" rotWithShape="0">
               <a:srgbClr val="1B2A38">
                 <a:alpha val="14000"/>
               </a:srgbClr>
             </a:outerShdw>
           </a:effectLst>
         </p:spPr>
+        <p:txBody>
+          <a:bodyPr/>
+          <a:lstStyle/>
+          <a:p>
+            <a:endParaRPr lang="en-US"/>
+          </a:p>
+        </p:txBody>
       </p:sp>
       <p:pic>
         <p:nvPicPr>
-          <p:cNvPr id="8" name="Image 0" descr="preencoded.png">    </p:cNvPr>
+          <p:cNvPr id="8" name="Image 0" descr="preencoded.png"/>
           <p:cNvPicPr>
             <a:picLocks noChangeAspect="1"/>
           </p:cNvPicPr>
           <p:nvPr/>
         </p:nvPicPr>
         <p:blipFill>
-          <a:blip r:embed="rId1"/>
+          <a:blip r:embed="rId3"/>
           <a:stretch>
             <a:fillRect/>
           </a:stretch>
@@ -5639,7 +5912,7 @@
           <a:bodyPr wrap="square" lIns="0" tIns="0" rIns="0" bIns="0" rtlCol="0" anchor="ctr"/>
           <a:lstStyle/>
           <a:p>
-            <a:pPr indent="0" marL="0">
+            <a:pPr marL="0" indent="0">
               <a:buNone/>
             </a:pPr>
             <a:r>
@@ -5675,7 +5948,7 @@
           <a:bodyPr wrap="square" lIns="0" tIns="0" rIns="0" bIns="0" rtlCol="0" anchor="t"/>
           <a:lstStyle/>
           <a:p>
-            <a:pPr indent="0" marL="0">
+            <a:pPr marL="0" indent="0">
               <a:lnSpc>
                 <a:spcPct val="102000"/>
               </a:lnSpc>
@@ -5689,19 +5962,60 @@
               </a:rPr>
               <a:t>•  No coupled reservoir simulation — </a:t>
             </a:r>
-            <a:pPr indent="0" marL="0">
+            <a:r>
+              <a:rPr lang="en-US" sz="1150" dirty="0">
+                <a:solidFill>
+                  <a:srgbClr val="5C7080"/>
+                </a:solidFill>
+              </a:rPr>
+              <a:t>steady-state flow assumed; thermal drawdown over time not modelled.</a:t>
+            </a:r>
+            <a:endParaRPr lang="en-US" sz="1150" dirty="0"/>
+          </a:p>
+        </p:txBody>
+      </p:sp>
+      <p:sp>
+        <p:nvSpPr>
+          <p:cNvPr id="11" name="Text 8"/>
+          <p:cNvSpPr/>
+          <p:nvPr/>
+        </p:nvSpPr>
+        <p:spPr>
+          <a:xfrm>
+            <a:off x="914400" y="3419856"/>
+            <a:ext cx="5074920" cy="640080"/>
+          </a:xfrm>
+          <a:prstGeom prst="rect">
+            <a:avLst/>
+          </a:prstGeom>
+          <a:noFill/>
+          <a:ln/>
+        </p:spPr>
+        <p:txBody>
+          <a:bodyPr wrap="square" lIns="0" tIns="0" rIns="0" bIns="0" rtlCol="0" anchor="t"/>
+          <a:lstStyle/>
+          <a:p>
+            <a:pPr marL="0" indent="0">
               <a:lnSpc>
                 <a:spcPct val="102000"/>
               </a:lnSpc>
               <a:buNone/>
             </a:pPr>
             <a:r>
+              <a:rPr lang="en-US" sz="1150" b="1" dirty="0">
+                <a:solidFill>
+                  <a:srgbClr val="0E2A47"/>
+                </a:solidFill>
+              </a:rPr>
+              <a:t>•  GLA-01 is a hypothetical target — </a:t>
+            </a:r>
+            <a:r>
               <a:rPr lang="en-US" sz="1150" dirty="0">
                 <a:solidFill>
                   <a:srgbClr val="5C7080"/>
                 </a:solidFill>
               </a:rPr>
-              <a:t>steady-state flow assumed; thermal drawdown over time not modelled.</a:t>
+              <a:t>not an existing well — new drilling carries delivery uncertainty.</a:t>
             </a:r>
             <a:endParaRPr lang="en-US" sz="1150" dirty="0"/>
           </a:p>
@@ -5709,13 +6023,13 @@
       </p:sp>
       <p:sp>
         <p:nvSpPr>
-          <p:cNvPr id="11" name="Text 8"/>
-          <p:cNvSpPr/>
-          <p:nvPr/>
-        </p:nvSpPr>
-        <p:spPr>
-          <a:xfrm>
-            <a:off x="914400" y="3419856"/>
+          <p:cNvPr id="12" name="Text 9"/>
+          <p:cNvSpPr/>
+          <p:nvPr/>
+        </p:nvSpPr>
+        <p:spPr>
+          <a:xfrm>
+            <a:off x="914400" y="4096512"/>
             <a:ext cx="5074920" cy="640080"/>
           </a:xfrm>
           <a:prstGeom prst="rect">
@@ -5728,7 +6042,7 @@
           <a:bodyPr wrap="square" lIns="0" tIns="0" rIns="0" bIns="0" rtlCol="0" anchor="t"/>
           <a:lstStyle/>
           <a:p>
-            <a:pPr indent="0" marL="0">
+            <a:pPr marL="0" indent="0">
               <a:lnSpc>
                 <a:spcPct val="102000"/>
               </a:lnSpc>
@@ -5740,21 +6054,62 @@
                   <a:srgbClr val="0E2A47"/>
                 </a:solidFill>
               </a:rPr>
-              <a:t>•  GLA-01 is a hypothetical target — </a:t>
-            </a:r>
-            <a:pPr indent="0" marL="0">
+              <a:t>•  Simplified demand profiles — </a:t>
+            </a:r>
+            <a:r>
+              <a:rPr lang="en-US" sz="1150" dirty="0">
+                <a:solidFill>
+                  <a:srgbClr val="5C7080"/>
+                </a:solidFill>
+              </a:rPr>
+              <a:t>no hourly district consumption data within the challenge framework.</a:t>
+            </a:r>
+            <a:endParaRPr lang="en-US" sz="1150" dirty="0"/>
+          </a:p>
+        </p:txBody>
+      </p:sp>
+      <p:sp>
+        <p:nvSpPr>
+          <p:cNvPr id="13" name="Text 10"/>
+          <p:cNvSpPr/>
+          <p:nvPr/>
+        </p:nvSpPr>
+        <p:spPr>
+          <a:xfrm>
+            <a:off x="914400" y="4773168"/>
+            <a:ext cx="5074920" cy="640080"/>
+          </a:xfrm>
+          <a:prstGeom prst="rect">
+            <a:avLst/>
+          </a:prstGeom>
+          <a:noFill/>
+          <a:ln/>
+        </p:spPr>
+        <p:txBody>
+          <a:bodyPr wrap="square" lIns="0" tIns="0" rIns="0" bIns="0" rtlCol="0" anchor="t"/>
+          <a:lstStyle/>
+          <a:p>
+            <a:pPr marL="0" indent="0">
               <a:lnSpc>
                 <a:spcPct val="102000"/>
               </a:lnSpc>
               <a:buNone/>
             </a:pPr>
             <a:r>
+              <a:rPr lang="en-US" sz="1150" b="1" dirty="0">
+                <a:solidFill>
+                  <a:srgbClr val="0E2A47"/>
+                </a:solidFill>
+              </a:rPr>
+              <a:t>•  ThermoGIS P50 used deterministically — </a:t>
+            </a:r>
+            <a:r>
               <a:rPr lang="en-US" sz="1150" dirty="0">
                 <a:solidFill>
                   <a:srgbClr val="5C7080"/>
                 </a:solidFill>
               </a:rPr>
-              <a:t>not an existing well — new drilling carries delivery uncertainty.</a:t>
+              <a:t>full probabilistic reservoir coupling not implemented.</a:t>
             </a:r>
             <a:endParaRPr lang="en-US" sz="1150" dirty="0"/>
           </a:p>
@@ -5762,13 +6117,13 @@
       </p:sp>
       <p:sp>
         <p:nvSpPr>
-          <p:cNvPr id="12" name="Text 9"/>
-          <p:cNvSpPr/>
-          <p:nvPr/>
-        </p:nvSpPr>
-        <p:spPr>
-          <a:xfrm>
-            <a:off x="914400" y="4096512"/>
+          <p:cNvPr id="14" name="Text 11"/>
+          <p:cNvSpPr/>
+          <p:nvPr/>
+        </p:nvSpPr>
+        <p:spPr>
+          <a:xfrm>
+            <a:off x="914400" y="5449824"/>
             <a:ext cx="5074920" cy="640080"/>
           </a:xfrm>
           <a:prstGeom prst="rect">
@@ -5781,7 +6136,7 @@
           <a:bodyPr wrap="square" lIns="0" tIns="0" rIns="0" bIns="0" rtlCol="0" anchor="t"/>
           <a:lstStyle/>
           <a:p>
-            <a:pPr indent="0" marL="0">
+            <a:pPr marL="0" indent="0">
               <a:lnSpc>
                 <a:spcPct val="102000"/>
               </a:lnSpc>
@@ -5793,120 +6148,8 @@
                   <a:srgbClr val="0E2A47"/>
                 </a:solidFill>
               </a:rPr>
-              <a:t>•  Simplified demand profiles — </a:t>
-            </a:r>
-            <a:pPr indent="0" marL="0">
-              <a:lnSpc>
-                <a:spcPct val="102000"/>
-              </a:lnSpc>
-              <a:buNone/>
-            </a:pPr>
-            <a:r>
-              <a:rPr lang="en-US" sz="1150" dirty="0">
-                <a:solidFill>
-                  <a:srgbClr val="5C7080"/>
-                </a:solidFill>
-              </a:rPr>
-              <a:t>no hourly district consumption data within the challenge framework.</a:t>
-            </a:r>
-            <a:endParaRPr lang="en-US" sz="1150" dirty="0"/>
-          </a:p>
-        </p:txBody>
-      </p:sp>
-      <p:sp>
-        <p:nvSpPr>
-          <p:cNvPr id="13" name="Text 10"/>
-          <p:cNvSpPr/>
-          <p:nvPr/>
-        </p:nvSpPr>
-        <p:spPr>
-          <a:xfrm>
-            <a:off x="914400" y="4773168"/>
-            <a:ext cx="5074920" cy="640080"/>
-          </a:xfrm>
-          <a:prstGeom prst="rect">
-            <a:avLst/>
-          </a:prstGeom>
-          <a:noFill/>
-          <a:ln/>
-        </p:spPr>
-        <p:txBody>
-          <a:bodyPr wrap="square" lIns="0" tIns="0" rIns="0" bIns="0" rtlCol="0" anchor="t"/>
-          <a:lstStyle/>
-          <a:p>
-            <a:pPr indent="0" marL="0">
-              <a:lnSpc>
-                <a:spcPct val="102000"/>
-              </a:lnSpc>
-              <a:buNone/>
-            </a:pPr>
-            <a:r>
-              <a:rPr lang="en-US" sz="1150" b="1" dirty="0">
-                <a:solidFill>
-                  <a:srgbClr val="0E2A47"/>
-                </a:solidFill>
-              </a:rPr>
-              <a:t>•  ThermoGIS P50 used deterministically — </a:t>
-            </a:r>
-            <a:pPr indent="0" marL="0">
-              <a:lnSpc>
-                <a:spcPct val="102000"/>
-              </a:lnSpc>
-              <a:buNone/>
-            </a:pPr>
-            <a:r>
-              <a:rPr lang="en-US" sz="1150" dirty="0">
-                <a:solidFill>
-                  <a:srgbClr val="5C7080"/>
-                </a:solidFill>
-              </a:rPr>
-              <a:t>full probabilistic reservoir coupling not implemented.</a:t>
-            </a:r>
-            <a:endParaRPr lang="en-US" sz="1150" dirty="0"/>
-          </a:p>
-        </p:txBody>
-      </p:sp>
-      <p:sp>
-        <p:nvSpPr>
-          <p:cNvPr id="14" name="Text 11"/>
-          <p:cNvSpPr/>
-          <p:nvPr/>
-        </p:nvSpPr>
-        <p:spPr>
-          <a:xfrm>
-            <a:off x="914400" y="5449824"/>
-            <a:ext cx="5074920" cy="640080"/>
-          </a:xfrm>
-          <a:prstGeom prst="rect">
-            <a:avLst/>
-          </a:prstGeom>
-          <a:noFill/>
-          <a:ln/>
-        </p:spPr>
-        <p:txBody>
-          <a:bodyPr wrap="square" lIns="0" tIns="0" rIns="0" bIns="0" rtlCol="0" anchor="t"/>
-          <a:lstStyle/>
-          <a:p>
-            <a:pPr indent="0" marL="0">
-              <a:lnSpc>
-                <a:spcPct val="102000"/>
-              </a:lnSpc>
-              <a:buNone/>
-            </a:pPr>
-            <a:r>
-              <a:rPr lang="en-US" sz="1150" b="1" dirty="0">
-                <a:solidFill>
-                  <a:srgbClr val="0E2A47"/>
-                </a:solidFill>
-              </a:rPr>
               <a:t>•  ATES integration is conceptual — </a:t>
             </a:r>
-            <a:pPr indent="0" marL="0">
-              <a:lnSpc>
-                <a:spcPct val="102000"/>
-              </a:lnSpc>
-              <a:buNone/>
-            </a:pPr>
             <a:r>
               <a:rPr lang="en-US" sz="1150" dirty="0">
                 <a:solidFill>
@@ -5940,13 +6183,20 @@
           </a:solidFill>
           <a:ln/>
           <a:effectLst>
-            <a:outerShdw sx="100000" sy="100000" kx="0" ky="0" algn="bl" rotWithShape="0" blurRad="114300" dist="38100" dir="8100000">
+            <a:outerShdw blurRad="114300" dist="38100" dir="8100000" algn="bl" rotWithShape="0">
               <a:srgbClr val="0A1722">
                 <a:alpha val="22000"/>
               </a:srgbClr>
             </a:outerShdw>
           </a:effectLst>
         </p:spPr>
+        <p:txBody>
+          <a:bodyPr/>
+          <a:lstStyle/>
+          <a:p>
+            <a:endParaRPr lang="en-US"/>
+          </a:p>
+        </p:txBody>
       </p:sp>
       <p:sp>
         <p:nvSpPr>
@@ -5967,24 +6217,31 @@
           </a:solidFill>
           <a:ln/>
           <a:effectLst>
-            <a:outerShdw sx="100000" sy="100000" kx="0" ky="0" algn="bl" rotWithShape="0" blurRad="88900" dist="25400" dir="8100000">
+            <a:outerShdw blurRad="88900" dist="25400" dir="8100000" algn="bl" rotWithShape="0">
               <a:srgbClr val="1B2A38">
                 <a:alpha val="14000"/>
               </a:srgbClr>
             </a:outerShdw>
           </a:effectLst>
         </p:spPr>
+        <p:txBody>
+          <a:bodyPr/>
+          <a:lstStyle/>
+          <a:p>
+            <a:endParaRPr lang="en-US"/>
+          </a:p>
+        </p:txBody>
       </p:sp>
       <p:pic>
         <p:nvPicPr>
-          <p:cNvPr id="17" name="Image 1" descr="preencoded.png">    </p:cNvPr>
+          <p:cNvPr id="17" name="Image 1" descr="preencoded.png"/>
           <p:cNvPicPr>
             <a:picLocks noChangeAspect="1"/>
           </p:cNvPicPr>
           <p:nvPr/>
         </p:nvPicPr>
         <p:blipFill>
-          <a:blip r:embed="rId2"/>
+          <a:blip r:embed="rId4"/>
           <a:stretch>
             <a:fillRect/>
           </a:stretch>
@@ -6020,7 +6277,7 @@
           <a:bodyPr wrap="square" lIns="0" tIns="0" rIns="0" bIns="0" rtlCol="0" anchor="ctr"/>
           <a:lstStyle/>
           <a:p>
-            <a:pPr indent="0" marL="0">
+            <a:pPr marL="0" indent="0">
               <a:buNone/>
             </a:pPr>
             <a:r>
@@ -6056,7 +6313,7 @@
           <a:bodyPr wrap="square" lIns="0" tIns="0" rIns="0" bIns="0" rtlCol="0" anchor="t"/>
           <a:lstStyle/>
           <a:p>
-            <a:pPr indent="0" marL="0">
+            <a:pPr marL="0" indent="0">
               <a:lnSpc>
                 <a:spcPct val="100000"/>
               </a:lnSpc>
@@ -6070,19 +6327,60 @@
               </a:rPr>
               <a:t>Brine properties:  </a:t>
             </a:r>
-            <a:pPr indent="0" marL="0">
+            <a:r>
+              <a:rPr lang="en-US" sz="1150" dirty="0">
+                <a:solidFill>
+                  <a:srgbClr val="C7D7E2"/>
+                </a:solidFill>
+              </a:rPr>
+              <a:t>ρ = 1040 kg/m³ · Cp = 4.0 kJ/kg·K</a:t>
+            </a:r>
+            <a:endParaRPr lang="en-US" sz="1150" dirty="0"/>
+          </a:p>
+        </p:txBody>
+      </p:sp>
+      <p:sp>
+        <p:nvSpPr>
+          <p:cNvPr id="20" name="Text 16"/>
+          <p:cNvSpPr/>
+          <p:nvPr/>
+        </p:nvSpPr>
+        <p:spPr>
+          <a:xfrm>
+            <a:off x="6537960" y="3355848"/>
+            <a:ext cx="4846320" cy="548640"/>
+          </a:xfrm>
+          <a:prstGeom prst="rect">
+            <a:avLst/>
+          </a:prstGeom>
+          <a:noFill/>
+          <a:ln/>
+        </p:spPr>
+        <p:txBody>
+          <a:bodyPr wrap="square" lIns="0" tIns="0" rIns="0" bIns="0" rtlCol="0" anchor="t"/>
+          <a:lstStyle/>
+          <a:p>
+            <a:pPr marL="0" indent="0">
               <a:lnSpc>
                 <a:spcPct val="100000"/>
               </a:lnSpc>
               <a:buNone/>
             </a:pPr>
             <a:r>
+              <a:rPr lang="en-US" sz="1150" b="1" dirty="0">
+                <a:solidFill>
+                  <a:srgbClr val="FFFFFF"/>
+                </a:solidFill>
+              </a:rPr>
+              <a:t>Reinjection temperature:  </a:t>
+            </a:r>
+            <a:r>
               <a:rPr lang="en-US" sz="1150" dirty="0">
                 <a:solidFill>
                   <a:srgbClr val="C7D7E2"/>
                 </a:solidFill>
               </a:rPr>
-              <a:t>ρ = 1040 kg/m³ · Cp = 4.0 kJ/kg·K</a:t>
+              <a:t>35–40 °C after heat extraction</a:t>
             </a:r>
             <a:endParaRPr lang="en-US" sz="1150" dirty="0"/>
           </a:p>
@@ -6090,13 +6388,13 @@
       </p:sp>
       <p:sp>
         <p:nvSpPr>
-          <p:cNvPr id="20" name="Text 16"/>
-          <p:cNvSpPr/>
-          <p:nvPr/>
-        </p:nvSpPr>
-        <p:spPr>
-          <a:xfrm>
-            <a:off x="6537960" y="3355848"/>
+          <p:cNvPr id="21" name="Text 17"/>
+          <p:cNvSpPr/>
+          <p:nvPr/>
+        </p:nvSpPr>
+        <p:spPr>
+          <a:xfrm>
+            <a:off x="6537960" y="3922776"/>
             <a:ext cx="4846320" cy="548640"/>
           </a:xfrm>
           <a:prstGeom prst="rect">
@@ -6109,7 +6407,7 @@
           <a:bodyPr wrap="square" lIns="0" tIns="0" rIns="0" bIns="0" rtlCol="0" anchor="t"/>
           <a:lstStyle/>
           <a:p>
-            <a:pPr indent="0" marL="0">
+            <a:pPr marL="0" indent="0">
               <a:lnSpc>
                 <a:spcPct val="100000"/>
               </a:lnSpc>
@@ -6121,21 +6419,62 @@
                   <a:srgbClr val="FFFFFF"/>
                 </a:solidFill>
               </a:rPr>
-              <a:t>Reinjection temperature:  </a:t>
-            </a:r>
-            <a:pPr indent="0" marL="0">
+              <a:t>District regime:  </a:t>
+            </a:r>
+            <a:r>
+              <a:rPr lang="en-US" sz="1150" dirty="0">
+                <a:solidFill>
+                  <a:srgbClr val="C7D7E2"/>
+                </a:solidFill>
+              </a:rPr>
+              <a:t>70 °C supply / 40 °C return</a:t>
+            </a:r>
+            <a:endParaRPr lang="en-US" sz="1150" dirty="0"/>
+          </a:p>
+        </p:txBody>
+      </p:sp>
+      <p:sp>
+        <p:nvSpPr>
+          <p:cNvPr id="22" name="Text 18"/>
+          <p:cNvSpPr/>
+          <p:nvPr/>
+        </p:nvSpPr>
+        <p:spPr>
+          <a:xfrm>
+            <a:off x="6537960" y="4489704"/>
+            <a:ext cx="4846320" cy="548640"/>
+          </a:xfrm>
+          <a:prstGeom prst="rect">
+            <a:avLst/>
+          </a:prstGeom>
+          <a:noFill/>
+          <a:ln/>
+        </p:spPr>
+        <p:txBody>
+          <a:bodyPr wrap="square" lIns="0" tIns="0" rIns="0" bIns="0" rtlCol="0" anchor="t"/>
+          <a:lstStyle/>
+          <a:p>
+            <a:pPr marL="0" indent="0">
               <a:lnSpc>
                 <a:spcPct val="100000"/>
               </a:lnSpc>
               <a:buNone/>
             </a:pPr>
             <a:r>
+              <a:rPr lang="en-US" sz="1150" b="1" dirty="0">
+                <a:solidFill>
+                  <a:srgbClr val="FFFFFF"/>
+                </a:solidFill>
+              </a:rPr>
+              <a:t>Heat pump COP:  </a:t>
+            </a:r>
+            <a:r>
               <a:rPr lang="en-US" sz="1150" dirty="0">
                 <a:solidFill>
                   <a:srgbClr val="C7D7E2"/>
                 </a:solidFill>
               </a:rPr>
-              <a:t>35–40 °C after heat extraction</a:t>
+              <a:t>2.25 (68→70 °C upgrade)</a:t>
             </a:r>
             <a:endParaRPr lang="en-US" sz="1150" dirty="0"/>
           </a:p>
@@ -6143,13 +6482,13 @@
       </p:sp>
       <p:sp>
         <p:nvSpPr>
-          <p:cNvPr id="21" name="Text 17"/>
-          <p:cNvSpPr/>
-          <p:nvPr/>
-        </p:nvSpPr>
-        <p:spPr>
-          <a:xfrm>
-            <a:off x="6537960" y="3922776"/>
+          <p:cNvPr id="23" name="Text 19"/>
+          <p:cNvSpPr/>
+          <p:nvPr/>
+        </p:nvSpPr>
+        <p:spPr>
+          <a:xfrm>
+            <a:off x="6537960" y="5056632"/>
             <a:ext cx="4846320" cy="548640"/>
           </a:xfrm>
           <a:prstGeom prst="rect">
@@ -6162,7 +6501,7 @@
           <a:bodyPr wrap="square" lIns="0" tIns="0" rIns="0" bIns="0" rtlCol="0" anchor="t"/>
           <a:lstStyle/>
           <a:p>
-            <a:pPr indent="0" marL="0">
+            <a:pPr marL="0" indent="0">
               <a:lnSpc>
                 <a:spcPct val="100000"/>
               </a:lnSpc>
@@ -6174,173 +6513,55 @@
                   <a:srgbClr val="FFFFFF"/>
                 </a:solidFill>
               </a:rPr>
-              <a:t>District regime:  </a:t>
-            </a:r>
-            <a:pPr indent="0" marL="0">
+              <a:t>Economic lifetime:  </a:t>
+            </a:r>
+            <a:r>
+              <a:rPr lang="en-US" sz="1150" dirty="0">
+                <a:solidFill>
+                  <a:srgbClr val="C7D7E2"/>
+                </a:solidFill>
+              </a:rPr>
+              <a:t>15 years, 6 % discount rate</a:t>
+            </a:r>
+            <a:endParaRPr lang="en-US" sz="1150" dirty="0"/>
+          </a:p>
+        </p:txBody>
+      </p:sp>
+      <p:sp>
+        <p:nvSpPr>
+          <p:cNvPr id="24" name="Text 20"/>
+          <p:cNvSpPr/>
+          <p:nvPr/>
+        </p:nvSpPr>
+        <p:spPr>
+          <a:xfrm>
+            <a:off x="6537960" y="5623560"/>
+            <a:ext cx="4846320" cy="548640"/>
+          </a:xfrm>
+          <a:prstGeom prst="rect">
+            <a:avLst/>
+          </a:prstGeom>
+          <a:noFill/>
+          <a:ln/>
+        </p:spPr>
+        <p:txBody>
+          <a:bodyPr wrap="square" lIns="0" tIns="0" rIns="0" bIns="0" rtlCol="0" anchor="t"/>
+          <a:lstStyle/>
+          <a:p>
+            <a:pPr marL="0" indent="0">
               <a:lnSpc>
                 <a:spcPct val="100000"/>
               </a:lnSpc>
               <a:buNone/>
             </a:pPr>
             <a:r>
-              <a:rPr lang="en-US" sz="1150" dirty="0">
-                <a:solidFill>
-                  <a:srgbClr val="C7D7E2"/>
-                </a:solidFill>
-              </a:rPr>
-              <a:t>70 °C supply / 40 °C return</a:t>
-            </a:r>
-            <a:endParaRPr lang="en-US" sz="1150" dirty="0"/>
-          </a:p>
-        </p:txBody>
-      </p:sp>
-      <p:sp>
-        <p:nvSpPr>
-          <p:cNvPr id="22" name="Text 18"/>
-          <p:cNvSpPr/>
-          <p:nvPr/>
-        </p:nvSpPr>
-        <p:spPr>
-          <a:xfrm>
-            <a:off x="6537960" y="4489704"/>
-            <a:ext cx="4846320" cy="548640"/>
-          </a:xfrm>
-          <a:prstGeom prst="rect">
-            <a:avLst/>
-          </a:prstGeom>
-          <a:noFill/>
-          <a:ln/>
-        </p:spPr>
-        <p:txBody>
-          <a:bodyPr wrap="square" lIns="0" tIns="0" rIns="0" bIns="0" rtlCol="0" anchor="t"/>
-          <a:lstStyle/>
-          <a:p>
-            <a:pPr indent="0" marL="0">
-              <a:lnSpc>
-                <a:spcPct val="100000"/>
-              </a:lnSpc>
-              <a:buNone/>
-            </a:pPr>
-            <a:r>
               <a:rPr lang="en-US" sz="1150" b="1" dirty="0">
                 <a:solidFill>
                   <a:srgbClr val="FFFFFF"/>
                 </a:solidFill>
               </a:rPr>
-              <a:t>Heat pump COP:  </a:t>
-            </a:r>
-            <a:pPr indent="0" marL="0">
-              <a:lnSpc>
-                <a:spcPct val="100000"/>
-              </a:lnSpc>
-              <a:buNone/>
-            </a:pPr>
-            <a:r>
-              <a:rPr lang="en-US" sz="1150" dirty="0">
-                <a:solidFill>
-                  <a:srgbClr val="C7D7E2"/>
-                </a:solidFill>
-              </a:rPr>
-              <a:t>2.25 (68→70 °C upgrade)</a:t>
-            </a:r>
-            <a:endParaRPr lang="en-US" sz="1150" dirty="0"/>
-          </a:p>
-        </p:txBody>
-      </p:sp>
-      <p:sp>
-        <p:nvSpPr>
-          <p:cNvPr id="23" name="Text 19"/>
-          <p:cNvSpPr/>
-          <p:nvPr/>
-        </p:nvSpPr>
-        <p:spPr>
-          <a:xfrm>
-            <a:off x="6537960" y="5056632"/>
-            <a:ext cx="4846320" cy="548640"/>
-          </a:xfrm>
-          <a:prstGeom prst="rect">
-            <a:avLst/>
-          </a:prstGeom>
-          <a:noFill/>
-          <a:ln/>
-        </p:spPr>
-        <p:txBody>
-          <a:bodyPr wrap="square" lIns="0" tIns="0" rIns="0" bIns="0" rtlCol="0" anchor="t"/>
-          <a:lstStyle/>
-          <a:p>
-            <a:pPr indent="0" marL="0">
-              <a:lnSpc>
-                <a:spcPct val="100000"/>
-              </a:lnSpc>
-              <a:buNone/>
-            </a:pPr>
-            <a:r>
-              <a:rPr lang="en-US" sz="1150" b="1" dirty="0">
-                <a:solidFill>
-                  <a:srgbClr val="FFFFFF"/>
-                </a:solidFill>
-              </a:rPr>
-              <a:t>Economic lifetime:  </a:t>
-            </a:r>
-            <a:pPr indent="0" marL="0">
-              <a:lnSpc>
-                <a:spcPct val="100000"/>
-              </a:lnSpc>
-              <a:buNone/>
-            </a:pPr>
-            <a:r>
-              <a:rPr lang="en-US" sz="1150" dirty="0">
-                <a:solidFill>
-                  <a:srgbClr val="C7D7E2"/>
-                </a:solidFill>
-              </a:rPr>
-              <a:t>15 years, 6 % discount rate</a:t>
-            </a:r>
-            <a:endParaRPr lang="en-US" sz="1150" dirty="0"/>
-          </a:p>
-        </p:txBody>
-      </p:sp>
-      <p:sp>
-        <p:nvSpPr>
-          <p:cNvPr id="24" name="Text 20"/>
-          <p:cNvSpPr/>
-          <p:nvPr/>
-        </p:nvSpPr>
-        <p:spPr>
-          <a:xfrm>
-            <a:off x="6537960" y="5623560"/>
-            <a:ext cx="4846320" cy="548640"/>
-          </a:xfrm>
-          <a:prstGeom prst="rect">
-            <a:avLst/>
-          </a:prstGeom>
-          <a:noFill/>
-          <a:ln/>
-        </p:spPr>
-        <p:txBody>
-          <a:bodyPr wrap="square" lIns="0" tIns="0" rIns="0" bIns="0" rtlCol="0" anchor="t"/>
-          <a:lstStyle/>
-          <a:p>
-            <a:pPr indent="0" marL="0">
-              <a:lnSpc>
-                <a:spcPct val="100000"/>
-              </a:lnSpc>
-              <a:buNone/>
-            </a:pPr>
-            <a:r>
-              <a:rPr lang="en-US" sz="1150" b="1" dirty="0">
-                <a:solidFill>
-                  <a:srgbClr val="FFFFFF"/>
-                </a:solidFill>
-              </a:rPr>
               <a:t>Demand basis:  </a:t>
             </a:r>
-            <a:pPr indent="0" marL="0">
-              <a:lnSpc>
-                <a:spcPct val="100000"/>
-              </a:lnSpc>
-              <a:buNone/>
-            </a:pPr>
             <a:r>
               <a:rPr lang="en-US" sz="1150" dirty="0">
                 <a:solidFill>
@@ -6374,7 +6595,7 @@
           <a:bodyPr wrap="square" lIns="0" tIns="0" rIns="0" bIns="0" rtlCol="0" anchor="ctr"/>
           <a:lstStyle/>
           <a:p>
-            <a:pPr algn="r" indent="0" marL="0">
+            <a:pPr marL="0" indent="0" algn="r">
               <a:buNone/>
             </a:pPr>
             <a:r>
@@ -6410,7 +6631,7 @@
           <a:bodyPr wrap="square" lIns="0" tIns="0" rIns="0" bIns="0" rtlCol="0" anchor="ctr"/>
           <a:lstStyle/>
           <a:p>
-            <a:pPr indent="0" marL="0">
+            <a:pPr marL="0" indent="0">
               <a:buNone/>
             </a:pPr>
             <a:r>
@@ -6441,6 +6662,7 @@
         <a:solidFill>
           <a:srgbClr val="0E2A47"/>
         </a:solidFill>
+        <a:effectLst/>
       </p:bgPr>
     </p:bg>
     <p:spTree>
@@ -6476,6 +6698,13 @@
           </a:solidFill>
           <a:ln/>
         </p:spPr>
+        <p:txBody>
+          <a:bodyPr/>
+          <a:lstStyle/>
+          <a:p>
+            <a:endParaRPr lang="en-US"/>
+          </a:p>
+        </p:txBody>
       </p:sp>
       <p:sp>
         <p:nvSpPr>
@@ -6498,11 +6727,11 @@
           <a:bodyPr wrap="square" lIns="0" tIns="0" rIns="0" bIns="0" rtlCol="0" anchor="ctr"/>
           <a:lstStyle/>
           <a:p>
-            <a:pPr indent="0" marL="0">
-              <a:buNone/>
-            </a:pPr>
-            <a:r>
-              <a:rPr lang="en-US" sz="1200" b="1" spc="300" kern="0" dirty="0">
+            <a:pPr marL="0" indent="0">
+              <a:buNone/>
+            </a:pPr>
+            <a:r>
+              <a:rPr lang="en-US" sz="1200" b="1" kern="0" spc="300" dirty="0">
                 <a:solidFill>
                   <a:srgbClr val="E8B84B"/>
                 </a:solidFill>
@@ -6534,7 +6763,7 @@
           <a:bodyPr wrap="square" lIns="0" tIns="0" rIns="0" bIns="0" rtlCol="0" anchor="ctr"/>
           <a:lstStyle/>
           <a:p>
-            <a:pPr indent="0" marL="0">
+            <a:pPr marL="0" indent="0">
               <a:buNone/>
             </a:pPr>
             <a:r>
@@ -6578,13 +6807,20 @@
             <a:prstDash val="solid"/>
           </a:ln>
           <a:effectLst>
-            <a:outerShdw sx="100000" sy="100000" kx="0" ky="0" algn="bl" rotWithShape="0" blurRad="114300" dist="38100" dir="8100000">
+            <a:outerShdw blurRad="114300" dist="38100" dir="8100000" algn="bl" rotWithShape="0">
               <a:srgbClr val="0A1722">
                 <a:alpha val="22000"/>
               </a:srgbClr>
             </a:outerShdw>
           </a:effectLst>
         </p:spPr>
+        <p:txBody>
+          <a:bodyPr/>
+          <a:lstStyle/>
+          <a:p>
+            <a:endParaRPr lang="en-US"/>
+          </a:p>
+        </p:txBody>
       </p:sp>
       <p:sp>
         <p:nvSpPr>
@@ -6605,24 +6841,31 @@
           </a:solidFill>
           <a:ln/>
           <a:effectLst>
-            <a:outerShdw sx="100000" sy="100000" kx="0" ky="0" algn="bl" rotWithShape="0" blurRad="88900" dist="25400" dir="8100000">
+            <a:outerShdw blurRad="88900" dist="25400" dir="8100000" algn="bl" rotWithShape="0">
               <a:srgbClr val="1B2A38">
                 <a:alpha val="14000"/>
               </a:srgbClr>
             </a:outerShdw>
           </a:effectLst>
         </p:spPr>
+        <p:txBody>
+          <a:bodyPr/>
+          <a:lstStyle/>
+          <a:p>
+            <a:endParaRPr lang="en-US"/>
+          </a:p>
+        </p:txBody>
       </p:sp>
       <p:pic>
         <p:nvPicPr>
-          <p:cNvPr id="7" name="Image 0" descr="preencoded.png">    </p:cNvPr>
+          <p:cNvPr id="7" name="Image 0" descr="preencoded.png"/>
           <p:cNvPicPr>
             <a:picLocks noChangeAspect="1"/>
           </p:cNvPicPr>
           <p:nvPr/>
         </p:nvPicPr>
         <p:blipFill>
-          <a:blip r:embed="rId1"/>
+          <a:blip r:embed="rId3"/>
           <a:stretch>
             <a:fillRect/>
           </a:stretch>
@@ -6658,7 +6901,7 @@
           <a:bodyPr wrap="square" lIns="0" tIns="0" rIns="0" bIns="0" rtlCol="0" anchor="ctr"/>
           <a:lstStyle/>
           <a:p>
-            <a:pPr indent="0" marL="0">
+            <a:pPr marL="0" indent="0">
               <a:lnSpc>
                 <a:spcPct val="95000"/>
               </a:lnSpc>
@@ -6697,7 +6940,7 @@
           <a:bodyPr wrap="square" lIns="0" tIns="0" rIns="0" bIns="0" rtlCol="0" anchor="ctr"/>
           <a:lstStyle/>
           <a:p>
-            <a:pPr indent="0" marL="0">
+            <a:pPr marL="0" indent="0">
               <a:lnSpc>
                 <a:spcPct val="103000"/>
               </a:lnSpc>
@@ -6741,13 +6984,20 @@
             <a:prstDash val="solid"/>
           </a:ln>
           <a:effectLst>
-            <a:outerShdw sx="100000" sy="100000" kx="0" ky="0" algn="bl" rotWithShape="0" blurRad="114300" dist="38100" dir="8100000">
+            <a:outerShdw blurRad="114300" dist="38100" dir="8100000" algn="bl" rotWithShape="0">
               <a:srgbClr val="0A1722">
                 <a:alpha val="22000"/>
               </a:srgbClr>
             </a:outerShdw>
           </a:effectLst>
         </p:spPr>
+        <p:txBody>
+          <a:bodyPr/>
+          <a:lstStyle/>
+          <a:p>
+            <a:endParaRPr lang="en-US"/>
+          </a:p>
+        </p:txBody>
       </p:sp>
       <p:sp>
         <p:nvSpPr>
@@ -6768,24 +7018,31 @@
           </a:solidFill>
           <a:ln/>
           <a:effectLst>
-            <a:outerShdw sx="100000" sy="100000" kx="0" ky="0" algn="bl" rotWithShape="0" blurRad="88900" dist="25400" dir="8100000">
+            <a:outerShdw blurRad="88900" dist="25400" dir="8100000" algn="bl" rotWithShape="0">
               <a:srgbClr val="1B2A38">
                 <a:alpha val="14000"/>
               </a:srgbClr>
             </a:outerShdw>
           </a:effectLst>
         </p:spPr>
+        <p:txBody>
+          <a:bodyPr/>
+          <a:lstStyle/>
+          <a:p>
+            <a:endParaRPr lang="en-US"/>
+          </a:p>
+        </p:txBody>
       </p:sp>
       <p:pic>
         <p:nvPicPr>
-          <p:cNvPr id="12" name="Image 1" descr="preencoded.png">    </p:cNvPr>
+          <p:cNvPr id="12" name="Image 1" descr="preencoded.png"/>
           <p:cNvPicPr>
             <a:picLocks noChangeAspect="1"/>
           </p:cNvPicPr>
           <p:nvPr/>
         </p:nvPicPr>
         <p:blipFill>
-          <a:blip r:embed="rId2"/>
+          <a:blip r:embed="rId4"/>
           <a:stretch>
             <a:fillRect/>
           </a:stretch>
@@ -6821,7 +7078,7 @@
           <a:bodyPr wrap="square" lIns="0" tIns="0" rIns="0" bIns="0" rtlCol="0" anchor="ctr"/>
           <a:lstStyle/>
           <a:p>
-            <a:pPr indent="0" marL="0">
+            <a:pPr marL="0" indent="0">
               <a:lnSpc>
                 <a:spcPct val="95000"/>
               </a:lnSpc>
@@ -6860,7 +7117,7 @@
           <a:bodyPr wrap="square" lIns="0" tIns="0" rIns="0" bIns="0" rtlCol="0" anchor="ctr"/>
           <a:lstStyle/>
           <a:p>
-            <a:pPr indent="0" marL="0">
+            <a:pPr marL="0" indent="0">
               <a:lnSpc>
                 <a:spcPct val="103000"/>
               </a:lnSpc>
@@ -6904,13 +7161,20 @@
             <a:prstDash val="solid"/>
           </a:ln>
           <a:effectLst>
-            <a:outerShdw sx="100000" sy="100000" kx="0" ky="0" algn="bl" rotWithShape="0" blurRad="114300" dist="38100" dir="8100000">
+            <a:outerShdw blurRad="114300" dist="38100" dir="8100000" algn="bl" rotWithShape="0">
               <a:srgbClr val="0A1722">
                 <a:alpha val="22000"/>
               </a:srgbClr>
             </a:outerShdw>
           </a:effectLst>
         </p:spPr>
+        <p:txBody>
+          <a:bodyPr/>
+          <a:lstStyle/>
+          <a:p>
+            <a:endParaRPr lang="en-US"/>
+          </a:p>
+        </p:txBody>
       </p:sp>
       <p:sp>
         <p:nvSpPr>
@@ -6931,24 +7195,31 @@
           </a:solidFill>
           <a:ln/>
           <a:effectLst>
-            <a:outerShdw sx="100000" sy="100000" kx="0" ky="0" algn="bl" rotWithShape="0" blurRad="88900" dist="25400" dir="8100000">
+            <a:outerShdw blurRad="88900" dist="25400" dir="8100000" algn="bl" rotWithShape="0">
               <a:srgbClr val="1B2A38">
                 <a:alpha val="14000"/>
               </a:srgbClr>
             </a:outerShdw>
           </a:effectLst>
         </p:spPr>
+        <p:txBody>
+          <a:bodyPr/>
+          <a:lstStyle/>
+          <a:p>
+            <a:endParaRPr lang="en-US"/>
+          </a:p>
+        </p:txBody>
       </p:sp>
       <p:pic>
         <p:nvPicPr>
-          <p:cNvPr id="17" name="Image 2" descr="preencoded.png">    </p:cNvPr>
+          <p:cNvPr id="17" name="Image 2" descr="preencoded.png"/>
           <p:cNvPicPr>
             <a:picLocks noChangeAspect="1"/>
           </p:cNvPicPr>
           <p:nvPr/>
         </p:nvPicPr>
         <p:blipFill>
-          <a:blip r:embed="rId3"/>
+          <a:blip r:embed="rId5"/>
           <a:stretch>
             <a:fillRect/>
           </a:stretch>
@@ -6984,7 +7255,7 @@
           <a:bodyPr wrap="square" lIns="0" tIns="0" rIns="0" bIns="0" rtlCol="0" anchor="ctr"/>
           <a:lstStyle/>
           <a:p>
-            <a:pPr indent="0" marL="0">
+            <a:pPr marL="0" indent="0">
               <a:lnSpc>
                 <a:spcPct val="95000"/>
               </a:lnSpc>
@@ -7023,7 +7294,7 @@
           <a:bodyPr wrap="square" lIns="0" tIns="0" rIns="0" bIns="0" rtlCol="0" anchor="ctr"/>
           <a:lstStyle/>
           <a:p>
-            <a:pPr indent="0" marL="0">
+            <a:pPr marL="0" indent="0">
               <a:lnSpc>
                 <a:spcPct val="103000"/>
               </a:lnSpc>
@@ -7067,13 +7338,20 @@
             <a:prstDash val="solid"/>
           </a:ln>
           <a:effectLst>
-            <a:outerShdw sx="100000" sy="100000" kx="0" ky="0" algn="bl" rotWithShape="0" blurRad="114300" dist="38100" dir="8100000">
+            <a:outerShdw blurRad="114300" dist="38100" dir="8100000" algn="bl" rotWithShape="0">
               <a:srgbClr val="0A1722">
                 <a:alpha val="22000"/>
               </a:srgbClr>
             </a:outerShdw>
           </a:effectLst>
         </p:spPr>
+        <p:txBody>
+          <a:bodyPr/>
+          <a:lstStyle/>
+          <a:p>
+            <a:endParaRPr lang="en-US"/>
+          </a:p>
+        </p:txBody>
       </p:sp>
       <p:sp>
         <p:nvSpPr>
@@ -7094,24 +7372,31 @@
           </a:solidFill>
           <a:ln/>
           <a:effectLst>
-            <a:outerShdw sx="100000" sy="100000" kx="0" ky="0" algn="bl" rotWithShape="0" blurRad="88900" dist="25400" dir="8100000">
+            <a:outerShdw blurRad="88900" dist="25400" dir="8100000" algn="bl" rotWithShape="0">
               <a:srgbClr val="1B2A38">
                 <a:alpha val="14000"/>
               </a:srgbClr>
             </a:outerShdw>
           </a:effectLst>
         </p:spPr>
+        <p:txBody>
+          <a:bodyPr/>
+          <a:lstStyle/>
+          <a:p>
+            <a:endParaRPr lang="en-US"/>
+          </a:p>
+        </p:txBody>
       </p:sp>
       <p:pic>
         <p:nvPicPr>
-          <p:cNvPr id="22" name="Image 3" descr="preencoded.png">    </p:cNvPr>
+          <p:cNvPr id="22" name="Image 3" descr="preencoded.png"/>
           <p:cNvPicPr>
             <a:picLocks noChangeAspect="1"/>
           </p:cNvPicPr>
           <p:nvPr/>
         </p:nvPicPr>
         <p:blipFill>
-          <a:blip r:embed="rId4"/>
+          <a:blip r:embed="rId6"/>
           <a:stretch>
             <a:fillRect/>
           </a:stretch>
@@ -7147,7 +7432,7 @@
           <a:bodyPr wrap="square" lIns="0" tIns="0" rIns="0" bIns="0" rtlCol="0" anchor="ctr"/>
           <a:lstStyle/>
           <a:p>
-            <a:pPr indent="0" marL="0">
+            <a:pPr marL="0" indent="0">
               <a:lnSpc>
                 <a:spcPct val="95000"/>
               </a:lnSpc>
@@ -7186,7 +7471,7 @@
           <a:bodyPr wrap="square" lIns="0" tIns="0" rIns="0" bIns="0" rtlCol="0" anchor="ctr"/>
           <a:lstStyle/>
           <a:p>
-            <a:pPr indent="0" marL="0">
+            <a:pPr marL="0" indent="0">
               <a:lnSpc>
                 <a:spcPct val="103000"/>
               </a:lnSpc>
@@ -7225,7 +7510,7 @@
           <a:bodyPr wrap="square" lIns="0" tIns="0" rIns="0" bIns="0" rtlCol="0" anchor="ctr"/>
           <a:lstStyle/>
           <a:p>
-            <a:pPr algn="r" indent="0" marL="0">
+            <a:pPr marL="0" indent="0" algn="r">
               <a:buNone/>
             </a:pPr>
             <a:r>
@@ -7261,7 +7546,7 @@
           <a:bodyPr wrap="square" lIns="0" tIns="0" rIns="0" bIns="0" rtlCol="0" anchor="ctr"/>
           <a:lstStyle/>
           <a:p>
-            <a:pPr indent="0" marL="0">
+            <a:pPr marL="0" indent="0">
               <a:buNone/>
             </a:pPr>
             <a:r>
@@ -7292,6 +7577,7 @@
         <a:solidFill>
           <a:srgbClr val="0E2A47"/>
         </a:solidFill>
+        <a:effectLst/>
       </p:bgPr>
     </p:bg>
     <p:spTree>
@@ -7327,6 +7613,13 @@
           </a:solidFill>
           <a:ln/>
         </p:spPr>
+        <p:txBody>
+          <a:bodyPr/>
+          <a:lstStyle/>
+          <a:p>
+            <a:endParaRPr lang="en-US"/>
+          </a:p>
+        </p:txBody>
       </p:sp>
       <p:sp>
         <p:nvSpPr>
@@ -7347,6 +7640,13 @@
           </a:solidFill>
           <a:ln/>
         </p:spPr>
+        <p:txBody>
+          <a:bodyPr/>
+          <a:lstStyle/>
+          <a:p>
+            <a:endParaRPr lang="en-US"/>
+          </a:p>
+        </p:txBody>
       </p:sp>
       <p:sp>
         <p:nvSpPr>
@@ -7367,24 +7667,31 @@
           </a:solidFill>
           <a:ln/>
           <a:effectLst>
-            <a:outerShdw sx="100000" sy="100000" kx="0" ky="0" algn="bl" rotWithShape="0" blurRad="88900" dist="25400" dir="8100000">
+            <a:outerShdw blurRad="88900" dist="25400" dir="8100000" algn="bl" rotWithShape="0">
               <a:srgbClr val="1B2A38">
                 <a:alpha val="14000"/>
               </a:srgbClr>
             </a:outerShdw>
           </a:effectLst>
         </p:spPr>
+        <p:txBody>
+          <a:bodyPr/>
+          <a:lstStyle/>
+          <a:p>
+            <a:endParaRPr lang="en-US"/>
+          </a:p>
+        </p:txBody>
       </p:sp>
       <p:pic>
         <p:nvPicPr>
-          <p:cNvPr id="5" name="Image 0" descr="preencoded.png">    </p:cNvPr>
+          <p:cNvPr id="5" name="Image 0" descr="preencoded.png"/>
           <p:cNvPicPr>
             <a:picLocks noChangeAspect="1"/>
           </p:cNvPicPr>
           <p:nvPr/>
         </p:nvPicPr>
         <p:blipFill>
-          <a:blip r:embed="rId1"/>
+          <a:blip r:embed="rId3"/>
           <a:stretch>
             <a:fillRect/>
           </a:stretch>
@@ -7420,7 +7727,7 @@
           <a:bodyPr wrap="square" lIns="0" tIns="0" rIns="0" bIns="0" rtlCol="0" anchor="ctr"/>
           <a:lstStyle/>
           <a:p>
-            <a:pPr indent="0" marL="0">
+            <a:pPr marL="0" indent="0">
               <a:buNone/>
             </a:pPr>
             <a:r>
@@ -7459,7 +7766,7 @@
           <a:bodyPr wrap="square" lIns="0" tIns="0" rIns="0" bIns="0" rtlCol="0" anchor="ctr"/>
           <a:lstStyle/>
           <a:p>
-            <a:pPr indent="0" marL="0">
+            <a:pPr marL="0" indent="0">
               <a:lnSpc>
                 <a:spcPct val="108000"/>
               </a:lnSpc>
@@ -7503,13 +7810,20 @@
             <a:prstDash val="solid"/>
           </a:ln>
           <a:effectLst>
-            <a:outerShdw sx="100000" sy="100000" kx="0" ky="0" algn="bl" rotWithShape="0" blurRad="114300" dist="38100" dir="8100000">
+            <a:outerShdw blurRad="114300" dist="38100" dir="8100000" algn="bl" rotWithShape="0">
               <a:srgbClr val="0A1722">
                 <a:alpha val="22000"/>
               </a:srgbClr>
             </a:outerShdw>
           </a:effectLst>
         </p:spPr>
+        <p:txBody>
+          <a:bodyPr/>
+          <a:lstStyle/>
+          <a:p>
+            <a:endParaRPr lang="en-US"/>
+          </a:p>
+        </p:txBody>
       </p:sp>
       <p:sp>
         <p:nvSpPr>
@@ -7530,24 +7844,31 @@
           </a:solidFill>
           <a:ln/>
           <a:effectLst>
-            <a:outerShdw sx="100000" sy="100000" kx="0" ky="0" algn="bl" rotWithShape="0" blurRad="88900" dist="25400" dir="8100000">
+            <a:outerShdw blurRad="88900" dist="25400" dir="8100000" algn="bl" rotWithShape="0">
               <a:srgbClr val="1B2A38">
                 <a:alpha val="14000"/>
               </a:srgbClr>
             </a:outerShdw>
           </a:effectLst>
         </p:spPr>
+        <p:txBody>
+          <a:bodyPr/>
+          <a:lstStyle/>
+          <a:p>
+            <a:endParaRPr lang="en-US"/>
+          </a:p>
+        </p:txBody>
       </p:sp>
       <p:pic>
         <p:nvPicPr>
-          <p:cNvPr id="10" name="Image 1" descr="preencoded.png">    </p:cNvPr>
+          <p:cNvPr id="10" name="Image 1" descr="preencoded.png"/>
           <p:cNvPicPr>
             <a:picLocks noChangeAspect="1"/>
           </p:cNvPicPr>
           <p:nvPr/>
         </p:nvPicPr>
         <p:blipFill>
-          <a:blip r:embed="rId2"/>
+          <a:blip r:embed="rId4"/>
           <a:stretch>
             <a:fillRect/>
           </a:stretch>
@@ -7583,7 +7904,7 @@
           <a:bodyPr wrap="square" lIns="0" tIns="0" rIns="0" bIns="0" rtlCol="0" anchor="ctr"/>
           <a:lstStyle/>
           <a:p>
-            <a:pPr indent="0" marL="0">
+            <a:pPr marL="0" indent="0">
               <a:lnSpc>
                 <a:spcPct val="102000"/>
               </a:lnSpc>
@@ -7597,12 +7918,6 @@
               </a:rPr>
               <a:t>Drill an appraisal well at GLA-01  </a:t>
             </a:r>
-            <a:pPr indent="0" marL="0">
-              <a:lnSpc>
-                <a:spcPct val="102000"/>
-              </a:lnSpc>
-              <a:buNone/>
-            </a:pPr>
             <a:r>
               <a:rPr lang="en-US" sz="1100" dirty="0">
                 <a:solidFill>
@@ -7641,13 +7956,20 @@
             <a:prstDash val="solid"/>
           </a:ln>
           <a:effectLst>
-            <a:outerShdw sx="100000" sy="100000" kx="0" ky="0" algn="bl" rotWithShape="0" blurRad="114300" dist="38100" dir="8100000">
+            <a:outerShdw blurRad="114300" dist="38100" dir="8100000" algn="bl" rotWithShape="0">
               <a:srgbClr val="0A1722">
                 <a:alpha val="22000"/>
               </a:srgbClr>
             </a:outerShdw>
           </a:effectLst>
         </p:spPr>
+        <p:txBody>
+          <a:bodyPr/>
+          <a:lstStyle/>
+          <a:p>
+            <a:endParaRPr lang="en-US"/>
+          </a:p>
+        </p:txBody>
       </p:sp>
       <p:sp>
         <p:nvSpPr>
@@ -7668,24 +7990,31 @@
           </a:solidFill>
           <a:ln/>
           <a:effectLst>
-            <a:outerShdw sx="100000" sy="100000" kx="0" ky="0" algn="bl" rotWithShape="0" blurRad="88900" dist="25400" dir="8100000">
+            <a:outerShdw blurRad="88900" dist="25400" dir="8100000" algn="bl" rotWithShape="0">
               <a:srgbClr val="1B2A38">
                 <a:alpha val="14000"/>
               </a:srgbClr>
             </a:outerShdw>
           </a:effectLst>
         </p:spPr>
+        <p:txBody>
+          <a:bodyPr/>
+          <a:lstStyle/>
+          <a:p>
+            <a:endParaRPr lang="en-US"/>
+          </a:p>
+        </p:txBody>
       </p:sp>
       <p:pic>
         <p:nvPicPr>
-          <p:cNvPr id="14" name="Image 2" descr="preencoded.png">    </p:cNvPr>
+          <p:cNvPr id="14" name="Image 2" descr="preencoded.png"/>
           <p:cNvPicPr>
             <a:picLocks noChangeAspect="1"/>
           </p:cNvPicPr>
           <p:nvPr/>
         </p:nvPicPr>
         <p:blipFill>
-          <a:blip r:embed="rId3"/>
+          <a:blip r:embed="rId5"/>
           <a:stretch>
             <a:fillRect/>
           </a:stretch>
@@ -7721,7 +8050,7 @@
           <a:bodyPr wrap="square" lIns="0" tIns="0" rIns="0" bIns="0" rtlCol="0" anchor="ctr"/>
           <a:lstStyle/>
           <a:p>
-            <a:pPr indent="0" marL="0">
+            <a:pPr marL="0" indent="0">
               <a:lnSpc>
                 <a:spcPct val="102000"/>
               </a:lnSpc>
@@ -7735,12 +8064,6 @@
               </a:rPr>
               <a:t>Acquire hourly demand data  </a:t>
             </a:r>
-            <a:pPr indent="0" marL="0">
-              <a:lnSpc>
-                <a:spcPct val="102000"/>
-              </a:lnSpc>
-              <a:buNone/>
-            </a:pPr>
             <a:r>
               <a:rPr lang="en-US" sz="1100" dirty="0">
                 <a:solidFill>
@@ -7779,13 +8102,20 @@
             <a:prstDash val="solid"/>
           </a:ln>
           <a:effectLst>
-            <a:outerShdw sx="100000" sy="100000" kx="0" ky="0" algn="bl" rotWithShape="0" blurRad="114300" dist="38100" dir="8100000">
+            <a:outerShdw blurRad="114300" dist="38100" dir="8100000" algn="bl" rotWithShape="0">
               <a:srgbClr val="0A1722">
                 <a:alpha val="22000"/>
               </a:srgbClr>
             </a:outerShdw>
           </a:effectLst>
         </p:spPr>
+        <p:txBody>
+          <a:bodyPr/>
+          <a:lstStyle/>
+          <a:p>
+            <a:endParaRPr lang="en-US"/>
+          </a:p>
+        </p:txBody>
       </p:sp>
       <p:sp>
         <p:nvSpPr>
@@ -7806,24 +8136,31 @@
           </a:solidFill>
           <a:ln/>
           <a:effectLst>
-            <a:outerShdw sx="100000" sy="100000" kx="0" ky="0" algn="bl" rotWithShape="0" blurRad="88900" dist="25400" dir="8100000">
+            <a:outerShdw blurRad="88900" dist="25400" dir="8100000" algn="bl" rotWithShape="0">
               <a:srgbClr val="1B2A38">
                 <a:alpha val="14000"/>
               </a:srgbClr>
             </a:outerShdw>
           </a:effectLst>
         </p:spPr>
+        <p:txBody>
+          <a:bodyPr/>
+          <a:lstStyle/>
+          <a:p>
+            <a:endParaRPr lang="en-US"/>
+          </a:p>
+        </p:txBody>
       </p:sp>
       <p:pic>
         <p:nvPicPr>
-          <p:cNvPr id="18" name="Image 3" descr="preencoded.png">    </p:cNvPr>
+          <p:cNvPr id="18" name="Image 3" descr="preencoded.png"/>
           <p:cNvPicPr>
             <a:picLocks noChangeAspect="1"/>
           </p:cNvPicPr>
           <p:nvPr/>
         </p:nvPicPr>
         <p:blipFill>
-          <a:blip r:embed="rId4"/>
+          <a:blip r:embed="rId6"/>
           <a:stretch>
             <a:fillRect/>
           </a:stretch>
@@ -7859,7 +8196,7 @@
           <a:bodyPr wrap="square" lIns="0" tIns="0" rIns="0" bIns="0" rtlCol="0" anchor="ctr"/>
           <a:lstStyle/>
           <a:p>
-            <a:pPr indent="0" marL="0">
+            <a:pPr marL="0" indent="0">
               <a:lnSpc>
                 <a:spcPct val="102000"/>
               </a:lnSpc>
@@ -7871,14 +8208,8 @@
                   <a:srgbClr val="FFFFFF"/>
                 </a:solidFill>
               </a:rPr>
-              <a:t>Run a coupled reservoir + ATES model  </a:t>
-            </a:r>
-            <a:pPr indent="0" marL="0">
-              <a:lnSpc>
-                <a:spcPct val="102000"/>
-              </a:lnSpc>
-              <a:buNone/>
-            </a:pPr>
+              <a:t>Run a coupled reservoir, groundwater and ATES model  </a:t>
+            </a:r>
             <a:r>
               <a:rPr lang="en-US" sz="1100" dirty="0">
                 <a:solidFill>
@@ -7917,6 +8248,13 @@
             <a:prstDash val="solid"/>
           </a:ln>
         </p:spPr>
+        <p:txBody>
+          <a:bodyPr/>
+          <a:lstStyle/>
+          <a:p>
+            <a:endParaRPr lang="en-US"/>
+          </a:p>
+        </p:txBody>
       </p:sp>
       <p:sp>
         <p:nvSpPr>
@@ -7939,7 +8277,7 @@
           <a:bodyPr wrap="square" lIns="0" tIns="0" rIns="0" bIns="0" rtlCol="0" anchor="ctr"/>
           <a:lstStyle/>
           <a:p>
-            <a:pPr indent="0" marL="0">
+            <a:pPr marL="0" indent="0">
               <a:buNone/>
             </a:pPr>
             <a:r>
@@ -7978,7 +8316,7 @@
           <a:bodyPr wrap="square" lIns="0" tIns="0" rIns="0" bIns="0" rtlCol="0" anchor="ctr"/>
           <a:lstStyle/>
           <a:p>
-            <a:pPr indent="0" marL="0">
+            <a:pPr marL="0" indent="0">
               <a:buNone/>
             </a:pPr>
             <a:r>
@@ -8019,6 +8357,13 @@
             <a:prstDash val="solid"/>
           </a:ln>
         </p:spPr>
+        <p:txBody>
+          <a:bodyPr/>
+          <a:lstStyle/>
+          <a:p>
+            <a:endParaRPr lang="en-US"/>
+          </a:p>
+        </p:txBody>
       </p:sp>
       <p:sp>
         <p:nvSpPr>
@@ -8041,7 +8386,7 @@
           <a:bodyPr wrap="square" lIns="0" tIns="0" rIns="0" bIns="0" rtlCol="0" anchor="ctr"/>
           <a:lstStyle/>
           <a:p>
-            <a:pPr indent="0" marL="0">
+            <a:pPr marL="0" indent="0">
               <a:buNone/>
             </a:pPr>
             <a:r>
@@ -8080,7 +8425,7 @@
           <a:bodyPr wrap="square" lIns="0" tIns="0" rIns="0" bIns="0" rtlCol="0" anchor="ctr"/>
           <a:lstStyle/>
           <a:p>
-            <a:pPr indent="0" marL="0">
+            <a:pPr marL="0" indent="0">
               <a:buNone/>
             </a:pPr>
             <a:r>
@@ -8121,6 +8466,13 @@
             <a:prstDash val="solid"/>
           </a:ln>
         </p:spPr>
+        <p:txBody>
+          <a:bodyPr/>
+          <a:lstStyle/>
+          <a:p>
+            <a:endParaRPr lang="en-US"/>
+          </a:p>
+        </p:txBody>
       </p:sp>
       <p:sp>
         <p:nvSpPr>
@@ -8143,7 +8495,7 @@
           <a:bodyPr wrap="square" lIns="0" tIns="0" rIns="0" bIns="0" rtlCol="0" anchor="ctr"/>
           <a:lstStyle/>
           <a:p>
-            <a:pPr indent="0" marL="0">
+            <a:pPr marL="0" indent="0">
               <a:buNone/>
             </a:pPr>
             <a:r>
@@ -8182,7 +8534,7 @@
           <a:bodyPr wrap="square" lIns="0" tIns="0" rIns="0" bIns="0" rtlCol="0" anchor="ctr"/>
           <a:lstStyle/>
           <a:p>
-            <a:pPr indent="0" marL="0">
+            <a:pPr marL="0" indent="0">
               <a:buNone/>
             </a:pPr>
             <a:r>
@@ -8218,7 +8570,7 @@
           <a:bodyPr wrap="square" lIns="0" tIns="0" rIns="0" bIns="0" rtlCol="0" anchor="ctr"/>
           <a:lstStyle/>
           <a:p>
-            <a:pPr indent="0" marL="0">
+            <a:pPr marL="0" indent="0">
               <a:buNone/>
             </a:pPr>
             <a:r>
@@ -8249,6 +8601,7 @@
         <a:solidFill>
           <a:srgbClr val="F7FAFB"/>
         </a:solidFill>
+        <a:effectLst/>
       </p:bgPr>
     </p:bg>
     <p:spTree>
@@ -8284,6 +8637,13 @@
           </a:solidFill>
           <a:ln/>
         </p:spPr>
+        <p:txBody>
+          <a:bodyPr/>
+          <a:lstStyle/>
+          <a:p>
+            <a:endParaRPr lang="en-US"/>
+          </a:p>
+        </p:txBody>
       </p:sp>
       <p:sp>
         <p:nvSpPr>
@@ -8306,11 +8666,11 @@
           <a:bodyPr wrap="square" lIns="0" tIns="0" rIns="0" bIns="0" rtlCol="0" anchor="ctr"/>
           <a:lstStyle/>
           <a:p>
-            <a:pPr indent="0" marL="0">
-              <a:buNone/>
-            </a:pPr>
-            <a:r>
-              <a:rPr lang="en-US" sz="1200" b="1" spc="300" kern="0" dirty="0">
+            <a:pPr marL="0" indent="0">
+              <a:buNone/>
+            </a:pPr>
+            <a:r>
+              <a:rPr lang="en-US" sz="1200" b="1" kern="0" spc="300" dirty="0">
                 <a:solidFill>
                   <a:srgbClr val="D94F2A"/>
                 </a:solidFill>
@@ -8345,7 +8705,7 @@
           <a:bodyPr wrap="square" lIns="0" tIns="0" rIns="0" bIns="0" rtlCol="0" anchor="ctr"/>
           <a:lstStyle/>
           <a:p>
-            <a:pPr indent="0" marL="0">
+            <a:pPr marL="0" indent="0">
               <a:buNone/>
             </a:pPr>
             <a:r>
@@ -8384,7 +8744,7 @@
           <a:bodyPr wrap="square" lIns="0" tIns="0" rIns="0" bIns="0" rtlCol="0" anchor="ctr"/>
           <a:lstStyle/>
           <a:p>
-            <a:pPr indent="0" marL="0">
+            <a:pPr marL="0" indent="0">
               <a:lnSpc>
                 <a:spcPct val="106000"/>
               </a:lnSpc>
@@ -8428,13 +8788,20 @@
             <a:prstDash val="solid"/>
           </a:ln>
           <a:effectLst>
-            <a:outerShdw sx="100000" sy="100000" kx="0" ky="0" algn="bl" rotWithShape="0" blurRad="88900" dist="25400" dir="8100000">
+            <a:outerShdw blurRad="88900" dist="25400" dir="8100000" algn="bl" rotWithShape="0">
               <a:srgbClr val="1B2A38">
                 <a:alpha val="14000"/>
               </a:srgbClr>
             </a:outerShdw>
           </a:effectLst>
         </p:spPr>
+        <p:txBody>
+          <a:bodyPr/>
+          <a:lstStyle/>
+          <a:p>
+            <a:endParaRPr lang="en-US"/>
+          </a:p>
+        </p:txBody>
       </p:sp>
       <p:sp>
         <p:nvSpPr>
@@ -8455,24 +8822,31 @@
           </a:solidFill>
           <a:ln/>
           <a:effectLst>
-            <a:outerShdw sx="100000" sy="100000" kx="0" ky="0" algn="bl" rotWithShape="0" blurRad="88900" dist="25400" dir="8100000">
+            <a:outerShdw blurRad="88900" dist="25400" dir="8100000" algn="bl" rotWithShape="0">
               <a:srgbClr val="1B2A38">
                 <a:alpha val="14000"/>
               </a:srgbClr>
             </a:outerShdw>
           </a:effectLst>
         </p:spPr>
+        <p:txBody>
+          <a:bodyPr/>
+          <a:lstStyle/>
+          <a:p>
+            <a:endParaRPr lang="en-US"/>
+          </a:p>
+        </p:txBody>
       </p:sp>
       <p:pic>
         <p:nvPicPr>
-          <p:cNvPr id="8" name="Image 0" descr="preencoded.png">    </p:cNvPr>
+          <p:cNvPr id="8" name="Image 0" descr="preencoded.png"/>
           <p:cNvPicPr>
             <a:picLocks noChangeAspect="1"/>
           </p:cNvPicPr>
           <p:nvPr/>
         </p:nvPicPr>
         <p:blipFill>
-          <a:blip r:embed="rId1"/>
+          <a:blip r:embed="rId3"/>
           <a:stretch>
             <a:fillRect/>
           </a:stretch>
@@ -8508,7 +8882,7 @@
           <a:bodyPr wrap="square" lIns="0" tIns="0" rIns="0" bIns="0" rtlCol="0" anchor="ctr"/>
           <a:lstStyle/>
           <a:p>
-            <a:pPr indent="0" marL="0">
+            <a:pPr marL="0" indent="0">
               <a:buNone/>
             </a:pPr>
             <a:r>
@@ -8544,7 +8918,7 @@
           <a:bodyPr wrap="square" lIns="0" tIns="0" rIns="0" bIns="0" rtlCol="0" anchor="ctr"/>
           <a:lstStyle/>
           <a:p>
-            <a:pPr indent="0" marL="0">
+            <a:pPr marL="0" indent="0">
               <a:lnSpc>
                 <a:spcPct val="102000"/>
               </a:lnSpc>
@@ -8588,13 +8962,20 @@
             <a:prstDash val="solid"/>
           </a:ln>
           <a:effectLst>
-            <a:outerShdw sx="100000" sy="100000" kx="0" ky="0" algn="bl" rotWithShape="0" blurRad="88900" dist="25400" dir="8100000">
+            <a:outerShdw blurRad="88900" dist="25400" dir="8100000" algn="bl" rotWithShape="0">
               <a:srgbClr val="1B2A38">
                 <a:alpha val="14000"/>
               </a:srgbClr>
             </a:outerShdw>
           </a:effectLst>
         </p:spPr>
+        <p:txBody>
+          <a:bodyPr/>
+          <a:lstStyle/>
+          <a:p>
+            <a:endParaRPr lang="en-US"/>
+          </a:p>
+        </p:txBody>
       </p:sp>
       <p:sp>
         <p:nvSpPr>
@@ -8615,24 +8996,31 @@
           </a:solidFill>
           <a:ln/>
           <a:effectLst>
-            <a:outerShdw sx="100000" sy="100000" kx="0" ky="0" algn="bl" rotWithShape="0" blurRad="88900" dist="25400" dir="8100000">
+            <a:outerShdw blurRad="88900" dist="25400" dir="8100000" algn="bl" rotWithShape="0">
               <a:srgbClr val="1B2A38">
                 <a:alpha val="14000"/>
               </a:srgbClr>
             </a:outerShdw>
           </a:effectLst>
         </p:spPr>
+        <p:txBody>
+          <a:bodyPr/>
+          <a:lstStyle/>
+          <a:p>
+            <a:endParaRPr lang="en-US"/>
+          </a:p>
+        </p:txBody>
       </p:sp>
       <p:pic>
         <p:nvPicPr>
-          <p:cNvPr id="13" name="Image 1" descr="preencoded.png">    </p:cNvPr>
+          <p:cNvPr id="13" name="Image 1" descr="preencoded.png"/>
           <p:cNvPicPr>
             <a:picLocks noChangeAspect="1"/>
           </p:cNvPicPr>
           <p:nvPr/>
         </p:nvPicPr>
         <p:blipFill>
-          <a:blip r:embed="rId2"/>
+          <a:blip r:embed="rId4"/>
           <a:stretch>
             <a:fillRect/>
           </a:stretch>
@@ -8668,7 +9056,7 @@
           <a:bodyPr wrap="square" lIns="0" tIns="0" rIns="0" bIns="0" rtlCol="0" anchor="ctr"/>
           <a:lstStyle/>
           <a:p>
-            <a:pPr indent="0" marL="0">
+            <a:pPr marL="0" indent="0">
               <a:buNone/>
             </a:pPr>
             <a:r>
@@ -8704,7 +9092,7 @@
           <a:bodyPr wrap="square" lIns="0" tIns="0" rIns="0" bIns="0" rtlCol="0" anchor="ctr"/>
           <a:lstStyle/>
           <a:p>
-            <a:pPr indent="0" marL="0">
+            <a:pPr marL="0" indent="0">
               <a:lnSpc>
                 <a:spcPct val="102000"/>
               </a:lnSpc>
@@ -8748,13 +9136,20 @@
             <a:prstDash val="solid"/>
           </a:ln>
           <a:effectLst>
-            <a:outerShdw sx="100000" sy="100000" kx="0" ky="0" algn="bl" rotWithShape="0" blurRad="88900" dist="25400" dir="8100000">
+            <a:outerShdw blurRad="88900" dist="25400" dir="8100000" algn="bl" rotWithShape="0">
               <a:srgbClr val="1B2A38">
                 <a:alpha val="14000"/>
               </a:srgbClr>
             </a:outerShdw>
           </a:effectLst>
         </p:spPr>
+        <p:txBody>
+          <a:bodyPr/>
+          <a:lstStyle/>
+          <a:p>
+            <a:endParaRPr lang="en-US"/>
+          </a:p>
+        </p:txBody>
       </p:sp>
       <p:sp>
         <p:nvSpPr>
@@ -8775,24 +9170,31 @@
           </a:solidFill>
           <a:ln/>
           <a:effectLst>
-            <a:outerShdw sx="100000" sy="100000" kx="0" ky="0" algn="bl" rotWithShape="0" blurRad="88900" dist="25400" dir="8100000">
+            <a:outerShdw blurRad="88900" dist="25400" dir="8100000" algn="bl" rotWithShape="0">
               <a:srgbClr val="1B2A38">
                 <a:alpha val="14000"/>
               </a:srgbClr>
             </a:outerShdw>
           </a:effectLst>
         </p:spPr>
+        <p:txBody>
+          <a:bodyPr/>
+          <a:lstStyle/>
+          <a:p>
+            <a:endParaRPr lang="en-US"/>
+          </a:p>
+        </p:txBody>
       </p:sp>
       <p:pic>
         <p:nvPicPr>
-          <p:cNvPr id="18" name="Image 2" descr="preencoded.png">    </p:cNvPr>
+          <p:cNvPr id="18" name="Image 2" descr="preencoded.png"/>
           <p:cNvPicPr>
             <a:picLocks noChangeAspect="1"/>
           </p:cNvPicPr>
           <p:nvPr/>
         </p:nvPicPr>
         <p:blipFill>
-          <a:blip r:embed="rId3"/>
+          <a:blip r:embed="rId5"/>
           <a:stretch>
             <a:fillRect/>
           </a:stretch>
@@ -8828,7 +9230,7 @@
           <a:bodyPr wrap="square" lIns="0" tIns="0" rIns="0" bIns="0" rtlCol="0" anchor="ctr"/>
           <a:lstStyle/>
           <a:p>
-            <a:pPr indent="0" marL="0">
+            <a:pPr marL="0" indent="0">
               <a:buNone/>
             </a:pPr>
             <a:r>
@@ -8864,7 +9266,7 @@
           <a:bodyPr wrap="square" lIns="0" tIns="0" rIns="0" bIns="0" rtlCol="0" anchor="ctr"/>
           <a:lstStyle/>
           <a:p>
-            <a:pPr indent="0" marL="0">
+            <a:pPr marL="0" indent="0">
               <a:lnSpc>
                 <a:spcPct val="102000"/>
               </a:lnSpc>
@@ -8908,13 +9310,20 @@
             <a:prstDash val="solid"/>
           </a:ln>
           <a:effectLst>
-            <a:outerShdw sx="100000" sy="100000" kx="0" ky="0" algn="bl" rotWithShape="0" blurRad="88900" dist="25400" dir="8100000">
+            <a:outerShdw blurRad="88900" dist="25400" dir="8100000" algn="bl" rotWithShape="0">
               <a:srgbClr val="1B2A38">
                 <a:alpha val="14000"/>
               </a:srgbClr>
             </a:outerShdw>
           </a:effectLst>
         </p:spPr>
+        <p:txBody>
+          <a:bodyPr/>
+          <a:lstStyle/>
+          <a:p>
+            <a:endParaRPr lang="en-US"/>
+          </a:p>
+        </p:txBody>
       </p:sp>
       <p:sp>
         <p:nvSpPr>
@@ -8935,24 +9344,31 @@
           </a:solidFill>
           <a:ln/>
           <a:effectLst>
-            <a:outerShdw sx="100000" sy="100000" kx="0" ky="0" algn="bl" rotWithShape="0" blurRad="88900" dist="25400" dir="8100000">
+            <a:outerShdw blurRad="88900" dist="25400" dir="8100000" algn="bl" rotWithShape="0">
               <a:srgbClr val="1B2A38">
                 <a:alpha val="14000"/>
               </a:srgbClr>
             </a:outerShdw>
           </a:effectLst>
         </p:spPr>
+        <p:txBody>
+          <a:bodyPr/>
+          <a:lstStyle/>
+          <a:p>
+            <a:endParaRPr lang="en-US"/>
+          </a:p>
+        </p:txBody>
       </p:sp>
       <p:pic>
         <p:nvPicPr>
-          <p:cNvPr id="23" name="Image 3" descr="preencoded.png">    </p:cNvPr>
+          <p:cNvPr id="23" name="Image 3" descr="preencoded.png"/>
           <p:cNvPicPr>
             <a:picLocks noChangeAspect="1"/>
           </p:cNvPicPr>
           <p:nvPr/>
         </p:nvPicPr>
         <p:blipFill>
-          <a:blip r:embed="rId4"/>
+          <a:blip r:embed="rId6"/>
           <a:stretch>
             <a:fillRect/>
           </a:stretch>
@@ -8988,7 +9404,7 @@
           <a:bodyPr wrap="square" lIns="0" tIns="0" rIns="0" bIns="0" rtlCol="0" anchor="ctr"/>
           <a:lstStyle/>
           <a:p>
-            <a:pPr indent="0" marL="0">
+            <a:pPr marL="0" indent="0">
               <a:buNone/>
             </a:pPr>
             <a:r>
@@ -9024,7 +9440,7 @@
           <a:bodyPr wrap="square" lIns="0" tIns="0" rIns="0" bIns="0" rtlCol="0" anchor="ctr"/>
           <a:lstStyle/>
           <a:p>
-            <a:pPr indent="0" marL="0">
+            <a:pPr marL="0" indent="0">
               <a:lnSpc>
                 <a:spcPct val="102000"/>
               </a:lnSpc>
@@ -9063,13 +9479,20 @@
           </a:solidFill>
           <a:ln/>
           <a:effectLst>
-            <a:outerShdw sx="100000" sy="100000" kx="0" ky="0" algn="bl" rotWithShape="0" blurRad="114300" dist="38100" dir="8100000">
+            <a:outerShdw blurRad="114300" dist="38100" dir="8100000" algn="bl" rotWithShape="0">
               <a:srgbClr val="0A1722">
                 <a:alpha val="22000"/>
               </a:srgbClr>
             </a:outerShdw>
           </a:effectLst>
         </p:spPr>
+        <p:txBody>
+          <a:bodyPr/>
+          <a:lstStyle/>
+          <a:p>
+            <a:endParaRPr lang="en-US"/>
+          </a:p>
+        </p:txBody>
       </p:sp>
       <p:sp>
         <p:nvSpPr>
@@ -9090,24 +9513,31 @@
           </a:solidFill>
           <a:ln/>
           <a:effectLst>
-            <a:outerShdw sx="100000" sy="100000" kx="0" ky="0" algn="bl" rotWithShape="0" blurRad="88900" dist="25400" dir="8100000">
+            <a:outerShdw blurRad="88900" dist="25400" dir="8100000" algn="bl" rotWithShape="0">
               <a:srgbClr val="1B2A38">
                 <a:alpha val="14000"/>
               </a:srgbClr>
             </a:outerShdw>
           </a:effectLst>
         </p:spPr>
+        <p:txBody>
+          <a:bodyPr/>
+          <a:lstStyle/>
+          <a:p>
+            <a:endParaRPr lang="en-US"/>
+          </a:p>
+        </p:txBody>
       </p:sp>
       <p:pic>
         <p:nvPicPr>
-          <p:cNvPr id="28" name="Image 4" descr="preencoded.png">    </p:cNvPr>
+          <p:cNvPr id="28" name="Image 4" descr="preencoded.png"/>
           <p:cNvPicPr>
             <a:picLocks noChangeAspect="1"/>
           </p:cNvPicPr>
           <p:nvPr/>
         </p:nvPicPr>
         <p:blipFill>
-          <a:blip r:embed="rId5"/>
+          <a:blip r:embed="rId7"/>
           <a:stretch>
             <a:fillRect/>
           </a:stretch>
@@ -9143,11 +9573,11 @@
           <a:bodyPr wrap="square" lIns="0" tIns="0" rIns="0" bIns="0" rtlCol="0" anchor="ctr"/>
           <a:lstStyle/>
           <a:p>
-            <a:pPr indent="0" marL="0">
-              <a:buNone/>
-            </a:pPr>
-            <a:r>
-              <a:rPr lang="en-US" sz="1250" b="1" spc="100" kern="0" dirty="0">
+            <a:pPr marL="0" indent="0">
+              <a:buNone/>
+            </a:pPr>
+            <a:r>
+              <a:rPr lang="en-US" sz="1250" b="1" kern="0" spc="100" dirty="0">
                 <a:solidFill>
                   <a:srgbClr val="E8B84B"/>
                 </a:solidFill>
@@ -9179,7 +9609,7 @@
           <a:bodyPr wrap="square" lIns="0" tIns="0" rIns="0" bIns="0" rtlCol="0" anchor="ctr"/>
           <a:lstStyle/>
           <a:p>
-            <a:pPr indent="0" marL="0">
+            <a:pPr marL="0" indent="0">
               <a:lnSpc>
                 <a:spcPct val="108000"/>
               </a:lnSpc>
@@ -9197,7 +9627,7 @@
             <a:endParaRPr lang="en-US" sz="1600" dirty="0"/>
           </a:p>
           <a:p>
-            <a:pPr indent="0" marL="0">
+            <a:pPr marL="0" indent="0">
               <a:lnSpc>
                 <a:spcPct val="108000"/>
               </a:lnSpc>
@@ -9236,7 +9666,7 @@
           <a:bodyPr wrap="square" lIns="0" tIns="0" rIns="0" bIns="0" rtlCol="0" anchor="ctr"/>
           <a:lstStyle/>
           <a:p>
-            <a:pPr indent="0" marL="0">
+            <a:pPr marL="0" indent="0">
               <a:buNone/>
             </a:pPr>
             <a:r>
@@ -9247,9 +9677,6 @@
               </a:rPr>
               <a:t>PKP-01:  </a:t>
             </a:r>
-            <a:pPr indent="0" marL="0">
-              <a:buNone/>
-            </a:pPr>
             <a:r>
               <a:rPr lang="en-US" sz="1200" dirty="0">
                 <a:solidFill>
@@ -9283,7 +9710,7 @@
           <a:bodyPr wrap="square" lIns="0" tIns="0" rIns="0" bIns="0" rtlCol="0" anchor="ctr"/>
           <a:lstStyle/>
           <a:p>
-            <a:pPr algn="r" indent="0" marL="0">
+            <a:pPr marL="0" indent="0" algn="r">
               <a:buNone/>
             </a:pPr>
             <a:r>
@@ -9319,7 +9746,7 @@
           <a:bodyPr wrap="square" lIns="0" tIns="0" rIns="0" bIns="0" rtlCol="0" anchor="ctr"/>
           <a:lstStyle/>
           <a:p>
-            <a:pPr indent="0" marL="0">
+            <a:pPr marL="0" indent="0">
               <a:buNone/>
             </a:pPr>
             <a:r>
@@ -9350,6 +9777,7 @@
         <a:solidFill>
           <a:srgbClr val="0E2A47"/>
         </a:solidFill>
+        <a:effectLst/>
       </p:bgPr>
     </p:bg>
     <p:spTree>
@@ -9385,6 +9813,13 @@
           </a:solidFill>
           <a:ln/>
         </p:spPr>
+        <p:txBody>
+          <a:bodyPr/>
+          <a:lstStyle/>
+          <a:p>
+            <a:endParaRPr lang="en-US"/>
+          </a:p>
+        </p:txBody>
       </p:sp>
       <p:sp>
         <p:nvSpPr>
@@ -9407,11 +9842,11 @@
           <a:bodyPr wrap="square" lIns="0" tIns="0" rIns="0" bIns="0" rtlCol="0" anchor="ctr"/>
           <a:lstStyle/>
           <a:p>
-            <a:pPr indent="0" marL="0">
-              <a:buNone/>
-            </a:pPr>
-            <a:r>
-              <a:rPr lang="en-US" sz="1200" b="1" spc="300" kern="0" dirty="0">
+            <a:pPr marL="0" indent="0">
+              <a:buNone/>
+            </a:pPr>
+            <a:r>
+              <a:rPr lang="en-US" sz="1200" b="1" kern="0" spc="300" dirty="0">
                 <a:solidFill>
                   <a:srgbClr val="E8B84B"/>
                 </a:solidFill>
@@ -9443,7 +9878,7 @@
           <a:bodyPr wrap="square" lIns="0" tIns="0" rIns="0" bIns="0" rtlCol="0" anchor="ctr"/>
           <a:lstStyle/>
           <a:p>
-            <a:pPr indent="0" marL="0">
+            <a:pPr marL="0" indent="0">
               <a:buNone/>
             </a:pPr>
             <a:r>
@@ -9469,7 +9904,7 @@
         </p:nvSpPr>
         <p:spPr>
           <a:xfrm>
-            <a:off x="640080" y="1920240"/>
+            <a:off x="640080" y="1564640"/>
             <a:ext cx="2542032" cy="3200400"/>
           </a:xfrm>
           <a:prstGeom prst="roundRect">
@@ -9487,13 +9922,20 @@
             <a:prstDash val="solid"/>
           </a:ln>
           <a:effectLst>
-            <a:outerShdw sx="100000" sy="100000" kx="0" ky="0" algn="bl" rotWithShape="0" blurRad="114300" dist="38100" dir="8100000">
+            <a:outerShdw blurRad="114300" dist="38100" dir="8100000" algn="bl" rotWithShape="0">
               <a:srgbClr val="0A1722">
                 <a:alpha val="22000"/>
               </a:srgbClr>
             </a:outerShdw>
           </a:effectLst>
         </p:spPr>
+        <p:txBody>
+          <a:bodyPr/>
+          <a:lstStyle/>
+          <a:p>
+            <a:endParaRPr lang="en-US"/>
+          </a:p>
+        </p:txBody>
       </p:sp>
       <p:sp>
         <p:nvSpPr>
@@ -9503,7 +9945,7 @@
         </p:nvSpPr>
         <p:spPr>
           <a:xfrm>
-            <a:off x="1591056" y="2212848"/>
+            <a:off x="1591056" y="1857248"/>
             <a:ext cx="658368" cy="658368"/>
           </a:xfrm>
           <a:prstGeom prst="ellipse">
@@ -9514,31 +9956,38 @@
           </a:solidFill>
           <a:ln/>
           <a:effectLst>
-            <a:outerShdw sx="100000" sy="100000" kx="0" ky="0" algn="bl" rotWithShape="0" blurRad="88900" dist="25400" dir="8100000">
+            <a:outerShdw blurRad="88900" dist="25400" dir="8100000" algn="bl" rotWithShape="0">
               <a:srgbClr val="1B2A38">
                 <a:alpha val="14000"/>
               </a:srgbClr>
             </a:outerShdw>
           </a:effectLst>
         </p:spPr>
+        <p:txBody>
+          <a:bodyPr/>
+          <a:lstStyle/>
+          <a:p>
+            <a:endParaRPr lang="en-US"/>
+          </a:p>
+        </p:txBody>
       </p:sp>
       <p:pic>
         <p:nvPicPr>
-          <p:cNvPr id="7" name="Image 0" descr="preencoded.png">    </p:cNvPr>
+          <p:cNvPr id="7" name="Image 0" descr="preencoded.png"/>
           <p:cNvPicPr>
             <a:picLocks noChangeAspect="1"/>
           </p:cNvPicPr>
           <p:nvPr/>
         </p:nvPicPr>
         <p:blipFill>
-          <a:blip r:embed="rId1"/>
+          <a:blip r:embed="rId3"/>
           <a:stretch>
             <a:fillRect/>
           </a:stretch>
         </p:blipFill>
         <p:spPr>
           <a:xfrm>
-            <a:off x="1749064" y="2370856"/>
+            <a:off x="1749064" y="2015256"/>
             <a:ext cx="342351" cy="342351"/>
           </a:xfrm>
           <a:prstGeom prst="rect">
@@ -9554,7 +10003,7 @@
         </p:nvSpPr>
         <p:spPr>
           <a:xfrm>
-            <a:off x="822960" y="2971800"/>
+            <a:off x="822960" y="2616200"/>
             <a:ext cx="2194560" cy="411480"/>
           </a:xfrm>
           <a:prstGeom prst="rect">
@@ -9567,7 +10016,7 @@
           <a:bodyPr wrap="square" lIns="0" tIns="0" rIns="0" bIns="0" rtlCol="0" anchor="ctr"/>
           <a:lstStyle/>
           <a:p>
-            <a:pPr algn="ctr" indent="0" marL="0">
+            <a:pPr marL="0" indent="0" algn="ctr">
               <a:buNone/>
             </a:pPr>
             <a:r>
@@ -9593,7 +10042,7 @@
         </p:nvSpPr>
         <p:spPr>
           <a:xfrm>
-            <a:off x="804672" y="3337560"/>
+            <a:off x="804672" y="2981960"/>
             <a:ext cx="2212848" cy="502920"/>
           </a:xfrm>
           <a:prstGeom prst="rect">
@@ -9606,7 +10055,7 @@
           <a:bodyPr wrap="square" lIns="0" tIns="0" rIns="0" bIns="0" rtlCol="0" anchor="ctr"/>
           <a:lstStyle/>
           <a:p>
-            <a:pPr algn="ctr" indent="0" marL="0">
+            <a:pPr marL="0" indent="0" algn="ctr">
               <a:buNone/>
             </a:pPr>
             <a:r>
@@ -9629,7 +10078,7 @@
         </p:nvSpPr>
         <p:spPr>
           <a:xfrm>
-            <a:off x="841248" y="3886200"/>
+            <a:off x="841248" y="3530600"/>
             <a:ext cx="2139696" cy="1097280"/>
           </a:xfrm>
           <a:prstGeom prst="rect">
@@ -9642,7 +10091,7 @@
           <a:bodyPr wrap="square" lIns="0" tIns="0" rIns="0" bIns="0" rtlCol="0" anchor="ctr"/>
           <a:lstStyle/>
           <a:p>
-            <a:pPr algn="ctr" indent="0" marL="0">
+            <a:pPr marL="0" indent="0" algn="ctr">
               <a:lnSpc>
                 <a:spcPct val="105000"/>
               </a:lnSpc>
@@ -9668,7 +10117,7 @@
         </p:nvSpPr>
         <p:spPr>
           <a:xfrm>
-            <a:off x="3182112" y="3154680"/>
+            <a:off x="3182112" y="2799080"/>
             <a:ext cx="274320" cy="457200"/>
           </a:xfrm>
           <a:prstGeom prst="rect">
@@ -9681,7 +10130,7 @@
           <a:bodyPr wrap="square" lIns="0" tIns="0" rIns="0" bIns="0" rtlCol="0" anchor="ctr"/>
           <a:lstStyle/>
           <a:p>
-            <a:pPr algn="ctr" indent="0" marL="0">
+            <a:pPr marL="0" indent="0" algn="ctr">
               <a:buNone/>
             </a:pPr>
             <a:r>
@@ -9704,7 +10153,7 @@
         </p:nvSpPr>
         <p:spPr>
           <a:xfrm>
-            <a:off x="3429000" y="1920240"/>
+            <a:off x="3429000" y="1564640"/>
             <a:ext cx="2542032" cy="3200400"/>
           </a:xfrm>
           <a:prstGeom prst="roundRect">
@@ -9722,13 +10171,20 @@
             <a:prstDash val="solid"/>
           </a:ln>
           <a:effectLst>
-            <a:outerShdw sx="100000" sy="100000" kx="0" ky="0" algn="bl" rotWithShape="0" blurRad="114300" dist="38100" dir="8100000">
+            <a:outerShdw blurRad="114300" dist="38100" dir="8100000" algn="bl" rotWithShape="0">
               <a:srgbClr val="0A1722">
                 <a:alpha val="22000"/>
               </a:srgbClr>
             </a:outerShdw>
           </a:effectLst>
         </p:spPr>
+        <p:txBody>
+          <a:bodyPr/>
+          <a:lstStyle/>
+          <a:p>
+            <a:endParaRPr lang="en-US"/>
+          </a:p>
+        </p:txBody>
       </p:sp>
       <p:sp>
         <p:nvSpPr>
@@ -9738,7 +10194,7 @@
         </p:nvSpPr>
         <p:spPr>
           <a:xfrm>
-            <a:off x="4379976" y="2212848"/>
+            <a:off x="4379976" y="1857248"/>
             <a:ext cx="658368" cy="658368"/>
           </a:xfrm>
           <a:prstGeom prst="ellipse">
@@ -9749,31 +10205,38 @@
           </a:solidFill>
           <a:ln/>
           <a:effectLst>
-            <a:outerShdw sx="100000" sy="100000" kx="0" ky="0" algn="bl" rotWithShape="0" blurRad="88900" dist="25400" dir="8100000">
+            <a:outerShdw blurRad="88900" dist="25400" dir="8100000" algn="bl" rotWithShape="0">
               <a:srgbClr val="1B2A38">
                 <a:alpha val="14000"/>
               </a:srgbClr>
             </a:outerShdw>
           </a:effectLst>
         </p:spPr>
+        <p:txBody>
+          <a:bodyPr/>
+          <a:lstStyle/>
+          <a:p>
+            <a:endParaRPr lang="en-US"/>
+          </a:p>
+        </p:txBody>
       </p:sp>
       <p:pic>
         <p:nvPicPr>
-          <p:cNvPr id="14" name="Image 1" descr="preencoded.png">    </p:cNvPr>
+          <p:cNvPr id="14" name="Image 1" descr="preencoded.png"/>
           <p:cNvPicPr>
             <a:picLocks noChangeAspect="1"/>
           </p:cNvPicPr>
           <p:nvPr/>
         </p:nvPicPr>
         <p:blipFill>
-          <a:blip r:embed="rId2"/>
+          <a:blip r:embed="rId4"/>
           <a:stretch>
             <a:fillRect/>
           </a:stretch>
         </p:blipFill>
         <p:spPr>
           <a:xfrm>
-            <a:off x="4537984" y="2370856"/>
+            <a:off x="4537984" y="2015256"/>
             <a:ext cx="342351" cy="342351"/>
           </a:xfrm>
           <a:prstGeom prst="rect">
@@ -9789,7 +10252,7 @@
         </p:nvSpPr>
         <p:spPr>
           <a:xfrm>
-            <a:off x="3611880" y="2971800"/>
+            <a:off x="3611880" y="2616200"/>
             <a:ext cx="2194560" cy="411480"/>
           </a:xfrm>
           <a:prstGeom prst="rect">
@@ -9802,7 +10265,7 @@
           <a:bodyPr wrap="square" lIns="0" tIns="0" rIns="0" bIns="0" rtlCol="0" anchor="ctr"/>
           <a:lstStyle/>
           <a:p>
-            <a:pPr algn="ctr" indent="0" marL="0">
+            <a:pPr marL="0" indent="0" algn="ctr">
               <a:buNone/>
             </a:pPr>
             <a:r>
@@ -9828,7 +10291,7 @@
         </p:nvSpPr>
         <p:spPr>
           <a:xfrm>
-            <a:off x="3593592" y="3337560"/>
+            <a:off x="3593592" y="2981960"/>
             <a:ext cx="2212848" cy="502920"/>
           </a:xfrm>
           <a:prstGeom prst="rect">
@@ -9841,7 +10304,7 @@
           <a:bodyPr wrap="square" lIns="0" tIns="0" rIns="0" bIns="0" rtlCol="0" anchor="ctr"/>
           <a:lstStyle/>
           <a:p>
-            <a:pPr algn="ctr" indent="0" marL="0">
+            <a:pPr marL="0" indent="0" algn="ctr">
               <a:buNone/>
             </a:pPr>
             <a:r>
@@ -9864,7 +10327,7 @@
         </p:nvSpPr>
         <p:spPr>
           <a:xfrm>
-            <a:off x="3630168" y="3886200"/>
+            <a:off x="3630168" y="3530600"/>
             <a:ext cx="2139696" cy="1097280"/>
           </a:xfrm>
           <a:prstGeom prst="rect">
@@ -9877,7 +10340,7 @@
           <a:bodyPr wrap="square" lIns="0" tIns="0" rIns="0" bIns="0" rtlCol="0" anchor="ctr"/>
           <a:lstStyle/>
           <a:p>
-            <a:pPr algn="ctr" indent="0" marL="0">
+            <a:pPr marL="0" indent="0" algn="ctr">
               <a:lnSpc>
                 <a:spcPct val="105000"/>
               </a:lnSpc>
@@ -9903,7 +10366,7 @@
         </p:nvSpPr>
         <p:spPr>
           <a:xfrm>
-            <a:off x="5971032" y="3154680"/>
+            <a:off x="5971032" y="2799080"/>
             <a:ext cx="274320" cy="457200"/>
           </a:xfrm>
           <a:prstGeom prst="rect">
@@ -9916,7 +10379,7 @@
           <a:bodyPr wrap="square" lIns="0" tIns="0" rIns="0" bIns="0" rtlCol="0" anchor="ctr"/>
           <a:lstStyle/>
           <a:p>
-            <a:pPr algn="ctr" indent="0" marL="0">
+            <a:pPr marL="0" indent="0" algn="ctr">
               <a:buNone/>
             </a:pPr>
             <a:r>
@@ -9939,7 +10402,7 @@
         </p:nvSpPr>
         <p:spPr>
           <a:xfrm>
-            <a:off x="6217920" y="1920240"/>
+            <a:off x="6217920" y="1564640"/>
             <a:ext cx="2542032" cy="3200400"/>
           </a:xfrm>
           <a:prstGeom prst="roundRect">
@@ -9957,13 +10420,20 @@
             <a:prstDash val="solid"/>
           </a:ln>
           <a:effectLst>
-            <a:outerShdw sx="100000" sy="100000" kx="0" ky="0" algn="bl" rotWithShape="0" blurRad="114300" dist="38100" dir="8100000">
+            <a:outerShdw blurRad="114300" dist="38100" dir="8100000" algn="bl" rotWithShape="0">
               <a:srgbClr val="0A1722">
                 <a:alpha val="22000"/>
               </a:srgbClr>
             </a:outerShdw>
           </a:effectLst>
         </p:spPr>
+        <p:txBody>
+          <a:bodyPr/>
+          <a:lstStyle/>
+          <a:p>
+            <a:endParaRPr lang="en-US"/>
+          </a:p>
+        </p:txBody>
       </p:sp>
       <p:sp>
         <p:nvSpPr>
@@ -9973,7 +10443,7 @@
         </p:nvSpPr>
         <p:spPr>
           <a:xfrm>
-            <a:off x="7168896" y="2212848"/>
+            <a:off x="7168896" y="1857248"/>
             <a:ext cx="658368" cy="658368"/>
           </a:xfrm>
           <a:prstGeom prst="ellipse">
@@ -9984,31 +10454,38 @@
           </a:solidFill>
           <a:ln/>
           <a:effectLst>
-            <a:outerShdw sx="100000" sy="100000" kx="0" ky="0" algn="bl" rotWithShape="0" blurRad="88900" dist="25400" dir="8100000">
+            <a:outerShdw blurRad="88900" dist="25400" dir="8100000" algn="bl" rotWithShape="0">
               <a:srgbClr val="1B2A38">
                 <a:alpha val="14000"/>
               </a:srgbClr>
             </a:outerShdw>
           </a:effectLst>
         </p:spPr>
+        <p:txBody>
+          <a:bodyPr/>
+          <a:lstStyle/>
+          <a:p>
+            <a:endParaRPr lang="en-US"/>
+          </a:p>
+        </p:txBody>
       </p:sp>
       <p:pic>
         <p:nvPicPr>
-          <p:cNvPr id="21" name="Image 2" descr="preencoded.png">    </p:cNvPr>
+          <p:cNvPr id="21" name="Image 2" descr="preencoded.png"/>
           <p:cNvPicPr>
             <a:picLocks noChangeAspect="1"/>
           </p:cNvPicPr>
           <p:nvPr/>
         </p:nvPicPr>
         <p:blipFill>
-          <a:blip r:embed="rId3"/>
+          <a:blip r:embed="rId5"/>
           <a:stretch>
             <a:fillRect/>
           </a:stretch>
         </p:blipFill>
         <p:spPr>
           <a:xfrm>
-            <a:off x="7326904" y="2370856"/>
+            <a:off x="7326904" y="2015256"/>
             <a:ext cx="342351" cy="342351"/>
           </a:xfrm>
           <a:prstGeom prst="rect">
@@ -10024,7 +10501,7 @@
         </p:nvSpPr>
         <p:spPr>
           <a:xfrm>
-            <a:off x="6400800" y="2971800"/>
+            <a:off x="6400800" y="2616200"/>
             <a:ext cx="2194560" cy="411480"/>
           </a:xfrm>
           <a:prstGeom prst="rect">
@@ -10037,7 +10514,7 @@
           <a:bodyPr wrap="square" lIns="0" tIns="0" rIns="0" bIns="0" rtlCol="0" anchor="ctr"/>
           <a:lstStyle/>
           <a:p>
-            <a:pPr algn="ctr" indent="0" marL="0">
+            <a:pPr marL="0" indent="0" algn="ctr">
               <a:buNone/>
             </a:pPr>
             <a:r>
@@ -10063,7 +10540,7 @@
         </p:nvSpPr>
         <p:spPr>
           <a:xfrm>
-            <a:off x="6382512" y="3337560"/>
+            <a:off x="6382512" y="2981960"/>
             <a:ext cx="2212848" cy="502920"/>
           </a:xfrm>
           <a:prstGeom prst="rect">
@@ -10076,7 +10553,7 @@
           <a:bodyPr wrap="square" lIns="0" tIns="0" rIns="0" bIns="0" rtlCol="0" anchor="ctr"/>
           <a:lstStyle/>
           <a:p>
-            <a:pPr algn="ctr" indent="0" marL="0">
+            <a:pPr marL="0" indent="0" algn="ctr">
               <a:buNone/>
             </a:pPr>
             <a:r>
@@ -10099,7 +10576,7 @@
         </p:nvSpPr>
         <p:spPr>
           <a:xfrm>
-            <a:off x="6419088" y="3886200"/>
+            <a:off x="6419088" y="3530600"/>
             <a:ext cx="2139696" cy="1097280"/>
           </a:xfrm>
           <a:prstGeom prst="rect">
@@ -10112,7 +10589,7 @@
           <a:bodyPr wrap="square" lIns="0" tIns="0" rIns="0" bIns="0" rtlCol="0" anchor="ctr"/>
           <a:lstStyle/>
           <a:p>
-            <a:pPr algn="ctr" indent="0" marL="0">
+            <a:pPr marL="0" indent="0" algn="ctr">
               <a:lnSpc>
                 <a:spcPct val="105000"/>
               </a:lnSpc>
@@ -10138,7 +10615,7 @@
         </p:nvSpPr>
         <p:spPr>
           <a:xfrm>
-            <a:off x="8759952" y="3154680"/>
+            <a:off x="8759952" y="2799080"/>
             <a:ext cx="274320" cy="457200"/>
           </a:xfrm>
           <a:prstGeom prst="rect">
@@ -10151,7 +10628,7 @@
           <a:bodyPr wrap="square" lIns="0" tIns="0" rIns="0" bIns="0" rtlCol="0" anchor="ctr"/>
           <a:lstStyle/>
           <a:p>
-            <a:pPr algn="ctr" indent="0" marL="0">
+            <a:pPr marL="0" indent="0" algn="ctr">
               <a:buNone/>
             </a:pPr>
             <a:r>
@@ -10174,7 +10651,7 @@
         </p:nvSpPr>
         <p:spPr>
           <a:xfrm>
-            <a:off x="9006840" y="1920240"/>
+            <a:off x="9006840" y="1564640"/>
             <a:ext cx="2542032" cy="3200400"/>
           </a:xfrm>
           <a:prstGeom prst="roundRect">
@@ -10192,13 +10669,20 @@
             <a:prstDash val="solid"/>
           </a:ln>
           <a:effectLst>
-            <a:outerShdw sx="100000" sy="100000" kx="0" ky="0" algn="bl" rotWithShape="0" blurRad="114300" dist="38100" dir="8100000">
+            <a:outerShdw blurRad="114300" dist="38100" dir="8100000" algn="bl" rotWithShape="0">
               <a:srgbClr val="0A1722">
                 <a:alpha val="22000"/>
               </a:srgbClr>
             </a:outerShdw>
           </a:effectLst>
         </p:spPr>
+        <p:txBody>
+          <a:bodyPr/>
+          <a:lstStyle/>
+          <a:p>
+            <a:endParaRPr lang="en-US"/>
+          </a:p>
+        </p:txBody>
       </p:sp>
       <p:sp>
         <p:nvSpPr>
@@ -10208,7 +10692,7 @@
         </p:nvSpPr>
         <p:spPr>
           <a:xfrm>
-            <a:off x="9957816" y="2212848"/>
+            <a:off x="9957816" y="1857248"/>
             <a:ext cx="658368" cy="658368"/>
           </a:xfrm>
           <a:prstGeom prst="ellipse">
@@ -10219,31 +10703,38 @@
           </a:solidFill>
           <a:ln/>
           <a:effectLst>
-            <a:outerShdw sx="100000" sy="100000" kx="0" ky="0" algn="bl" rotWithShape="0" blurRad="88900" dist="25400" dir="8100000">
+            <a:outerShdw blurRad="88900" dist="25400" dir="8100000" algn="bl" rotWithShape="0">
               <a:srgbClr val="1B2A38">
                 <a:alpha val="14000"/>
               </a:srgbClr>
             </a:outerShdw>
           </a:effectLst>
         </p:spPr>
+        <p:txBody>
+          <a:bodyPr/>
+          <a:lstStyle/>
+          <a:p>
+            <a:endParaRPr lang="en-US"/>
+          </a:p>
+        </p:txBody>
       </p:sp>
       <p:pic>
         <p:nvPicPr>
-          <p:cNvPr id="28" name="Image 3" descr="preencoded.png">    </p:cNvPr>
+          <p:cNvPr id="28" name="Image 3" descr="preencoded.png"/>
           <p:cNvPicPr>
             <a:picLocks noChangeAspect="1"/>
           </p:cNvPicPr>
           <p:nvPr/>
         </p:nvPicPr>
         <p:blipFill>
-          <a:blip r:embed="rId4"/>
+          <a:blip r:embed="rId6"/>
           <a:stretch>
             <a:fillRect/>
           </a:stretch>
         </p:blipFill>
         <p:spPr>
           <a:xfrm>
-            <a:off x="10115824" y="2370856"/>
+            <a:off x="10115824" y="2015256"/>
             <a:ext cx="342351" cy="342351"/>
           </a:xfrm>
           <a:prstGeom prst="rect">
@@ -10259,7 +10750,7 @@
         </p:nvSpPr>
         <p:spPr>
           <a:xfrm>
-            <a:off x="9189720" y="2971800"/>
+            <a:off x="9189720" y="2616200"/>
             <a:ext cx="2194560" cy="411480"/>
           </a:xfrm>
           <a:prstGeom prst="rect">
@@ -10272,7 +10763,7 @@
           <a:bodyPr wrap="square" lIns="0" tIns="0" rIns="0" bIns="0" rtlCol="0" anchor="ctr"/>
           <a:lstStyle/>
           <a:p>
-            <a:pPr algn="ctr" indent="0" marL="0">
+            <a:pPr marL="0" indent="0" algn="ctr">
               <a:buNone/>
             </a:pPr>
             <a:r>
@@ -10298,7 +10789,7 @@
         </p:nvSpPr>
         <p:spPr>
           <a:xfrm>
-            <a:off x="9171432" y="3337560"/>
+            <a:off x="9171432" y="2981960"/>
             <a:ext cx="2212848" cy="502920"/>
           </a:xfrm>
           <a:prstGeom prst="rect">
@@ -10311,7 +10802,7 @@
           <a:bodyPr wrap="square" lIns="0" tIns="0" rIns="0" bIns="0" rtlCol="0" anchor="ctr"/>
           <a:lstStyle/>
           <a:p>
-            <a:pPr algn="ctr" indent="0" marL="0">
+            <a:pPr marL="0" indent="0" algn="ctr">
               <a:buNone/>
             </a:pPr>
             <a:r>
@@ -10334,7 +10825,7 @@
         </p:nvSpPr>
         <p:spPr>
           <a:xfrm>
-            <a:off x="9208008" y="3886200"/>
+            <a:off x="9208008" y="3530600"/>
             <a:ext cx="2139696" cy="1097280"/>
           </a:xfrm>
           <a:prstGeom prst="rect">
@@ -10347,7 +10838,7 @@
           <a:bodyPr wrap="square" lIns="0" tIns="0" rIns="0" bIns="0" rtlCol="0" anchor="ctr"/>
           <a:lstStyle/>
           <a:p>
-            <a:pPr algn="ctr" indent="0" marL="0">
+            <a:pPr marL="0" indent="0" algn="ctr">
               <a:lnSpc>
                 <a:spcPct val="105000"/>
               </a:lnSpc>
@@ -10373,20 +10864,20 @@
         </p:nvSpPr>
         <p:spPr>
           <a:xfrm>
-            <a:off x="640080" y="5532120"/>
-            <a:ext cx="10881360" cy="731520"/>
-          </a:xfrm>
-          <a:prstGeom prst="rect">
-            <a:avLst/>
-          </a:prstGeom>
-          <a:noFill/>
-          <a:ln/>
-        </p:spPr>
-        <p:txBody>
-          <a:bodyPr wrap="square" lIns="0" tIns="0" rIns="0" bIns="0" rtlCol="0" anchor="ctr"/>
-          <a:lstStyle/>
-          <a:p>
-            <a:pPr algn="ctr" indent="0" marL="0">
+            <a:off x="640080" y="5781040"/>
+            <a:ext cx="10881360" cy="457200"/>
+          </a:xfrm>
+          <a:prstGeom prst="rect">
+            <a:avLst/>
+          </a:prstGeom>
+          <a:noFill/>
+          <a:ln/>
+        </p:spPr>
+        <p:txBody>
+          <a:bodyPr wrap="square" lIns="0" tIns="0" rIns="0" bIns="0" rtlCol="0" anchor="ctr"/>
+          <a:lstStyle/>
+          <a:p>
+            <a:pPr marL="0" indent="0" algn="ctr">
               <a:buNone/>
             </a:pPr>
             <a:r>
@@ -10422,7 +10913,7 @@
           <a:bodyPr wrap="square" lIns="0" tIns="0" rIns="0" bIns="0" rtlCol="0" anchor="ctr"/>
           <a:lstStyle/>
           <a:p>
-            <a:pPr algn="r" indent="0" marL="0">
+            <a:pPr marL="0" indent="0" algn="r">
               <a:buNone/>
             </a:pPr>
             <a:r>
@@ -10458,7 +10949,7 @@
           <a:bodyPr wrap="square" lIns="0" tIns="0" rIns="0" bIns="0" rtlCol="0" anchor="ctr"/>
           <a:lstStyle/>
           <a:p>
-            <a:pPr indent="0" marL="0">
+            <a:pPr marL="0" indent="0">
               <a:buNone/>
             </a:pPr>
             <a:r>
@@ -10470,6 +10961,54 @@
               <a:t>GeoLogic Analytics  ·  SPE Africa Geothermal Datathon 2026</a:t>
             </a:r>
             <a:endParaRPr lang="en-US" sz="900" dirty="0"/>
+          </a:p>
+        </p:txBody>
+      </p:sp>
+      <p:sp>
+        <p:nvSpPr>
+          <p:cNvPr id="35" name="Text 26">
+            <a:extLst>
+              <a:ext uri="{FF2B5EF4-FFF2-40B4-BE49-F238E27FC236}">
+                <a16:creationId xmlns:a16="http://schemas.microsoft.com/office/drawing/2014/main" id="{97AFFA04-06B8-5501-ABE2-4244C2800C23}"/>
+              </a:ext>
+            </a:extLst>
+          </p:cNvPr>
+          <p:cNvSpPr/>
+          <p:nvPr/>
+        </p:nvSpPr>
+        <p:spPr>
+          <a:xfrm>
+            <a:off x="655320" y="5070374"/>
+            <a:ext cx="10881360" cy="608533"/>
+          </a:xfrm>
+          <a:prstGeom prst="rect">
+            <a:avLst/>
+          </a:prstGeom>
+          <a:solidFill>
+            <a:srgbClr val="16395E"/>
+          </a:solidFill>
+          <a:ln w="6350">
+            <a:solidFill>
+              <a:srgbClr val="FFC000"/>
+            </a:solidFill>
+          </a:ln>
+        </p:spPr>
+        <p:txBody>
+          <a:bodyPr wrap="square" lIns="0" tIns="0" rIns="0" bIns="0" rtlCol="0" anchor="ctr"/>
+          <a:lstStyle/>
+          <a:p>
+            <a:pPr marL="0" indent="0" algn="ctr">
+              <a:buNone/>
+            </a:pPr>
+            <a:r>
+              <a:rPr lang="en-US" sz="1300" i="1" dirty="0">
+                <a:solidFill>
+                  <a:srgbClr val="AFC3D2"/>
+                </a:solidFill>
+              </a:rPr>
+              <a:t>Data-driven screening reduced four candidate wells to a transmissivity-ranked portfolio, identifying BLT-01 and GLA-01 as the highest-value production pair while reserving GLA-02 as a contingency target.</a:t>
+            </a:r>
+            <a:endParaRPr lang="en-US" sz="1300" dirty="0"/>
           </a:p>
         </p:txBody>
       </p:sp>
@@ -10489,6 +11028,7 @@
         <a:solidFill>
           <a:srgbClr val="F7FAFB"/>
         </a:solidFill>
+        <a:effectLst/>
       </p:bgPr>
     </p:bg>
     <p:spTree>
@@ -10524,6 +11064,13 @@
           </a:solidFill>
           <a:ln/>
         </p:spPr>
+        <p:txBody>
+          <a:bodyPr/>
+          <a:lstStyle/>
+          <a:p>
+            <a:endParaRPr lang="en-US"/>
+          </a:p>
+        </p:txBody>
       </p:sp>
       <p:sp>
         <p:nvSpPr>
@@ -10546,11 +11093,11 @@
           <a:bodyPr wrap="square" lIns="0" tIns="0" rIns="0" bIns="0" rtlCol="0" anchor="ctr"/>
           <a:lstStyle/>
           <a:p>
-            <a:pPr indent="0" marL="0">
-              <a:buNone/>
-            </a:pPr>
-            <a:r>
-              <a:rPr lang="en-US" sz="1200" b="1" spc="300" kern="0" dirty="0">
+            <a:pPr marL="0" indent="0">
+              <a:buNone/>
+            </a:pPr>
+            <a:r>
+              <a:rPr lang="en-US" sz="1200" b="1" kern="0" spc="300" dirty="0">
                 <a:solidFill>
                   <a:srgbClr val="D94F2A"/>
                 </a:solidFill>
@@ -10585,7 +11132,7 @@
           <a:bodyPr wrap="square" lIns="0" tIns="0" rIns="0" bIns="0" rtlCol="0" anchor="ctr"/>
           <a:lstStyle/>
           <a:p>
-            <a:pPr indent="0" marL="0">
+            <a:pPr marL="0" indent="0">
               <a:buNone/>
             </a:pPr>
             <a:r>
@@ -10629,24 +11176,31 @@
             <a:prstDash val="solid"/>
           </a:ln>
           <a:effectLst>
-            <a:outerShdw sx="100000" sy="100000" kx="0" ky="0" algn="bl" rotWithShape="0" blurRad="88900" dist="25400" dir="8100000">
+            <a:outerShdw blurRad="88900" dist="25400" dir="8100000" algn="bl" rotWithShape="0">
               <a:srgbClr val="1B2A38">
                 <a:alpha val="14000"/>
               </a:srgbClr>
             </a:outerShdw>
           </a:effectLst>
         </p:spPr>
+        <p:txBody>
+          <a:bodyPr/>
+          <a:lstStyle/>
+          <a:p>
+            <a:endParaRPr lang="en-US"/>
+          </a:p>
+        </p:txBody>
       </p:sp>
       <p:pic>
         <p:nvPicPr>
-          <p:cNvPr id="6" name="Image 0" descr="assets/missing_data_heatmap.png">    </p:cNvPr>
+          <p:cNvPr id="6" name="Image 0" descr="assets/missing_data_heatmap.png"/>
           <p:cNvPicPr>
             <a:picLocks noChangeAspect="1"/>
           </p:cNvPicPr>
           <p:nvPr/>
         </p:nvPicPr>
         <p:blipFill>
-          <a:blip r:embed="rId1"/>
+          <a:blip r:embed="rId3"/>
           <a:stretch>
             <a:fillRect/>
           </a:stretch>
@@ -10682,7 +11236,7 @@
           <a:bodyPr wrap="square" lIns="0" tIns="0" rIns="0" bIns="0" rtlCol="0" anchor="ctr"/>
           <a:lstStyle/>
           <a:p>
-            <a:pPr algn="ctr" indent="0" marL="0">
+            <a:pPr marL="0" indent="0" algn="ctr">
               <a:buNone/>
             </a:pPr>
             <a:r>
@@ -10723,24 +11277,31 @@
             <a:prstDash val="solid"/>
           </a:ln>
           <a:effectLst>
-            <a:outerShdw sx="100000" sy="100000" kx="0" ky="0" algn="bl" rotWithShape="0" blurRad="88900" dist="25400" dir="8100000">
+            <a:outerShdw blurRad="88900" dist="25400" dir="8100000" algn="bl" rotWithShape="0">
               <a:srgbClr val="1B2A38">
                 <a:alpha val="14000"/>
               </a:srgbClr>
             </a:outerShdw>
           </a:effectLst>
         </p:spPr>
+        <p:txBody>
+          <a:bodyPr/>
+          <a:lstStyle/>
+          <a:p>
+            <a:endParaRPr lang="en-US"/>
+          </a:p>
+        </p:txBody>
       </p:sp>
       <p:pic>
         <p:nvPicPr>
-          <p:cNvPr id="9" name="Image 1" descr="assets/md_vs_tvd_validation.png">    </p:cNvPr>
+          <p:cNvPr id="9" name="Image 1" descr="assets/md_vs_tvd_validation.png"/>
           <p:cNvPicPr>
             <a:picLocks noChangeAspect="1"/>
           </p:cNvPicPr>
           <p:nvPr/>
         </p:nvPicPr>
         <p:blipFill>
-          <a:blip r:embed="rId2"/>
+          <a:blip r:embed="rId4"/>
           <a:stretch>
             <a:fillRect/>
           </a:stretch>
@@ -10776,7 +11337,7 @@
           <a:bodyPr wrap="square" lIns="0" tIns="0" rIns="0" bIns="0" rtlCol="0" anchor="ctr"/>
           <a:lstStyle/>
           <a:p>
-            <a:pPr algn="ctr" indent="0" marL="0">
+            <a:pPr marL="0" indent="0" algn="ctr">
               <a:buNone/>
             </a:pPr>
             <a:r>
@@ -10812,7 +11373,7 @@
           <a:bodyPr wrap="square" lIns="0" tIns="0" rIns="0" bIns="0" rtlCol="0" anchor="ctr"/>
           <a:lstStyle/>
           <a:p>
-            <a:pPr indent="0" marL="0">
+            <a:pPr marL="0" indent="0">
               <a:lnSpc>
                 <a:spcPct val="95000"/>
               </a:lnSpc>
@@ -10856,13 +11417,20 @@
             <a:prstDash val="solid"/>
           </a:ln>
           <a:effectLst>
-            <a:outerShdw sx="100000" sy="100000" kx="0" ky="0" algn="bl" rotWithShape="0" blurRad="88900" dist="25400" dir="8100000">
+            <a:outerShdw blurRad="88900" dist="25400" dir="8100000" algn="bl" rotWithShape="0">
               <a:srgbClr val="1B2A38">
                 <a:alpha val="14000"/>
               </a:srgbClr>
             </a:outerShdw>
           </a:effectLst>
         </p:spPr>
+        <p:txBody>
+          <a:bodyPr/>
+          <a:lstStyle/>
+          <a:p>
+            <a:endParaRPr lang="en-US"/>
+          </a:p>
+        </p:txBody>
       </p:sp>
       <p:sp>
         <p:nvSpPr>
@@ -10883,6 +11451,13 @@
           </a:solidFill>
           <a:ln/>
         </p:spPr>
+        <p:txBody>
+          <a:bodyPr/>
+          <a:lstStyle/>
+          <a:p>
+            <a:endParaRPr lang="en-US"/>
+          </a:p>
+        </p:txBody>
       </p:sp>
       <p:sp>
         <p:nvSpPr>
@@ -10905,7 +11480,7 @@
           <a:bodyPr wrap="square" lIns="0" tIns="0" rIns="0" bIns="0" rtlCol="0" anchor="ctr"/>
           <a:lstStyle/>
           <a:p>
-            <a:pPr indent="0" marL="0">
+            <a:pPr marL="0" indent="0">
               <a:buNone/>
             </a:pPr>
             <a:r>
@@ -10941,7 +11516,7 @@
           <a:bodyPr wrap="square" lIns="0" tIns="0" rIns="0" bIns="0" rtlCol="0" anchor="ctr"/>
           <a:lstStyle/>
           <a:p>
-            <a:pPr indent="0" marL="0">
+            <a:pPr marL="0" indent="0">
               <a:lnSpc>
                 <a:spcPct val="104000"/>
               </a:lnSpc>
@@ -10985,13 +11560,20 @@
             <a:prstDash val="solid"/>
           </a:ln>
           <a:effectLst>
-            <a:outerShdw sx="100000" sy="100000" kx="0" ky="0" algn="bl" rotWithShape="0" blurRad="88900" dist="25400" dir="8100000">
+            <a:outerShdw blurRad="88900" dist="25400" dir="8100000" algn="bl" rotWithShape="0">
               <a:srgbClr val="1B2A38">
                 <a:alpha val="14000"/>
               </a:srgbClr>
             </a:outerShdw>
           </a:effectLst>
         </p:spPr>
+        <p:txBody>
+          <a:bodyPr/>
+          <a:lstStyle/>
+          <a:p>
+            <a:endParaRPr lang="en-US"/>
+          </a:p>
+        </p:txBody>
       </p:sp>
       <p:sp>
         <p:nvSpPr>
@@ -11012,6 +11594,13 @@
           </a:solidFill>
           <a:ln/>
         </p:spPr>
+        <p:txBody>
+          <a:bodyPr/>
+          <a:lstStyle/>
+          <a:p>
+            <a:endParaRPr lang="en-US"/>
+          </a:p>
+        </p:txBody>
       </p:sp>
       <p:sp>
         <p:nvSpPr>
@@ -11034,7 +11623,7 @@
           <a:bodyPr wrap="square" lIns="0" tIns="0" rIns="0" bIns="0" rtlCol="0" anchor="ctr"/>
           <a:lstStyle/>
           <a:p>
-            <a:pPr indent="0" marL="0">
+            <a:pPr marL="0" indent="0">
               <a:buNone/>
             </a:pPr>
             <a:r>
@@ -11070,7 +11659,7 @@
           <a:bodyPr wrap="square" lIns="0" tIns="0" rIns="0" bIns="0" rtlCol="0" anchor="ctr"/>
           <a:lstStyle/>
           <a:p>
-            <a:pPr indent="0" marL="0">
+            <a:pPr marL="0" indent="0">
               <a:lnSpc>
                 <a:spcPct val="104000"/>
               </a:lnSpc>
@@ -11114,13 +11703,20 @@
             <a:prstDash val="solid"/>
           </a:ln>
           <a:effectLst>
-            <a:outerShdw sx="100000" sy="100000" kx="0" ky="0" algn="bl" rotWithShape="0" blurRad="88900" dist="25400" dir="8100000">
+            <a:outerShdw blurRad="88900" dist="25400" dir="8100000" algn="bl" rotWithShape="0">
               <a:srgbClr val="1B2A38">
                 <a:alpha val="14000"/>
               </a:srgbClr>
             </a:outerShdw>
           </a:effectLst>
         </p:spPr>
+        <p:txBody>
+          <a:bodyPr/>
+          <a:lstStyle/>
+          <a:p>
+            <a:endParaRPr lang="en-US"/>
+          </a:p>
+        </p:txBody>
       </p:sp>
       <p:sp>
         <p:nvSpPr>
@@ -11141,6 +11737,13 @@
           </a:solidFill>
           <a:ln/>
         </p:spPr>
+        <p:txBody>
+          <a:bodyPr/>
+          <a:lstStyle/>
+          <a:p>
+            <a:endParaRPr lang="en-US"/>
+          </a:p>
+        </p:txBody>
       </p:sp>
       <p:sp>
         <p:nvSpPr>
@@ -11163,7 +11766,7 @@
           <a:bodyPr wrap="square" lIns="0" tIns="0" rIns="0" bIns="0" rtlCol="0" anchor="ctr"/>
           <a:lstStyle/>
           <a:p>
-            <a:pPr indent="0" marL="0">
+            <a:pPr marL="0" indent="0">
               <a:buNone/>
             </a:pPr>
             <a:r>
@@ -11199,7 +11802,7 @@
           <a:bodyPr wrap="square" lIns="0" tIns="0" rIns="0" bIns="0" rtlCol="0" anchor="ctr"/>
           <a:lstStyle/>
           <a:p>
-            <a:pPr indent="0" marL="0">
+            <a:pPr marL="0" indent="0">
               <a:lnSpc>
                 <a:spcPct val="104000"/>
               </a:lnSpc>
@@ -11238,7 +11841,7 @@
           <a:bodyPr wrap="square" lIns="0" tIns="0" rIns="0" bIns="0" rtlCol="0" anchor="ctr"/>
           <a:lstStyle/>
           <a:p>
-            <a:pPr algn="r" indent="0" marL="0">
+            <a:pPr marL="0" indent="0" algn="r">
               <a:buNone/>
             </a:pPr>
             <a:r>
@@ -11274,7 +11877,7 @@
           <a:bodyPr wrap="square" lIns="0" tIns="0" rIns="0" bIns="0" rtlCol="0" anchor="ctr"/>
           <a:lstStyle/>
           <a:p>
-            <a:pPr indent="0" marL="0">
+            <a:pPr marL="0" indent="0">
               <a:buNone/>
             </a:pPr>
             <a:r>
@@ -11305,6 +11908,7 @@
         <a:solidFill>
           <a:srgbClr val="F7FAFB"/>
         </a:solidFill>
+        <a:effectLst/>
       </p:bgPr>
     </p:bg>
     <p:spTree>
@@ -11340,6 +11944,13 @@
           </a:solidFill>
           <a:ln/>
         </p:spPr>
+        <p:txBody>
+          <a:bodyPr/>
+          <a:lstStyle/>
+          <a:p>
+            <a:endParaRPr lang="en-US"/>
+          </a:p>
+        </p:txBody>
       </p:sp>
       <p:sp>
         <p:nvSpPr>
@@ -11362,11 +11973,11 @@
           <a:bodyPr wrap="square" lIns="0" tIns="0" rIns="0" bIns="0" rtlCol="0" anchor="ctr"/>
           <a:lstStyle/>
           <a:p>
-            <a:pPr indent="0" marL="0">
-              <a:buNone/>
-            </a:pPr>
-            <a:r>
-              <a:rPr lang="en-US" sz="1200" b="1" spc="300" kern="0" dirty="0">
+            <a:pPr marL="0" indent="0">
+              <a:buNone/>
+            </a:pPr>
+            <a:r>
+              <a:rPr lang="en-US" sz="1200" b="1" kern="0" spc="300" dirty="0">
                 <a:solidFill>
                   <a:srgbClr val="1C8C8C"/>
                 </a:solidFill>
@@ -11401,7 +12012,7 @@
           <a:bodyPr wrap="square" lIns="0" tIns="0" rIns="0" bIns="0" rtlCol="0" anchor="ctr"/>
           <a:lstStyle/>
           <a:p>
-            <a:pPr indent="0" marL="0">
+            <a:pPr marL="0" indent="0">
               <a:buNone/>
             </a:pPr>
             <a:r>
@@ -11445,24 +12056,31 @@
             <a:prstDash val="solid"/>
           </a:ln>
           <a:effectLst>
-            <a:outerShdw sx="100000" sy="100000" kx="0" ky="0" algn="bl" rotWithShape="0" blurRad="88900" dist="25400" dir="8100000">
+            <a:outerShdw blurRad="88900" dist="25400" dir="8100000" algn="bl" rotWithShape="0">
               <a:srgbClr val="1B2A38">
                 <a:alpha val="14000"/>
               </a:srgbClr>
             </a:outerShdw>
           </a:effectLst>
         </p:spPr>
+        <p:txBody>
+          <a:bodyPr/>
+          <a:lstStyle/>
+          <a:p>
+            <a:endParaRPr lang="en-US"/>
+          </a:p>
+        </p:txBody>
       </p:sp>
       <p:pic>
         <p:nvPicPr>
-          <p:cNvPr id="6" name="Image 0" descr="assets/transmissivity_comparison.png">    </p:cNvPr>
+          <p:cNvPr id="6" name="Image 0" descr="assets/transmissivity_comparison.png"/>
           <p:cNvPicPr>
             <a:picLocks noChangeAspect="1"/>
           </p:cNvPicPr>
           <p:nvPr/>
         </p:nvPicPr>
         <p:blipFill>
-          <a:blip r:embed="rId1"/>
+          <a:blip r:embed="rId3"/>
           <a:stretch>
             <a:fillRect/>
           </a:stretch>
@@ -11498,7 +12116,7 @@
           <a:bodyPr wrap="square" lIns="0" tIns="0" rIns="0" bIns="0" rtlCol="0" anchor="ctr"/>
           <a:lstStyle/>
           <a:p>
-            <a:pPr algn="ctr" indent="0" marL="0">
+            <a:pPr marL="0" indent="0" algn="ctr">
               <a:buNone/>
             </a:pPr>
             <a:r>
@@ -11539,24 +12157,31 @@
             <a:prstDash val="solid"/>
           </a:ln>
           <a:effectLst>
-            <a:outerShdw sx="100000" sy="100000" kx="0" ky="0" algn="bl" rotWithShape="0" blurRad="88900" dist="25400" dir="8100000">
+            <a:outerShdw blurRad="88900" dist="25400" dir="8100000" algn="bl" rotWithShape="0">
               <a:srgbClr val="1B2A38">
                 <a:alpha val="14000"/>
               </a:srgbClr>
             </a:outerShdw>
           </a:effectLst>
         </p:spPr>
+        <p:txBody>
+          <a:bodyPr/>
+          <a:lstStyle/>
+          <a:p>
+            <a:endParaRPr lang="en-US"/>
+          </a:p>
+        </p:txBody>
       </p:sp>
       <p:pic>
         <p:nvPicPr>
-          <p:cNvPr id="9" name="Image 1" descr="assets/temp_vs_transmissivity.png">    </p:cNvPr>
+          <p:cNvPr id="9" name="Image 1" descr="assets/temp_vs_transmissivity.png"/>
           <p:cNvPicPr>
             <a:picLocks noChangeAspect="1"/>
           </p:cNvPicPr>
           <p:nvPr/>
         </p:nvPicPr>
         <p:blipFill>
-          <a:blip r:embed="rId2"/>
+          <a:blip r:embed="rId4"/>
           <a:stretch>
             <a:fillRect/>
           </a:stretch>
@@ -11592,7 +12217,7 @@
           <a:bodyPr wrap="square" lIns="0" tIns="0" rIns="0" bIns="0" rtlCol="0" anchor="ctr"/>
           <a:lstStyle/>
           <a:p>
-            <a:pPr algn="ctr" indent="0" marL="0">
+            <a:pPr marL="0" indent="0" algn="ctr">
               <a:buNone/>
             </a:pPr>
             <a:r>
@@ -11633,13 +12258,20 @@
             <a:prstDash val="solid"/>
           </a:ln>
           <a:effectLst>
-            <a:outerShdw sx="100000" sy="100000" kx="0" ky="0" algn="bl" rotWithShape="0" blurRad="88900" dist="25400" dir="8100000">
+            <a:outerShdw blurRad="88900" dist="25400" dir="8100000" algn="bl" rotWithShape="0">
               <a:srgbClr val="1B2A38">
                 <a:alpha val="14000"/>
               </a:srgbClr>
             </a:outerShdw>
           </a:effectLst>
         </p:spPr>
+        <p:txBody>
+          <a:bodyPr/>
+          <a:lstStyle/>
+          <a:p>
+            <a:endParaRPr lang="en-US"/>
+          </a:p>
+        </p:txBody>
       </p:sp>
       <p:sp>
         <p:nvSpPr>
@@ -11660,6 +12292,13 @@
           </a:solidFill>
           <a:ln/>
         </p:spPr>
+        <p:txBody>
+          <a:bodyPr/>
+          <a:lstStyle/>
+          <a:p>
+            <a:endParaRPr lang="en-US"/>
+          </a:p>
+        </p:txBody>
       </p:sp>
       <p:sp>
         <p:nvSpPr>
@@ -11682,7 +12321,7 @@
           <a:bodyPr wrap="square" lIns="0" tIns="0" rIns="0" bIns="0" rtlCol="0" anchor="ctr"/>
           <a:lstStyle/>
           <a:p>
-            <a:pPr algn="l" indent="0" marL="0">
+            <a:pPr marL="0" indent="0" algn="l">
               <a:buNone/>
             </a:pPr>
             <a:r>
@@ -11721,7 +12360,7 @@
           <a:bodyPr wrap="square" lIns="0" tIns="0" rIns="0" bIns="0" rtlCol="0" anchor="t"/>
           <a:lstStyle/>
           <a:p>
-            <a:pPr algn="l" indent="0" marL="0">
+            <a:pPr marL="0" indent="0" algn="l">
               <a:buNone/>
             </a:pPr>
             <a:r>
@@ -11765,13 +12404,20 @@
             <a:prstDash val="solid"/>
           </a:ln>
           <a:effectLst>
-            <a:outerShdw sx="100000" sy="100000" kx="0" ky="0" algn="bl" rotWithShape="0" blurRad="88900" dist="25400" dir="8100000">
+            <a:outerShdw blurRad="88900" dist="25400" dir="8100000" algn="bl" rotWithShape="0">
               <a:srgbClr val="1B2A38">
                 <a:alpha val="14000"/>
               </a:srgbClr>
             </a:outerShdw>
           </a:effectLst>
         </p:spPr>
+        <p:txBody>
+          <a:bodyPr/>
+          <a:lstStyle/>
+          <a:p>
+            <a:endParaRPr lang="en-US"/>
+          </a:p>
+        </p:txBody>
       </p:sp>
       <p:sp>
         <p:nvSpPr>
@@ -11792,6 +12438,13 @@
           </a:solidFill>
           <a:ln/>
         </p:spPr>
+        <p:txBody>
+          <a:bodyPr/>
+          <a:lstStyle/>
+          <a:p>
+            <a:endParaRPr lang="en-US"/>
+          </a:p>
+        </p:txBody>
       </p:sp>
       <p:sp>
         <p:nvSpPr>
@@ -11814,7 +12467,7 @@
           <a:bodyPr wrap="square" lIns="0" tIns="0" rIns="0" bIns="0" rtlCol="0" anchor="ctr"/>
           <a:lstStyle/>
           <a:p>
-            <a:pPr algn="l" indent="0" marL="0">
+            <a:pPr marL="0" indent="0" algn="l">
               <a:buNone/>
             </a:pPr>
             <a:r>
@@ -11853,7 +12506,7 @@
           <a:bodyPr wrap="square" lIns="0" tIns="0" rIns="0" bIns="0" rtlCol="0" anchor="t"/>
           <a:lstStyle/>
           <a:p>
-            <a:pPr algn="l" indent="0" marL="0">
+            <a:pPr marL="0" indent="0" algn="l">
               <a:buNone/>
             </a:pPr>
             <a:r>
@@ -11892,7 +12545,7 @@
           <a:bodyPr wrap="square" lIns="0" tIns="0" rIns="0" bIns="0" rtlCol="0" anchor="ctr"/>
           <a:lstStyle/>
           <a:p>
-            <a:pPr algn="r" indent="0" marL="0">
+            <a:pPr marL="0" indent="0" algn="r">
               <a:buNone/>
             </a:pPr>
             <a:r>
@@ -11928,7 +12581,7 @@
           <a:bodyPr wrap="square" lIns="0" tIns="0" rIns="0" bIns="0" rtlCol="0" anchor="ctr"/>
           <a:lstStyle/>
           <a:p>
-            <a:pPr indent="0" marL="0">
+            <a:pPr marL="0" indent="0">
               <a:buNone/>
             </a:pPr>
             <a:r>
@@ -11959,6 +12612,7 @@
         <a:solidFill>
           <a:srgbClr val="F7FAFB"/>
         </a:solidFill>
+        <a:effectLst/>
       </p:bgPr>
     </p:bg>
     <p:spTree>
@@ -11994,6 +12648,13 @@
           </a:solidFill>
           <a:ln/>
         </p:spPr>
+        <p:txBody>
+          <a:bodyPr/>
+          <a:lstStyle/>
+          <a:p>
+            <a:endParaRPr lang="en-US"/>
+          </a:p>
+        </p:txBody>
       </p:sp>
       <p:sp>
         <p:nvSpPr>
@@ -12016,11 +12677,11 @@
           <a:bodyPr wrap="square" lIns="0" tIns="0" rIns="0" bIns="0" rtlCol="0" anchor="ctr"/>
           <a:lstStyle/>
           <a:p>
-            <a:pPr indent="0" marL="0">
-              <a:buNone/>
-            </a:pPr>
-            <a:r>
-              <a:rPr lang="en-US" sz="1200" b="1" spc="300" kern="0" dirty="0">
+            <a:pPr marL="0" indent="0">
+              <a:buNone/>
+            </a:pPr>
+            <a:r>
+              <a:rPr lang="en-US" sz="1200" b="1" kern="0" spc="300" dirty="0">
                 <a:solidFill>
                   <a:srgbClr val="1C8C8C"/>
                 </a:solidFill>
@@ -12055,7 +12716,7 @@
           <a:bodyPr wrap="square" lIns="0" tIns="0" rIns="0" bIns="0" rtlCol="0" anchor="ctr"/>
           <a:lstStyle/>
           <a:p>
-            <a:pPr indent="0" marL="0">
+            <a:pPr marL="0" indent="0">
               <a:buNone/>
             </a:pPr>
             <a:r>
@@ -12092,6 +12753,13 @@
           </a:solidFill>
           <a:ln/>
         </p:spPr>
+        <p:txBody>
+          <a:bodyPr/>
+          <a:lstStyle/>
+          <a:p>
+            <a:endParaRPr lang="en-US"/>
+          </a:p>
+        </p:txBody>
       </p:sp>
       <p:sp>
         <p:nvSpPr>
@@ -12114,7 +12782,7 @@
           <a:bodyPr wrap="square" lIns="1016" tIns="1016" rIns="1016" bIns="1016" rtlCol="0" anchor="ctr"/>
           <a:lstStyle/>
           <a:p>
-            <a:pPr algn="l" indent="0" marL="0">
+            <a:pPr marL="0" indent="0" algn="l">
               <a:buNone/>
             </a:pPr>
             <a:r>
@@ -12150,7 +12818,7 @@
           <a:bodyPr wrap="square" lIns="1016" tIns="1016" rIns="1016" bIns="1016" rtlCol="0" anchor="ctr"/>
           <a:lstStyle/>
           <a:p>
-            <a:pPr algn="l" indent="0" marL="0">
+            <a:pPr marL="0" indent="0" algn="l">
               <a:buNone/>
             </a:pPr>
             <a:r>
@@ -12186,7 +12854,7 @@
           <a:bodyPr wrap="square" lIns="0" tIns="0" rIns="0" bIns="0" rtlCol="0" anchor="ctr"/>
           <a:lstStyle/>
           <a:p>
-            <a:pPr algn="ctr" indent="0" marL="0">
+            <a:pPr marL="0" indent="0" algn="ctr">
               <a:buNone/>
             </a:pPr>
             <a:r>
@@ -12222,7 +12890,7 @@
           <a:bodyPr wrap="square" lIns="0" tIns="0" rIns="0" bIns="0" rtlCol="0" anchor="ctr"/>
           <a:lstStyle/>
           <a:p>
-            <a:pPr algn="ctr" indent="0" marL="0">
+            <a:pPr marL="0" indent="0" algn="ctr">
               <a:buNone/>
             </a:pPr>
             <a:r>
@@ -12258,7 +12926,7 @@
           <a:bodyPr wrap="square" lIns="0" tIns="0" rIns="0" bIns="0" rtlCol="0" anchor="ctr"/>
           <a:lstStyle/>
           <a:p>
-            <a:pPr algn="ctr" indent="0" marL="0">
+            <a:pPr marL="0" indent="0" algn="ctr">
               <a:buNone/>
             </a:pPr>
             <a:r>
@@ -12292,6 +12960,13 @@
           </a:solidFill>
           <a:ln/>
         </p:spPr>
+        <p:txBody>
+          <a:bodyPr/>
+          <a:lstStyle/>
+          <a:p>
+            <a:endParaRPr lang="en-US"/>
+          </a:p>
+        </p:txBody>
       </p:sp>
       <p:sp>
         <p:nvSpPr>
@@ -12312,6 +12987,13 @@
           </a:solidFill>
           <a:ln/>
         </p:spPr>
+        <p:txBody>
+          <a:bodyPr/>
+          <a:lstStyle/>
+          <a:p>
+            <a:endParaRPr lang="en-US"/>
+          </a:p>
+        </p:txBody>
       </p:sp>
       <p:sp>
         <p:nvSpPr>
@@ -12334,7 +13016,7 @@
           <a:bodyPr wrap="square" lIns="0" tIns="0" rIns="0" bIns="0" rtlCol="0" anchor="ctr"/>
           <a:lstStyle/>
           <a:p>
-            <a:pPr indent="0" marL="0">
+            <a:pPr marL="0" indent="0">
               <a:buNone/>
             </a:pPr>
             <a:r>
@@ -12370,7 +13052,7 @@
           <a:bodyPr wrap="square" lIns="1016" tIns="1016" rIns="1016" bIns="1016" rtlCol="0" anchor="ctr"/>
           <a:lstStyle/>
           <a:p>
-            <a:pPr indent="0" marL="0">
+            <a:pPr marL="0" indent="0">
               <a:buNone/>
             </a:pPr>
             <a:r>
@@ -12406,7 +13088,7 @@
           <a:bodyPr wrap="square" lIns="0" tIns="0" rIns="0" bIns="0" rtlCol="0" anchor="ctr"/>
           <a:lstStyle/>
           <a:p>
-            <a:pPr algn="ctr" indent="0" marL="0">
+            <a:pPr marL="0" indent="0" algn="ctr">
               <a:buNone/>
             </a:pPr>
             <a:r>
@@ -12442,7 +13124,7 @@
           <a:bodyPr wrap="square" lIns="0" tIns="0" rIns="0" bIns="0" rtlCol="0" anchor="ctr"/>
           <a:lstStyle/>
           <a:p>
-            <a:pPr algn="ctr" indent="0" marL="0">
+            <a:pPr marL="0" indent="0" algn="ctr">
               <a:buNone/>
             </a:pPr>
             <a:r>
@@ -12478,7 +13160,7 @@
           <a:bodyPr wrap="square" lIns="0" tIns="0" rIns="0" bIns="0" rtlCol="0" anchor="ctr"/>
           <a:lstStyle/>
           <a:p>
-            <a:pPr algn="ctr" indent="0" marL="0">
+            <a:pPr marL="0" indent="0" algn="ctr">
               <a:buNone/>
             </a:pPr>
             <a:r>
@@ -12512,6 +13194,13 @@
           </a:solidFill>
           <a:ln/>
         </p:spPr>
+        <p:txBody>
+          <a:bodyPr/>
+          <a:lstStyle/>
+          <a:p>
+            <a:endParaRPr lang="en-US"/>
+          </a:p>
+        </p:txBody>
       </p:sp>
       <p:sp>
         <p:nvSpPr>
@@ -12532,6 +13221,13 @@
           </a:solidFill>
           <a:ln/>
         </p:spPr>
+        <p:txBody>
+          <a:bodyPr/>
+          <a:lstStyle/>
+          <a:p>
+            <a:endParaRPr lang="en-US"/>
+          </a:p>
+        </p:txBody>
       </p:sp>
       <p:sp>
         <p:nvSpPr>
@@ -12554,7 +13250,7 @@
           <a:bodyPr wrap="square" lIns="0" tIns="0" rIns="0" bIns="0" rtlCol="0" anchor="ctr"/>
           <a:lstStyle/>
           <a:p>
-            <a:pPr indent="0" marL="0">
+            <a:pPr marL="0" indent="0">
               <a:buNone/>
             </a:pPr>
             <a:r>
@@ -12590,7 +13286,7 @@
           <a:bodyPr wrap="square" lIns="1016" tIns="1016" rIns="1016" bIns="1016" rtlCol="0" anchor="ctr"/>
           <a:lstStyle/>
           <a:p>
-            <a:pPr indent="0" marL="0">
+            <a:pPr marL="0" indent="0">
               <a:buNone/>
             </a:pPr>
             <a:r>
@@ -12626,7 +13322,7 @@
           <a:bodyPr wrap="square" lIns="0" tIns="0" rIns="0" bIns="0" rtlCol="0" anchor="ctr"/>
           <a:lstStyle/>
           <a:p>
-            <a:pPr algn="ctr" indent="0" marL="0">
+            <a:pPr marL="0" indent="0" algn="ctr">
               <a:buNone/>
             </a:pPr>
             <a:r>
@@ -12662,7 +13358,7 @@
           <a:bodyPr wrap="square" lIns="0" tIns="0" rIns="0" bIns="0" rtlCol="0" anchor="ctr"/>
           <a:lstStyle/>
           <a:p>
-            <a:pPr algn="ctr" indent="0" marL="0">
+            <a:pPr marL="0" indent="0" algn="ctr">
               <a:buNone/>
             </a:pPr>
             <a:r>
@@ -12698,7 +13394,7 @@
           <a:bodyPr wrap="square" lIns="0" tIns="0" rIns="0" bIns="0" rtlCol="0" anchor="ctr"/>
           <a:lstStyle/>
           <a:p>
-            <a:pPr algn="ctr" indent="0" marL="0">
+            <a:pPr marL="0" indent="0" algn="ctr">
               <a:buNone/>
             </a:pPr>
             <a:r>
@@ -12732,6 +13428,13 @@
           </a:solidFill>
           <a:ln/>
         </p:spPr>
+        <p:txBody>
+          <a:bodyPr/>
+          <a:lstStyle/>
+          <a:p>
+            <a:endParaRPr lang="en-US"/>
+          </a:p>
+        </p:txBody>
       </p:sp>
       <p:sp>
         <p:nvSpPr>
@@ -12752,6 +13455,13 @@
           </a:solidFill>
           <a:ln/>
         </p:spPr>
+        <p:txBody>
+          <a:bodyPr/>
+          <a:lstStyle/>
+          <a:p>
+            <a:endParaRPr lang="en-US"/>
+          </a:p>
+        </p:txBody>
       </p:sp>
       <p:sp>
         <p:nvSpPr>
@@ -12774,7 +13484,7 @@
           <a:bodyPr wrap="square" lIns="0" tIns="0" rIns="0" bIns="0" rtlCol="0" anchor="ctr"/>
           <a:lstStyle/>
           <a:p>
-            <a:pPr indent="0" marL="0">
+            <a:pPr marL="0" indent="0">
               <a:buNone/>
             </a:pPr>
             <a:r>
@@ -12810,7 +13520,7 @@
           <a:bodyPr wrap="square" lIns="1016" tIns="1016" rIns="1016" bIns="1016" rtlCol="0" anchor="ctr"/>
           <a:lstStyle/>
           <a:p>
-            <a:pPr indent="0" marL="0">
+            <a:pPr marL="0" indent="0">
               <a:buNone/>
             </a:pPr>
             <a:r>
@@ -12846,7 +13556,7 @@
           <a:bodyPr wrap="square" lIns="0" tIns="0" rIns="0" bIns="0" rtlCol="0" anchor="ctr"/>
           <a:lstStyle/>
           <a:p>
-            <a:pPr algn="ctr" indent="0" marL="0">
+            <a:pPr marL="0" indent="0" algn="ctr">
               <a:buNone/>
             </a:pPr>
             <a:r>
@@ -12882,7 +13592,7 @@
           <a:bodyPr wrap="square" lIns="0" tIns="0" rIns="0" bIns="0" rtlCol="0" anchor="ctr"/>
           <a:lstStyle/>
           <a:p>
-            <a:pPr algn="ctr" indent="0" marL="0">
+            <a:pPr marL="0" indent="0" algn="ctr">
               <a:buNone/>
             </a:pPr>
             <a:r>
@@ -12918,7 +13628,7 @@
           <a:bodyPr wrap="square" lIns="0" tIns="0" rIns="0" bIns="0" rtlCol="0" anchor="ctr"/>
           <a:lstStyle/>
           <a:p>
-            <a:pPr algn="ctr" indent="0" marL="0">
+            <a:pPr marL="0" indent="0" algn="ctr">
               <a:buNone/>
             </a:pPr>
             <a:r>
@@ -12952,6 +13662,13 @@
           </a:solidFill>
           <a:ln/>
         </p:spPr>
+        <p:txBody>
+          <a:bodyPr/>
+          <a:lstStyle/>
+          <a:p>
+            <a:endParaRPr lang="en-US"/>
+          </a:p>
+        </p:txBody>
       </p:sp>
       <p:sp>
         <p:nvSpPr>
@@ -12972,6 +13689,13 @@
           </a:solidFill>
           <a:ln/>
         </p:spPr>
+        <p:txBody>
+          <a:bodyPr/>
+          <a:lstStyle/>
+          <a:p>
+            <a:endParaRPr lang="en-US"/>
+          </a:p>
+        </p:txBody>
       </p:sp>
       <p:sp>
         <p:nvSpPr>
@@ -12994,7 +13718,7 @@
           <a:bodyPr wrap="square" lIns="0" tIns="0" rIns="0" bIns="0" rtlCol="0" anchor="ctr"/>
           <a:lstStyle/>
           <a:p>
-            <a:pPr indent="0" marL="0">
+            <a:pPr marL="0" indent="0">
               <a:buNone/>
             </a:pPr>
             <a:r>
@@ -13030,7 +13754,7 @@
           <a:bodyPr wrap="square" lIns="1016" tIns="1016" rIns="1016" bIns="1016" rtlCol="0" anchor="ctr"/>
           <a:lstStyle/>
           <a:p>
-            <a:pPr indent="0" marL="0">
+            <a:pPr marL="0" indent="0">
               <a:buNone/>
             </a:pPr>
             <a:r>
@@ -13066,7 +13790,7 @@
           <a:bodyPr wrap="square" lIns="0" tIns="0" rIns="0" bIns="0" rtlCol="0" anchor="ctr"/>
           <a:lstStyle/>
           <a:p>
-            <a:pPr algn="ctr" indent="0" marL="0">
+            <a:pPr marL="0" indent="0" algn="ctr">
               <a:buNone/>
             </a:pPr>
             <a:r>
@@ -13102,7 +13826,7 @@
           <a:bodyPr wrap="square" lIns="0" tIns="0" rIns="0" bIns="0" rtlCol="0" anchor="ctr"/>
           <a:lstStyle/>
           <a:p>
-            <a:pPr algn="ctr" indent="0" marL="0">
+            <a:pPr marL="0" indent="0" algn="ctr">
               <a:buNone/>
             </a:pPr>
             <a:r>
@@ -13138,7 +13862,7 @@
           <a:bodyPr wrap="square" lIns="0" tIns="0" rIns="0" bIns="0" rtlCol="0" anchor="ctr"/>
           <a:lstStyle/>
           <a:p>
-            <a:pPr algn="ctr" indent="0" marL="0">
+            <a:pPr marL="0" indent="0" algn="ctr">
               <a:buNone/>
             </a:pPr>
             <a:r>
@@ -13174,13 +13898,20 @@
           </a:solidFill>
           <a:ln/>
           <a:effectLst>
-            <a:outerShdw sx="100000" sy="100000" kx="0" ky="0" algn="bl" rotWithShape="0" blurRad="114300" dist="38100" dir="8100000">
+            <a:outerShdw blurRad="114300" dist="38100" dir="8100000" algn="bl" rotWithShape="0">
               <a:srgbClr val="0A1722">
                 <a:alpha val="22000"/>
               </a:srgbClr>
             </a:outerShdw>
           </a:effectLst>
         </p:spPr>
+        <p:txBody>
+          <a:bodyPr/>
+          <a:lstStyle/>
+          <a:p>
+            <a:endParaRPr lang="en-US"/>
+          </a:p>
+        </p:txBody>
       </p:sp>
       <p:sp>
         <p:nvSpPr>
@@ -13203,7 +13934,7 @@
           <a:bodyPr wrap="square" lIns="0" tIns="0" rIns="0" bIns="0" rtlCol="0" anchor="ctr"/>
           <a:lstStyle/>
           <a:p>
-            <a:pPr indent="0" marL="0">
+            <a:pPr marL="0" indent="0">
               <a:lnSpc>
                 <a:spcPct val="106000"/>
               </a:lnSpc>
@@ -13217,12 +13948,6 @@
               </a:rPr>
               <a:t>Production doublet:  </a:t>
             </a:r>
-            <a:pPr indent="0" marL="0">
-              <a:lnSpc>
-                <a:spcPct val="106000"/>
-              </a:lnSpc>
-              <a:buNone/>
-            </a:pPr>
             <a:r>
               <a:rPr lang="en-US" sz="1300" dirty="0">
                 <a:solidFill>
@@ -13261,13 +13986,20 @@
             <a:prstDash val="solid"/>
           </a:ln>
           <a:effectLst>
-            <a:outerShdw sx="100000" sy="100000" kx="0" ky="0" algn="bl" rotWithShape="0" blurRad="88900" dist="25400" dir="8100000">
+            <a:outerShdw blurRad="88900" dist="25400" dir="8100000" algn="bl" rotWithShape="0">
               <a:srgbClr val="1B2A38">
                 <a:alpha val="14000"/>
               </a:srgbClr>
             </a:outerShdw>
           </a:effectLst>
         </p:spPr>
+        <p:txBody>
+          <a:bodyPr/>
+          <a:lstStyle/>
+          <a:p>
+            <a:endParaRPr lang="en-US"/>
+          </a:p>
+        </p:txBody>
       </p:sp>
       <p:sp>
         <p:nvSpPr>
@@ -13290,7 +14022,7 @@
           <a:bodyPr wrap="square" lIns="0" tIns="0" rIns="0" bIns="0" rtlCol="0" anchor="ctr"/>
           <a:lstStyle/>
           <a:p>
-            <a:pPr indent="0" marL="0">
+            <a:pPr marL="0" indent="0">
               <a:buNone/>
             </a:pPr>
             <a:r>
@@ -13307,14 +14039,14 @@
       </p:sp>
       <p:pic>
         <p:nvPicPr>
-          <p:cNvPr id="43" name="Image 0" descr="assets/gla01_thermogis_properties.jpg">    </p:cNvPr>
+          <p:cNvPr id="43" name="Image 0" descr="assets/gla01_thermogis_properties.jpg"/>
           <p:cNvPicPr>
             <a:picLocks noChangeAspect="1"/>
           </p:cNvPicPr>
           <p:nvPr/>
         </p:nvPicPr>
         <p:blipFill>
-          <a:blip r:embed="rId1"/>
+          <a:blip r:embed="rId3"/>
           <a:stretch>
             <a:fillRect/>
           </a:stretch>
@@ -13350,7 +14082,7 @@
           <a:bodyPr wrap="square" lIns="0" tIns="0" rIns="0" bIns="0" rtlCol="0" anchor="ctr"/>
           <a:lstStyle/>
           <a:p>
-            <a:pPr algn="r" indent="0" marL="0">
+            <a:pPr marL="0" indent="0" algn="r">
               <a:buNone/>
             </a:pPr>
             <a:r>
@@ -13386,7 +14118,7 @@
           <a:bodyPr wrap="square" lIns="0" tIns="0" rIns="0" bIns="0" rtlCol="0" anchor="ctr"/>
           <a:lstStyle/>
           <a:p>
-            <a:pPr indent="0" marL="0">
+            <a:pPr marL="0" indent="0">
               <a:buNone/>
             </a:pPr>
             <a:r>
@@ -13417,6 +14149,7 @@
         <a:solidFill>
           <a:srgbClr val="F7FAFB"/>
         </a:solidFill>
+        <a:effectLst/>
       </p:bgPr>
     </p:bg>
     <p:spTree>
@@ -13452,6 +14185,13 @@
           </a:solidFill>
           <a:ln/>
         </p:spPr>
+        <p:txBody>
+          <a:bodyPr/>
+          <a:lstStyle/>
+          <a:p>
+            <a:endParaRPr lang="en-US"/>
+          </a:p>
+        </p:txBody>
       </p:sp>
       <p:sp>
         <p:nvSpPr>
@@ -13474,11 +14214,11 @@
           <a:bodyPr wrap="square" lIns="0" tIns="0" rIns="0" bIns="0" rtlCol="0" anchor="ctr"/>
           <a:lstStyle/>
           <a:p>
-            <a:pPr indent="0" marL="0">
-              <a:buNone/>
-            </a:pPr>
-            <a:r>
-              <a:rPr lang="en-US" sz="1200" b="1" spc="300" kern="0" dirty="0">
+            <a:pPr marL="0" indent="0">
+              <a:buNone/>
+            </a:pPr>
+            <a:r>
+              <a:rPr lang="en-US" sz="1200" b="1" kern="0" spc="300" dirty="0">
                 <a:solidFill>
                   <a:srgbClr val="1C8C8C"/>
                 </a:solidFill>
@@ -13513,7 +14253,7 @@
           <a:bodyPr wrap="square" lIns="0" tIns="0" rIns="0" bIns="0" rtlCol="0" anchor="ctr"/>
           <a:lstStyle/>
           <a:p>
-            <a:pPr indent="0" marL="0">
+            <a:pPr marL="0" indent="0">
               <a:buNone/>
             </a:pPr>
             <a:r>
@@ -13557,32 +14297,38 @@
             <a:prstDash val="solid"/>
           </a:ln>
           <a:effectLst>
-            <a:outerShdw sx="100000" sy="100000" kx="0" ky="0" algn="bl" rotWithShape="0" blurRad="88900" dist="25400" dir="8100000">
+            <a:outerShdw blurRad="88900" dist="25400" dir="8100000" algn="bl" rotWithShape="0">
               <a:srgbClr val="1B2A38">
                 <a:alpha val="14000"/>
               </a:srgbClr>
             </a:outerShdw>
           </a:effectLst>
         </p:spPr>
+        <p:txBody>
+          <a:bodyPr/>
+          <a:lstStyle/>
+          <a:p>
+            <a:endParaRPr lang="en-US"/>
+          </a:p>
+        </p:txBody>
       </p:sp>
       <p:pic>
         <p:nvPicPr>
-          <p:cNvPr id="6" name="Image 0" descr="assets/architecture_diagram.jpeg">    </p:cNvPr>
+          <p:cNvPr id="6" name="Image 0"/>
           <p:cNvPicPr>
             <a:picLocks noChangeAspect="1"/>
           </p:cNvPicPr>
           <p:nvPr/>
         </p:nvPicPr>
         <p:blipFill>
-          <a:blip r:embed="rId1"/>
-          <a:stretch>
-            <a:fillRect/>
-          </a:stretch>
+          <a:blip r:embed="rId3"/>
+          <a:srcRect/>
+          <a:stretch/>
         </p:blipFill>
         <p:spPr>
           <a:xfrm>
-            <a:off x="1497787" y="1536192"/>
-            <a:ext cx="9211666" cy="3154680"/>
+            <a:off x="1498248" y="1536192"/>
+            <a:ext cx="9210744" cy="3154680"/>
           </a:xfrm>
           <a:prstGeom prst="rect">
             <a:avLst/>
@@ -13608,6 +14354,13 @@
           </a:solidFill>
           <a:ln/>
         </p:spPr>
+        <p:txBody>
+          <a:bodyPr/>
+          <a:lstStyle/>
+          <a:p>
+            <a:endParaRPr lang="en-US"/>
+          </a:p>
+        </p:txBody>
       </p:sp>
       <p:sp>
         <p:nvSpPr>
@@ -13630,7 +14383,7 @@
           <a:bodyPr wrap="square" lIns="0" tIns="0" rIns="0" bIns="0" rtlCol="0" anchor="ctr"/>
           <a:lstStyle/>
           <a:p>
-            <a:pPr indent="0" marL="0">
+            <a:pPr marL="0" indent="0">
               <a:buNone/>
             </a:pPr>
             <a:r>
@@ -13664,6 +14417,13 @@
           </a:solidFill>
           <a:ln/>
         </p:spPr>
+        <p:txBody>
+          <a:bodyPr/>
+          <a:lstStyle/>
+          <a:p>
+            <a:endParaRPr lang="en-US"/>
+          </a:p>
+        </p:txBody>
       </p:sp>
       <p:sp>
         <p:nvSpPr>
@@ -13686,7 +14446,7 @@
           <a:bodyPr wrap="square" lIns="0" tIns="0" rIns="0" bIns="0" rtlCol="0" anchor="ctr"/>
           <a:lstStyle/>
           <a:p>
-            <a:pPr indent="0" marL="0">
+            <a:pPr marL="0" indent="0">
               <a:buNone/>
             </a:pPr>
             <a:r>
@@ -13720,6 +14480,13 @@
           </a:solidFill>
           <a:ln/>
         </p:spPr>
+        <p:txBody>
+          <a:bodyPr/>
+          <a:lstStyle/>
+          <a:p>
+            <a:endParaRPr lang="en-US"/>
+          </a:p>
+        </p:txBody>
       </p:sp>
       <p:sp>
         <p:nvSpPr>
@@ -13742,7 +14509,7 @@
           <a:bodyPr wrap="square" lIns="0" tIns="0" rIns="0" bIns="0" rtlCol="0" anchor="ctr"/>
           <a:lstStyle/>
           <a:p>
-            <a:pPr indent="0" marL="0">
+            <a:pPr marL="0" indent="0">
               <a:buNone/>
             </a:pPr>
             <a:r>
@@ -13783,13 +14550,20 @@
             <a:prstDash val="solid"/>
           </a:ln>
           <a:effectLst>
-            <a:outerShdw sx="100000" sy="100000" kx="0" ky="0" algn="bl" rotWithShape="0" blurRad="88900" dist="25400" dir="8100000">
+            <a:outerShdw blurRad="88900" dist="25400" dir="8100000" algn="bl" rotWithShape="0">
               <a:srgbClr val="1B2A38">
                 <a:alpha val="14000"/>
               </a:srgbClr>
             </a:outerShdw>
           </a:effectLst>
         </p:spPr>
+        <p:txBody>
+          <a:bodyPr/>
+          <a:lstStyle/>
+          <a:p>
+            <a:endParaRPr lang="en-US"/>
+          </a:p>
+        </p:txBody>
       </p:sp>
       <p:sp>
         <p:nvSpPr>
@@ -13810,24 +14584,31 @@
           </a:solidFill>
           <a:ln/>
           <a:effectLst>
-            <a:outerShdw sx="100000" sy="100000" kx="0" ky="0" algn="bl" rotWithShape="0" blurRad="88900" dist="25400" dir="8100000">
+            <a:outerShdw blurRad="88900" dist="25400" dir="8100000" algn="bl" rotWithShape="0">
               <a:srgbClr val="1B2A38">
                 <a:alpha val="14000"/>
               </a:srgbClr>
             </a:outerShdw>
           </a:effectLst>
         </p:spPr>
+        <p:txBody>
+          <a:bodyPr/>
+          <a:lstStyle/>
+          <a:p>
+            <a:endParaRPr lang="en-US"/>
+          </a:p>
+        </p:txBody>
       </p:sp>
       <p:pic>
         <p:nvPicPr>
-          <p:cNvPr id="15" name="Image 1" descr="preencoded.png">    </p:cNvPr>
+          <p:cNvPr id="15" name="Image 1" descr="preencoded.png"/>
           <p:cNvPicPr>
             <a:picLocks noChangeAspect="1"/>
           </p:cNvPicPr>
           <p:nvPr/>
         </p:nvPicPr>
         <p:blipFill>
-          <a:blip r:embed="rId2"/>
+          <a:blip r:embed="rId4"/>
           <a:stretch>
             <a:fillRect/>
           </a:stretch>
@@ -13863,7 +14644,7 @@
           <a:bodyPr wrap="square" lIns="0" tIns="0" rIns="0" bIns="0" rtlCol="0" anchor="ctr"/>
           <a:lstStyle/>
           <a:p>
-            <a:pPr indent="0" marL="0">
+            <a:pPr marL="0" indent="0">
               <a:buNone/>
             </a:pPr>
             <a:r>
@@ -13899,7 +14680,7 @@
           <a:bodyPr wrap="square" lIns="0" tIns="0" rIns="0" bIns="0" rtlCol="0" anchor="ctr"/>
           <a:lstStyle/>
           <a:p>
-            <a:pPr indent="0" marL="0">
+            <a:pPr marL="0" indent="0">
               <a:lnSpc>
                 <a:spcPct val="98000"/>
               </a:lnSpc>
@@ -13943,13 +14724,20 @@
             <a:prstDash val="solid"/>
           </a:ln>
           <a:effectLst>
-            <a:outerShdw sx="100000" sy="100000" kx="0" ky="0" algn="bl" rotWithShape="0" blurRad="88900" dist="25400" dir="8100000">
+            <a:outerShdw blurRad="88900" dist="25400" dir="8100000" algn="bl" rotWithShape="0">
               <a:srgbClr val="1B2A38">
                 <a:alpha val="14000"/>
               </a:srgbClr>
             </a:outerShdw>
           </a:effectLst>
         </p:spPr>
+        <p:txBody>
+          <a:bodyPr/>
+          <a:lstStyle/>
+          <a:p>
+            <a:endParaRPr lang="en-US"/>
+          </a:p>
+        </p:txBody>
       </p:sp>
       <p:sp>
         <p:nvSpPr>
@@ -13970,24 +14758,31 @@
           </a:solidFill>
           <a:ln/>
           <a:effectLst>
-            <a:outerShdw sx="100000" sy="100000" kx="0" ky="0" algn="bl" rotWithShape="0" blurRad="88900" dist="25400" dir="8100000">
+            <a:outerShdw blurRad="88900" dist="25400" dir="8100000" algn="bl" rotWithShape="0">
               <a:srgbClr val="1B2A38">
                 <a:alpha val="14000"/>
               </a:srgbClr>
             </a:outerShdw>
           </a:effectLst>
         </p:spPr>
+        <p:txBody>
+          <a:bodyPr/>
+          <a:lstStyle/>
+          <a:p>
+            <a:endParaRPr lang="en-US"/>
+          </a:p>
+        </p:txBody>
       </p:sp>
       <p:pic>
         <p:nvPicPr>
-          <p:cNvPr id="20" name="Image 2" descr="preencoded.png">    </p:cNvPr>
+          <p:cNvPr id="20" name="Image 2" descr="preencoded.png"/>
           <p:cNvPicPr>
             <a:picLocks noChangeAspect="1"/>
           </p:cNvPicPr>
           <p:nvPr/>
         </p:nvPicPr>
         <p:blipFill>
-          <a:blip r:embed="rId3"/>
+          <a:blip r:embed="rId5"/>
           <a:stretch>
             <a:fillRect/>
           </a:stretch>
@@ -14023,7 +14818,7 @@
           <a:bodyPr wrap="square" lIns="0" tIns="0" rIns="0" bIns="0" rtlCol="0" anchor="ctr"/>
           <a:lstStyle/>
           <a:p>
-            <a:pPr indent="0" marL="0">
+            <a:pPr marL="0" indent="0">
               <a:buNone/>
             </a:pPr>
             <a:r>
@@ -14059,7 +14854,7 @@
           <a:bodyPr wrap="square" lIns="0" tIns="0" rIns="0" bIns="0" rtlCol="0" anchor="ctr"/>
           <a:lstStyle/>
           <a:p>
-            <a:pPr indent="0" marL="0">
+            <a:pPr marL="0" indent="0">
               <a:lnSpc>
                 <a:spcPct val="98000"/>
               </a:lnSpc>
@@ -14103,13 +14898,20 @@
             <a:prstDash val="solid"/>
           </a:ln>
           <a:effectLst>
-            <a:outerShdw sx="100000" sy="100000" kx="0" ky="0" algn="bl" rotWithShape="0" blurRad="88900" dist="25400" dir="8100000">
+            <a:outerShdw blurRad="88900" dist="25400" dir="8100000" algn="bl" rotWithShape="0">
               <a:srgbClr val="1B2A38">
                 <a:alpha val="14000"/>
               </a:srgbClr>
             </a:outerShdw>
           </a:effectLst>
         </p:spPr>
+        <p:txBody>
+          <a:bodyPr/>
+          <a:lstStyle/>
+          <a:p>
+            <a:endParaRPr lang="en-US"/>
+          </a:p>
+        </p:txBody>
       </p:sp>
       <p:sp>
         <p:nvSpPr>
@@ -14130,24 +14932,31 @@
           </a:solidFill>
           <a:ln/>
           <a:effectLst>
-            <a:outerShdw sx="100000" sy="100000" kx="0" ky="0" algn="bl" rotWithShape="0" blurRad="88900" dist="25400" dir="8100000">
+            <a:outerShdw blurRad="88900" dist="25400" dir="8100000" algn="bl" rotWithShape="0">
               <a:srgbClr val="1B2A38">
                 <a:alpha val="14000"/>
               </a:srgbClr>
             </a:outerShdw>
           </a:effectLst>
         </p:spPr>
+        <p:txBody>
+          <a:bodyPr/>
+          <a:lstStyle/>
+          <a:p>
+            <a:endParaRPr lang="en-US"/>
+          </a:p>
+        </p:txBody>
       </p:sp>
       <p:pic>
         <p:nvPicPr>
-          <p:cNvPr id="25" name="Image 3" descr="preencoded.png">    </p:cNvPr>
+          <p:cNvPr id="25" name="Image 3" descr="preencoded.png"/>
           <p:cNvPicPr>
             <a:picLocks noChangeAspect="1"/>
           </p:cNvPicPr>
           <p:nvPr/>
         </p:nvPicPr>
         <p:blipFill>
-          <a:blip r:embed="rId4"/>
+          <a:blip r:embed="rId6"/>
           <a:stretch>
             <a:fillRect/>
           </a:stretch>
@@ -14183,7 +14992,7 @@
           <a:bodyPr wrap="square" lIns="0" tIns="0" rIns="0" bIns="0" rtlCol="0" anchor="ctr"/>
           <a:lstStyle/>
           <a:p>
-            <a:pPr indent="0" marL="0">
+            <a:pPr marL="0" indent="0">
               <a:buNone/>
             </a:pPr>
             <a:r>
@@ -14219,7 +15028,7 @@
           <a:bodyPr wrap="square" lIns="0" tIns="0" rIns="0" bIns="0" rtlCol="0" anchor="ctr"/>
           <a:lstStyle/>
           <a:p>
-            <a:pPr indent="0" marL="0">
+            <a:pPr marL="0" indent="0">
               <a:lnSpc>
                 <a:spcPct val="98000"/>
               </a:lnSpc>
@@ -14263,13 +15072,20 @@
             <a:prstDash val="solid"/>
           </a:ln>
           <a:effectLst>
-            <a:outerShdw sx="100000" sy="100000" kx="0" ky="0" algn="bl" rotWithShape="0" blurRad="88900" dist="25400" dir="8100000">
+            <a:outerShdw blurRad="88900" dist="25400" dir="8100000" algn="bl" rotWithShape="0">
               <a:srgbClr val="1B2A38">
                 <a:alpha val="14000"/>
               </a:srgbClr>
             </a:outerShdw>
           </a:effectLst>
         </p:spPr>
+        <p:txBody>
+          <a:bodyPr/>
+          <a:lstStyle/>
+          <a:p>
+            <a:endParaRPr lang="en-US"/>
+          </a:p>
+        </p:txBody>
       </p:sp>
       <p:sp>
         <p:nvSpPr>
@@ -14290,24 +15106,31 @@
           </a:solidFill>
           <a:ln/>
           <a:effectLst>
-            <a:outerShdw sx="100000" sy="100000" kx="0" ky="0" algn="bl" rotWithShape="0" blurRad="88900" dist="25400" dir="8100000">
+            <a:outerShdw blurRad="88900" dist="25400" dir="8100000" algn="bl" rotWithShape="0">
               <a:srgbClr val="1B2A38">
                 <a:alpha val="14000"/>
               </a:srgbClr>
             </a:outerShdw>
           </a:effectLst>
         </p:spPr>
+        <p:txBody>
+          <a:bodyPr/>
+          <a:lstStyle/>
+          <a:p>
+            <a:endParaRPr lang="en-US"/>
+          </a:p>
+        </p:txBody>
       </p:sp>
       <p:pic>
         <p:nvPicPr>
-          <p:cNvPr id="30" name="Image 4" descr="preencoded.png">    </p:cNvPr>
+          <p:cNvPr id="30" name="Image 4" descr="preencoded.png"/>
           <p:cNvPicPr>
             <a:picLocks noChangeAspect="1"/>
           </p:cNvPicPr>
           <p:nvPr/>
         </p:nvPicPr>
         <p:blipFill>
-          <a:blip r:embed="rId5"/>
+          <a:blip r:embed="rId7"/>
           <a:stretch>
             <a:fillRect/>
           </a:stretch>
@@ -14343,7 +15166,7 @@
           <a:bodyPr wrap="square" lIns="0" tIns="0" rIns="0" bIns="0" rtlCol="0" anchor="ctr"/>
           <a:lstStyle/>
           <a:p>
-            <a:pPr indent="0" marL="0">
+            <a:pPr marL="0" indent="0">
               <a:buNone/>
             </a:pPr>
             <a:r>
@@ -14379,7 +15202,7 @@
           <a:bodyPr wrap="square" lIns="0" tIns="0" rIns="0" bIns="0" rtlCol="0" anchor="ctr"/>
           <a:lstStyle/>
           <a:p>
-            <a:pPr indent="0" marL="0">
+            <a:pPr marL="0" indent="0">
               <a:lnSpc>
                 <a:spcPct val="98000"/>
               </a:lnSpc>
@@ -14418,7 +15241,7 @@
           <a:bodyPr wrap="square" lIns="0" tIns="0" rIns="0" bIns="0" rtlCol="0" anchor="ctr"/>
           <a:lstStyle/>
           <a:p>
-            <a:pPr algn="r" indent="0" marL="0">
+            <a:pPr marL="0" indent="0" algn="r">
               <a:buNone/>
             </a:pPr>
             <a:r>
@@ -14454,7 +15277,7 @@
           <a:bodyPr wrap="square" lIns="0" tIns="0" rIns="0" bIns="0" rtlCol="0" anchor="ctr"/>
           <a:lstStyle/>
           <a:p>
-            <a:pPr indent="0" marL="0">
+            <a:pPr marL="0" indent="0">
               <a:buNone/>
             </a:pPr>
             <a:r>
@@ -14485,6 +15308,7 @@
         <a:solidFill>
           <a:srgbClr val="F7FAFB"/>
         </a:solidFill>
+        <a:effectLst/>
       </p:bgPr>
     </p:bg>
     <p:spTree>
@@ -14520,6 +15344,13 @@
           </a:solidFill>
           <a:ln/>
         </p:spPr>
+        <p:txBody>
+          <a:bodyPr/>
+          <a:lstStyle/>
+          <a:p>
+            <a:endParaRPr lang="en-US"/>
+          </a:p>
+        </p:txBody>
       </p:sp>
       <p:sp>
         <p:nvSpPr>
@@ -14542,11 +15373,11 @@
           <a:bodyPr wrap="square" lIns="0" tIns="0" rIns="0" bIns="0" rtlCol="0" anchor="ctr"/>
           <a:lstStyle/>
           <a:p>
-            <a:pPr indent="0" marL="0">
-              <a:buNone/>
-            </a:pPr>
-            <a:r>
-              <a:rPr lang="en-US" sz="1200" b="1" spc="300" kern="0" dirty="0">
+            <a:pPr marL="0" indent="0">
+              <a:buNone/>
+            </a:pPr>
+            <a:r>
+              <a:rPr lang="en-US" sz="1200" b="1" kern="0" spc="300" dirty="0">
                 <a:solidFill>
                   <a:srgbClr val="D94F2A"/>
                 </a:solidFill>
@@ -14581,7 +15412,7 @@
           <a:bodyPr wrap="square" lIns="0" tIns="0" rIns="0" bIns="0" rtlCol="0" anchor="ctr"/>
           <a:lstStyle/>
           <a:p>
-            <a:pPr indent="0" marL="0">
+            <a:pPr marL="0" indent="0">
               <a:buNone/>
             </a:pPr>
             <a:r>
@@ -14625,13 +15456,20 @@
             <a:prstDash val="solid"/>
           </a:ln>
           <a:effectLst>
-            <a:outerShdw sx="100000" sy="100000" kx="0" ky="0" algn="bl" rotWithShape="0" blurRad="88900" dist="25400" dir="8100000">
+            <a:outerShdw blurRad="88900" dist="25400" dir="8100000" algn="bl" rotWithShape="0">
               <a:srgbClr val="1B2A38">
                 <a:alpha val="14000"/>
               </a:srgbClr>
             </a:outerShdw>
           </a:effectLst>
         </p:spPr>
+        <p:txBody>
+          <a:bodyPr/>
+          <a:lstStyle/>
+          <a:p>
+            <a:endParaRPr lang="en-US"/>
+          </a:p>
+        </p:txBody>
       </p:sp>
       <p:sp>
         <p:nvSpPr>
@@ -14654,7 +15492,7 @@
           <a:bodyPr wrap="square" lIns="0" tIns="0" rIns="0" bIns="0" rtlCol="0" anchor="ctr"/>
           <a:lstStyle/>
           <a:p>
-            <a:pPr indent="0" marL="0">
+            <a:pPr marL="0" indent="0">
               <a:buNone/>
             </a:pPr>
             <a:r>
@@ -14690,7 +15528,7 @@
           <a:bodyPr wrap="square" lIns="0" tIns="0" rIns="0" bIns="0" rtlCol="0" anchor="ctr"/>
           <a:lstStyle/>
           <a:p>
-            <a:pPr indent="0" marL="0">
+            <a:pPr marL="0" indent="0">
               <a:buNone/>
             </a:pPr>
             <a:r>
@@ -14726,7 +15564,7 @@
           <a:bodyPr wrap="square" lIns="0" tIns="0" rIns="0" bIns="0" rtlCol="0" anchor="ctr"/>
           <a:lstStyle/>
           <a:p>
-            <a:pPr algn="r" indent="0" marL="0">
+            <a:pPr marL="0" indent="0" algn="r">
               <a:buNone/>
             </a:pPr>
             <a:r>
@@ -14770,13 +15608,20 @@
             <a:prstDash val="solid"/>
           </a:ln>
           <a:effectLst>
-            <a:outerShdw sx="100000" sy="100000" kx="0" ky="0" algn="bl" rotWithShape="0" blurRad="88900" dist="25400" dir="8100000">
+            <a:outerShdw blurRad="88900" dist="25400" dir="8100000" algn="bl" rotWithShape="0">
               <a:srgbClr val="1B2A38">
                 <a:alpha val="14000"/>
               </a:srgbClr>
             </a:outerShdw>
           </a:effectLst>
         </p:spPr>
+        <p:txBody>
+          <a:bodyPr/>
+          <a:lstStyle/>
+          <a:p>
+            <a:endParaRPr lang="en-US"/>
+          </a:p>
+        </p:txBody>
       </p:sp>
       <p:sp>
         <p:nvSpPr>
@@ -14799,7 +15644,7 @@
           <a:bodyPr wrap="square" lIns="0" tIns="0" rIns="0" bIns="0" rtlCol="0" anchor="ctr"/>
           <a:lstStyle/>
           <a:p>
-            <a:pPr indent="0" marL="0">
+            <a:pPr marL="0" indent="0">
               <a:buNone/>
             </a:pPr>
             <a:r>
@@ -14835,7 +15680,7 @@
           <a:bodyPr wrap="square" lIns="0" tIns="0" rIns="0" bIns="0" rtlCol="0" anchor="ctr"/>
           <a:lstStyle/>
           <a:p>
-            <a:pPr indent="0" marL="0">
+            <a:pPr marL="0" indent="0">
               <a:buNone/>
             </a:pPr>
             <a:r>
@@ -14871,7 +15716,7 @@
           <a:bodyPr wrap="square" lIns="0" tIns="0" rIns="0" bIns="0" rtlCol="0" anchor="ctr"/>
           <a:lstStyle/>
           <a:p>
-            <a:pPr algn="r" indent="0" marL="0">
+            <a:pPr marL="0" indent="0" algn="r">
               <a:buNone/>
             </a:pPr>
             <a:r>
@@ -14910,7 +15755,7 @@
           <a:bodyPr wrap="square" lIns="0" tIns="0" rIns="0" bIns="0" rtlCol="0" anchor="ctr"/>
           <a:lstStyle/>
           <a:p>
-            <a:pPr algn="ctr" indent="0" marL="0">
+            <a:pPr marL="0" indent="0" algn="ctr">
               <a:buNone/>
             </a:pPr>
             <a:r>
@@ -14946,13 +15791,20 @@
           </a:solidFill>
           <a:ln/>
           <a:effectLst>
-            <a:outerShdw sx="100000" sy="100000" kx="0" ky="0" algn="bl" rotWithShape="0" blurRad="114300" dist="38100" dir="8100000">
+            <a:outerShdw blurRad="114300" dist="38100" dir="8100000" algn="bl" rotWithShape="0">
               <a:srgbClr val="0A1722">
                 <a:alpha val="22000"/>
               </a:srgbClr>
             </a:outerShdw>
           </a:effectLst>
         </p:spPr>
+        <p:txBody>
+          <a:bodyPr/>
+          <a:lstStyle/>
+          <a:p>
+            <a:endParaRPr lang="en-US"/>
+          </a:p>
+        </p:txBody>
       </p:sp>
       <p:sp>
         <p:nvSpPr>
@@ -14975,11 +15827,11 @@
           <a:bodyPr wrap="square" lIns="0" tIns="0" rIns="0" bIns="0" rtlCol="0" anchor="ctr"/>
           <a:lstStyle/>
           <a:p>
-            <a:pPr indent="0" marL="0">
-              <a:buNone/>
-            </a:pPr>
-            <a:r>
-              <a:rPr lang="en-US" sz="1000" b="1" spc="100" kern="0" dirty="0">
+            <a:pPr marL="0" indent="0">
+              <a:buNone/>
+            </a:pPr>
+            <a:r>
+              <a:rPr lang="en-US" sz="1000" b="1" kern="0" spc="100" dirty="0">
                 <a:solidFill>
                   <a:srgbClr val="4FC3C3"/>
                 </a:solidFill>
@@ -15011,7 +15863,7 @@
           <a:bodyPr wrap="square" lIns="0" tIns="0" rIns="0" bIns="0" rtlCol="0" anchor="ctr"/>
           <a:lstStyle/>
           <a:p>
-            <a:pPr indent="0" marL="0">
+            <a:pPr marL="0" indent="0">
               <a:buNone/>
             </a:pPr>
             <a:r>
@@ -15025,9 +15877,6 @@
               </a:rPr>
               <a:t>73 </a:t>
             </a:r>
-            <a:pPr indent="0" marL="0">
-              <a:buNone/>
-            </a:pPr>
             <a:r>
               <a:rPr lang="en-US" sz="1500" dirty="0">
                 <a:solidFill>
@@ -15036,9 +15885,6 @@
               </a:rPr>
               <a:t>°C</a:t>
             </a:r>
-            <a:pPr indent="0" marL="0">
-              <a:buNone/>
-            </a:pPr>
             <a:r>
               <a:rPr lang="en-US" sz="1300" dirty="0">
                 <a:solidFill>
@@ -15072,6 +15918,13 @@
           </a:solidFill>
           <a:ln/>
         </p:spPr>
+        <p:txBody>
+          <a:bodyPr/>
+          <a:lstStyle/>
+          <a:p>
+            <a:endParaRPr lang="en-US"/>
+          </a:p>
+        </p:txBody>
       </p:sp>
       <p:sp>
         <p:nvSpPr>
@@ -15094,7 +15947,7 @@
           <a:bodyPr wrap="square" lIns="0" tIns="0" rIns="0" bIns="0" rtlCol="0" anchor="ctr"/>
           <a:lstStyle/>
           <a:p>
-            <a:pPr indent="0" marL="0">
+            <a:pPr marL="0" indent="0">
               <a:buNone/>
             </a:pPr>
             <a:r>
@@ -15130,7 +15983,7 @@
           <a:bodyPr wrap="square" lIns="0" tIns="0" rIns="0" bIns="0" rtlCol="0" anchor="ctr"/>
           <a:lstStyle/>
           <a:p>
-            <a:pPr indent="0" marL="0">
+            <a:pPr marL="0" indent="0">
               <a:lnSpc>
                 <a:spcPct val="110000"/>
               </a:lnSpc>
@@ -15150,7 +16003,7 @@
             <a:endParaRPr lang="en-US" sz="1400" dirty="0"/>
           </a:p>
           <a:p>
-            <a:pPr indent="0" marL="0">
+            <a:pPr marL="0" indent="0">
               <a:lnSpc>
                 <a:spcPct val="110000"/>
               </a:lnSpc>
@@ -15197,13 +16050,20 @@
             <a:prstDash val="solid"/>
           </a:ln>
           <a:effectLst>
-            <a:outerShdw sx="100000" sy="100000" kx="0" ky="0" algn="bl" rotWithShape="0" blurRad="88900" dist="25400" dir="8100000">
+            <a:outerShdw blurRad="88900" dist="25400" dir="8100000" algn="bl" rotWithShape="0">
               <a:srgbClr val="1B2A38">
                 <a:alpha val="14000"/>
               </a:srgbClr>
             </a:outerShdw>
           </a:effectLst>
         </p:spPr>
+        <p:txBody>
+          <a:bodyPr/>
+          <a:lstStyle/>
+          <a:p>
+            <a:endParaRPr lang="en-US"/>
+          </a:p>
+        </p:txBody>
       </p:sp>
       <p:sp>
         <p:nvSpPr>
@@ -15226,7 +16086,7 @@
           <a:bodyPr wrap="square" lIns="0" tIns="0" rIns="0" bIns="0" rtlCol="0" anchor="ctr"/>
           <a:lstStyle/>
           <a:p>
-            <a:pPr indent="0" marL="0">
+            <a:pPr marL="0" indent="0">
               <a:buNone/>
             </a:pPr>
             <a:r>
@@ -15262,7 +16122,7 @@
           <a:bodyPr wrap="square" lIns="0" tIns="0" rIns="0" bIns="0" rtlCol="0" anchor="ctr"/>
           <a:lstStyle/>
           <a:p>
-            <a:pPr indent="0" marL="0">
+            <a:pPr marL="0" indent="0">
               <a:buNone/>
             </a:pPr>
             <a:r>
@@ -15276,9 +16136,6 @@
               </a:rPr>
               <a:t>10.05</a:t>
             </a:r>
-            <a:pPr indent="0" marL="0">
-              <a:buNone/>
-            </a:pPr>
             <a:r>
               <a:rPr lang="en-US" sz="1100" dirty="0">
                 <a:solidFill>
@@ -15312,7 +16169,7 @@
           <a:bodyPr wrap="square" lIns="0" tIns="0" rIns="0" bIns="0" rtlCol="0" anchor="ctr"/>
           <a:lstStyle/>
           <a:p>
-            <a:pPr algn="ctr" indent="0" marL="0">
+            <a:pPr marL="0" indent="0" algn="ctr">
               <a:buNone/>
             </a:pPr>
             <a:r>
@@ -15353,13 +16210,20 @@
             <a:prstDash val="solid"/>
           </a:ln>
           <a:effectLst>
-            <a:outerShdw sx="100000" sy="100000" kx="0" ky="0" algn="bl" rotWithShape="0" blurRad="88900" dist="25400" dir="8100000">
+            <a:outerShdw blurRad="88900" dist="25400" dir="8100000" algn="bl" rotWithShape="0">
               <a:srgbClr val="1B2A38">
                 <a:alpha val="14000"/>
               </a:srgbClr>
             </a:outerShdw>
           </a:effectLst>
         </p:spPr>
+        <p:txBody>
+          <a:bodyPr/>
+          <a:lstStyle/>
+          <a:p>
+            <a:endParaRPr lang="en-US"/>
+          </a:p>
+        </p:txBody>
       </p:sp>
       <p:sp>
         <p:nvSpPr>
@@ -15382,7 +16246,7 @@
           <a:bodyPr wrap="square" lIns="0" tIns="0" rIns="0" bIns="0" rtlCol="0" anchor="ctr"/>
           <a:lstStyle/>
           <a:p>
-            <a:pPr indent="0" marL="0">
+            <a:pPr marL="0" indent="0">
               <a:buNone/>
             </a:pPr>
             <a:r>
@@ -15418,7 +16282,7 @@
           <a:bodyPr wrap="square" lIns="0" tIns="0" rIns="0" bIns="0" rtlCol="0" anchor="ctr"/>
           <a:lstStyle/>
           <a:p>
-            <a:pPr indent="0" marL="0">
+            <a:pPr marL="0" indent="0">
               <a:buNone/>
             </a:pPr>
             <a:r>
@@ -15432,9 +16296,6 @@
               </a:rPr>
               <a:t>0.45</a:t>
             </a:r>
-            <a:pPr indent="0" marL="0">
-              <a:buNone/>
-            </a:pPr>
             <a:r>
               <a:rPr lang="en-US" sz="1100" dirty="0">
                 <a:solidFill>
@@ -15468,7 +16329,7 @@
           <a:bodyPr wrap="square" lIns="0" tIns="0" rIns="0" bIns="0" rtlCol="0" anchor="ctr"/>
           <a:lstStyle/>
           <a:p>
-            <a:pPr algn="ctr" indent="0" marL="0">
+            <a:pPr marL="0" indent="0" algn="ctr">
               <a:buNone/>
             </a:pPr>
             <a:r>
@@ -15509,13 +16370,20 @@
             <a:prstDash val="solid"/>
           </a:ln>
           <a:effectLst>
-            <a:outerShdw sx="100000" sy="100000" kx="0" ky="0" algn="bl" rotWithShape="0" blurRad="88900" dist="25400" dir="8100000">
+            <a:outerShdw blurRad="88900" dist="25400" dir="8100000" algn="bl" rotWithShape="0">
               <a:srgbClr val="1B2A38">
                 <a:alpha val="14000"/>
               </a:srgbClr>
             </a:outerShdw>
           </a:effectLst>
         </p:spPr>
+        <p:txBody>
+          <a:bodyPr/>
+          <a:lstStyle/>
+          <a:p>
+            <a:endParaRPr lang="en-US"/>
+          </a:p>
+        </p:txBody>
       </p:sp>
       <p:sp>
         <p:nvSpPr>
@@ -15538,7 +16406,7 @@
           <a:bodyPr wrap="square" lIns="0" tIns="0" rIns="0" bIns="0" rtlCol="0" anchor="ctr"/>
           <a:lstStyle/>
           <a:p>
-            <a:pPr indent="0" marL="0">
+            <a:pPr marL="0" indent="0">
               <a:buNone/>
             </a:pPr>
             <a:r>
@@ -15574,7 +16442,7 @@
           <a:bodyPr wrap="square" lIns="0" tIns="0" rIns="0" bIns="0" rtlCol="0" anchor="ctr"/>
           <a:lstStyle/>
           <a:p>
-            <a:pPr indent="0" marL="0">
+            <a:pPr marL="0" indent="0">
               <a:buNone/>
             </a:pPr>
             <a:r>
@@ -15588,9 +16456,6 @@
               </a:rPr>
               <a:t>10.5</a:t>
             </a:r>
-            <a:pPr indent="0" marL="0">
-              <a:buNone/>
-            </a:pPr>
             <a:r>
               <a:rPr lang="en-US" sz="1100" dirty="0">
                 <a:solidFill>
@@ -15624,13 +16489,20 @@
           </a:solidFill>
           <a:ln/>
           <a:effectLst>
-            <a:outerShdw sx="100000" sy="100000" kx="0" ky="0" algn="bl" rotWithShape="0" blurRad="114300" dist="38100" dir="8100000">
+            <a:outerShdw blurRad="114300" dist="38100" dir="8100000" algn="bl" rotWithShape="0">
               <a:srgbClr val="0A1722">
                 <a:alpha val="22000"/>
               </a:srgbClr>
             </a:outerShdw>
           </a:effectLst>
         </p:spPr>
+        <p:txBody>
+          <a:bodyPr/>
+          <a:lstStyle/>
+          <a:p>
+            <a:endParaRPr lang="en-US"/>
+          </a:p>
+        </p:txBody>
       </p:sp>
       <p:sp>
         <p:nvSpPr>
@@ -15651,24 +16523,31 @@
           </a:solidFill>
           <a:ln/>
           <a:effectLst>
-            <a:outerShdw sx="100000" sy="100000" kx="0" ky="0" algn="bl" rotWithShape="0" blurRad="88900" dist="25400" dir="8100000">
+            <a:outerShdw blurRad="88900" dist="25400" dir="8100000" algn="bl" rotWithShape="0">
               <a:srgbClr val="1B2A38">
                 <a:alpha val="14000"/>
               </a:srgbClr>
             </a:outerShdw>
           </a:effectLst>
         </p:spPr>
+        <p:txBody>
+          <a:bodyPr/>
+          <a:lstStyle/>
+          <a:p>
+            <a:endParaRPr lang="en-US"/>
+          </a:p>
+        </p:txBody>
       </p:sp>
       <p:pic>
         <p:nvPicPr>
-          <p:cNvPr id="33" name="Image 0" descr="preencoded.png">    </p:cNvPr>
+          <p:cNvPr id="33" name="Image 0" descr="preencoded.png"/>
           <p:cNvPicPr>
             <a:picLocks noChangeAspect="1"/>
           </p:cNvPicPr>
           <p:nvPr/>
         </p:nvPicPr>
         <p:blipFill>
-          <a:blip r:embed="rId1"/>
+          <a:blip r:embed="rId3"/>
           <a:stretch>
             <a:fillRect/>
           </a:stretch>
@@ -15704,7 +16583,7 @@
           <a:bodyPr wrap="square" lIns="0" tIns="0" rIns="0" bIns="0" rtlCol="0" anchor="ctr"/>
           <a:lstStyle/>
           <a:p>
-            <a:pPr indent="0" marL="0">
+            <a:pPr marL="0" indent="0">
               <a:lnSpc>
                 <a:spcPct val="105000"/>
               </a:lnSpc>
@@ -15718,12 +16597,6 @@
               </a:rPr>
               <a:t>Honest engineering: </a:t>
             </a:r>
-            <a:pPr indent="0" marL="0">
-              <a:lnSpc>
-                <a:spcPct val="105000"/>
-              </a:lnSpc>
-              <a:buNone/>
-            </a:pPr>
             <a:r>
               <a:rPr lang="en-US" sz="1400" dirty="0">
                 <a:solidFill>
@@ -15732,12 +16605,6 @@
               </a:rPr>
               <a:t>geothermal supply (10.05 MWth) and the heat-pump upgrade (0.45 MWth) </a:t>
             </a:r>
-            <a:pPr indent="0" marL="0">
-              <a:lnSpc>
-                <a:spcPct val="105000"/>
-              </a:lnSpc>
-              <a:buNone/>
-            </a:pPr>
             <a:r>
               <a:rPr lang="en-US" sz="1400" b="1" dirty="0">
                 <a:solidFill>
@@ -15746,12 +16613,6 @@
               </a:rPr>
               <a:t>together meet the 10.5 MWth heating target — comfortably above the 10 MW minimum. </a:t>
             </a:r>
-            <a:pPr indent="0" marL="0">
-              <a:lnSpc>
-                <a:spcPct val="105000"/>
-              </a:lnSpc>
-              <a:buNone/>
-            </a:pPr>
             <a:r>
               <a:rPr lang="en-US" sz="1400" dirty="0">
                 <a:solidFill>
@@ -15785,7 +16646,7 @@
           <a:bodyPr wrap="square" lIns="0" tIns="0" rIns="0" bIns="0" rtlCol="0" anchor="ctr"/>
           <a:lstStyle/>
           <a:p>
-            <a:pPr algn="r" indent="0" marL="0">
+            <a:pPr marL="0" indent="0" algn="r">
               <a:buNone/>
             </a:pPr>
             <a:r>
@@ -15821,7 +16682,7 @@
           <a:bodyPr wrap="square" lIns="0" tIns="0" rIns="0" bIns="0" rtlCol="0" anchor="ctr"/>
           <a:lstStyle/>
           <a:p>
-            <a:pPr indent="0" marL="0">
+            <a:pPr marL="0" indent="0">
               <a:buNone/>
             </a:pPr>
             <a:r>
@@ -15852,6 +16713,7 @@
         <a:solidFill>
           <a:srgbClr val="0E2A47"/>
         </a:solidFill>
+        <a:effectLst/>
       </p:bgPr>
     </p:bg>
     <p:spTree>
@@ -15887,6 +16749,13 @@
           </a:solidFill>
           <a:ln/>
         </p:spPr>
+        <p:txBody>
+          <a:bodyPr/>
+          <a:lstStyle/>
+          <a:p>
+            <a:endParaRPr lang="en-US"/>
+          </a:p>
+        </p:txBody>
       </p:sp>
       <p:sp>
         <p:nvSpPr>
@@ -15909,11 +16778,11 @@
           <a:bodyPr wrap="square" lIns="0" tIns="0" rIns="0" bIns="0" rtlCol="0" anchor="ctr"/>
           <a:lstStyle/>
           <a:p>
-            <a:pPr indent="0" marL="0">
-              <a:buNone/>
-            </a:pPr>
-            <a:r>
-              <a:rPr lang="en-US" sz="1200" b="1" spc="300" kern="0" dirty="0">
+            <a:pPr marL="0" indent="0">
+              <a:buNone/>
+            </a:pPr>
+            <a:r>
+              <a:rPr lang="en-US" sz="1200" b="1" kern="0" spc="300" dirty="0">
                 <a:solidFill>
                   <a:srgbClr val="4FC3C3"/>
                 </a:solidFill>
@@ -15945,7 +16814,7 @@
           <a:bodyPr wrap="square" lIns="0" tIns="0" rIns="0" bIns="0" rtlCol="0" anchor="ctr"/>
           <a:lstStyle/>
           <a:p>
-            <a:pPr indent="0" marL="0">
+            <a:pPr marL="0" indent="0">
               <a:buNone/>
             </a:pPr>
             <a:r>
@@ -15989,13 +16858,20 @@
             <a:prstDash val="solid"/>
           </a:ln>
           <a:effectLst>
-            <a:outerShdw sx="100000" sy="100000" kx="0" ky="0" algn="bl" rotWithShape="0" blurRad="114300" dist="38100" dir="8100000">
+            <a:outerShdw blurRad="114300" dist="38100" dir="8100000" algn="bl" rotWithShape="0">
               <a:srgbClr val="0A1722">
                 <a:alpha val="22000"/>
               </a:srgbClr>
             </a:outerShdw>
           </a:effectLst>
         </p:spPr>
+        <p:txBody>
+          <a:bodyPr/>
+          <a:lstStyle/>
+          <a:p>
+            <a:endParaRPr lang="en-US"/>
+          </a:p>
+        </p:txBody>
       </p:sp>
       <p:sp>
         <p:nvSpPr>
@@ -16016,24 +16892,31 @@
           </a:solidFill>
           <a:ln/>
           <a:effectLst>
-            <a:outerShdw sx="100000" sy="100000" kx="0" ky="0" algn="bl" rotWithShape="0" blurRad="88900" dist="25400" dir="8100000">
+            <a:outerShdw blurRad="88900" dist="25400" dir="8100000" algn="bl" rotWithShape="0">
               <a:srgbClr val="1B2A38">
                 <a:alpha val="14000"/>
               </a:srgbClr>
             </a:outerShdw>
           </a:effectLst>
         </p:spPr>
+        <p:txBody>
+          <a:bodyPr/>
+          <a:lstStyle/>
+          <a:p>
+            <a:endParaRPr lang="en-US"/>
+          </a:p>
+        </p:txBody>
       </p:sp>
       <p:pic>
         <p:nvPicPr>
-          <p:cNvPr id="7" name="Image 0" descr="preencoded.png">    </p:cNvPr>
+          <p:cNvPr id="7" name="Image 0" descr="preencoded.png"/>
           <p:cNvPicPr>
             <a:picLocks noChangeAspect="1"/>
           </p:cNvPicPr>
           <p:nvPr/>
         </p:nvPicPr>
         <p:blipFill>
-          <a:blip r:embed="rId1"/>
+          <a:blip r:embed="rId3"/>
           <a:stretch>
             <a:fillRect/>
           </a:stretch>
@@ -16069,7 +16952,7 @@
           <a:bodyPr wrap="square" lIns="0" tIns="0" rIns="0" bIns="0" rtlCol="0" anchor="ctr"/>
           <a:lstStyle/>
           <a:p>
-            <a:pPr indent="0" marL="0">
+            <a:pPr marL="0" indent="0">
               <a:lnSpc>
                 <a:spcPct val="95000"/>
               </a:lnSpc>
@@ -16108,7 +16991,7 @@
           <a:bodyPr wrap="square" lIns="0" tIns="0" rIns="0" bIns="0" rtlCol="0" anchor="ctr"/>
           <a:lstStyle/>
           <a:p>
-            <a:pPr indent="0" marL="0">
+            <a:pPr marL="0" indent="0">
               <a:lnSpc>
                 <a:spcPct val="100000"/>
               </a:lnSpc>
@@ -16152,13 +17035,20 @@
             <a:prstDash val="solid"/>
           </a:ln>
           <a:effectLst>
-            <a:outerShdw sx="100000" sy="100000" kx="0" ky="0" algn="bl" rotWithShape="0" blurRad="114300" dist="38100" dir="8100000">
+            <a:outerShdw blurRad="114300" dist="38100" dir="8100000" algn="bl" rotWithShape="0">
               <a:srgbClr val="0A1722">
                 <a:alpha val="22000"/>
               </a:srgbClr>
             </a:outerShdw>
           </a:effectLst>
         </p:spPr>
+        <p:txBody>
+          <a:bodyPr/>
+          <a:lstStyle/>
+          <a:p>
+            <a:endParaRPr lang="en-US"/>
+          </a:p>
+        </p:txBody>
       </p:sp>
       <p:sp>
         <p:nvSpPr>
@@ -16179,24 +17069,31 @@
           </a:solidFill>
           <a:ln/>
           <a:effectLst>
-            <a:outerShdw sx="100000" sy="100000" kx="0" ky="0" algn="bl" rotWithShape="0" blurRad="88900" dist="25400" dir="8100000">
+            <a:outerShdw blurRad="88900" dist="25400" dir="8100000" algn="bl" rotWithShape="0">
               <a:srgbClr val="1B2A38">
                 <a:alpha val="14000"/>
               </a:srgbClr>
             </a:outerShdw>
           </a:effectLst>
         </p:spPr>
+        <p:txBody>
+          <a:bodyPr/>
+          <a:lstStyle/>
+          <a:p>
+            <a:endParaRPr lang="en-US"/>
+          </a:p>
+        </p:txBody>
       </p:sp>
       <p:pic>
         <p:nvPicPr>
-          <p:cNvPr id="12" name="Image 1" descr="preencoded.png">    </p:cNvPr>
+          <p:cNvPr id="12" name="Image 1" descr="preencoded.png"/>
           <p:cNvPicPr>
             <a:picLocks noChangeAspect="1"/>
           </p:cNvPicPr>
           <p:nvPr/>
         </p:nvPicPr>
         <p:blipFill>
-          <a:blip r:embed="rId2"/>
+          <a:blip r:embed="rId4"/>
           <a:stretch>
             <a:fillRect/>
           </a:stretch>
@@ -16232,7 +17129,7 @@
           <a:bodyPr wrap="square" lIns="0" tIns="0" rIns="0" bIns="0" rtlCol="0" anchor="ctr"/>
           <a:lstStyle/>
           <a:p>
-            <a:pPr indent="0" marL="0">
+            <a:pPr marL="0" indent="0">
               <a:lnSpc>
                 <a:spcPct val="95000"/>
               </a:lnSpc>
@@ -16271,7 +17168,7 @@
           <a:bodyPr wrap="square" lIns="0" tIns="0" rIns="0" bIns="0" rtlCol="0" anchor="ctr"/>
           <a:lstStyle/>
           <a:p>
-            <a:pPr indent="0" marL="0">
+            <a:pPr marL="0" indent="0">
               <a:lnSpc>
                 <a:spcPct val="100000"/>
               </a:lnSpc>
@@ -16315,13 +17212,20 @@
             <a:prstDash val="solid"/>
           </a:ln>
           <a:effectLst>
-            <a:outerShdw sx="100000" sy="100000" kx="0" ky="0" algn="bl" rotWithShape="0" blurRad="114300" dist="38100" dir="8100000">
+            <a:outerShdw blurRad="114300" dist="38100" dir="8100000" algn="bl" rotWithShape="0">
               <a:srgbClr val="0A1722">
                 <a:alpha val="22000"/>
               </a:srgbClr>
             </a:outerShdw>
           </a:effectLst>
         </p:spPr>
+        <p:txBody>
+          <a:bodyPr/>
+          <a:lstStyle/>
+          <a:p>
+            <a:endParaRPr lang="en-US"/>
+          </a:p>
+        </p:txBody>
       </p:sp>
       <p:sp>
         <p:nvSpPr>
@@ -16342,24 +17246,31 @@
           </a:solidFill>
           <a:ln/>
           <a:effectLst>
-            <a:outerShdw sx="100000" sy="100000" kx="0" ky="0" algn="bl" rotWithShape="0" blurRad="88900" dist="25400" dir="8100000">
+            <a:outerShdw blurRad="88900" dist="25400" dir="8100000" algn="bl" rotWithShape="0">
               <a:srgbClr val="1B2A38">
                 <a:alpha val="14000"/>
               </a:srgbClr>
             </a:outerShdw>
           </a:effectLst>
         </p:spPr>
+        <p:txBody>
+          <a:bodyPr/>
+          <a:lstStyle/>
+          <a:p>
+            <a:endParaRPr lang="en-US"/>
+          </a:p>
+        </p:txBody>
       </p:sp>
       <p:pic>
         <p:nvPicPr>
-          <p:cNvPr id="17" name="Image 2" descr="preencoded.png">    </p:cNvPr>
+          <p:cNvPr id="17" name="Image 2" descr="preencoded.png"/>
           <p:cNvPicPr>
             <a:picLocks noChangeAspect="1"/>
           </p:cNvPicPr>
           <p:nvPr/>
         </p:nvPicPr>
         <p:blipFill>
-          <a:blip r:embed="rId3"/>
+          <a:blip r:embed="rId5"/>
           <a:stretch>
             <a:fillRect/>
           </a:stretch>
@@ -16395,7 +17306,7 @@
           <a:bodyPr wrap="square" lIns="0" tIns="0" rIns="0" bIns="0" rtlCol="0" anchor="ctr"/>
           <a:lstStyle/>
           <a:p>
-            <a:pPr indent="0" marL="0">
+            <a:pPr marL="0" indent="0">
               <a:lnSpc>
                 <a:spcPct val="95000"/>
               </a:lnSpc>
@@ -16434,19 +17345,13 @@
           <a:bodyPr wrap="square" lIns="0" tIns="0" rIns="0" bIns="0" rtlCol="0" anchor="ctr"/>
           <a:lstStyle/>
           <a:p>
-            <a:pPr indent="0" marL="0">
-              <a:lnSpc>
-                <a:spcPct val="100000"/>
-              </a:lnSpc>
-              <a:buNone/>
-            </a:pPr>
             <a:r>
               <a:rPr lang="en-US" sz="1000" dirty="0">
                 <a:solidFill>
                   <a:srgbClr val="C7D7E2"/>
                 </a:solidFill>
               </a:rPr>
-              <a:t>Warm 15–35 °C, cold 8–15 °C — shifts heat &amp; cold across seasons.</a:t>
+              <a:t>Hydraulically balanced seasonal heat/cold storage.</a:t>
             </a:r>
             <a:endParaRPr lang="en-US" sz="1000" dirty="0"/>
           </a:p>
@@ -16478,13 +17383,20 @@
             <a:prstDash val="solid"/>
           </a:ln>
           <a:effectLst>
-            <a:outerShdw sx="100000" sy="100000" kx="0" ky="0" algn="bl" rotWithShape="0" blurRad="114300" dist="38100" dir="8100000">
+            <a:outerShdw blurRad="114300" dist="38100" dir="8100000" algn="bl" rotWithShape="0">
               <a:srgbClr val="0A1722">
                 <a:alpha val="22000"/>
               </a:srgbClr>
             </a:outerShdw>
           </a:effectLst>
         </p:spPr>
+        <p:txBody>
+          <a:bodyPr/>
+          <a:lstStyle/>
+          <a:p>
+            <a:endParaRPr lang="en-US"/>
+          </a:p>
+        </p:txBody>
       </p:sp>
       <p:sp>
         <p:nvSpPr>
@@ -16505,24 +17417,31 @@
           </a:solidFill>
           <a:ln/>
           <a:effectLst>
-            <a:outerShdw sx="100000" sy="100000" kx="0" ky="0" algn="bl" rotWithShape="0" blurRad="88900" dist="25400" dir="8100000">
+            <a:outerShdw blurRad="88900" dist="25400" dir="8100000" algn="bl" rotWithShape="0">
               <a:srgbClr val="1B2A38">
                 <a:alpha val="14000"/>
               </a:srgbClr>
             </a:outerShdw>
           </a:effectLst>
         </p:spPr>
+        <p:txBody>
+          <a:bodyPr/>
+          <a:lstStyle/>
+          <a:p>
+            <a:endParaRPr lang="en-US"/>
+          </a:p>
+        </p:txBody>
       </p:sp>
       <p:pic>
         <p:nvPicPr>
-          <p:cNvPr id="22" name="Image 3" descr="preencoded.png">    </p:cNvPr>
+          <p:cNvPr id="22" name="Image 3" descr="preencoded.png"/>
           <p:cNvPicPr>
             <a:picLocks noChangeAspect="1"/>
           </p:cNvPicPr>
           <p:nvPr/>
         </p:nvPicPr>
         <p:blipFill>
-          <a:blip r:embed="rId4"/>
+          <a:blip r:embed="rId6"/>
           <a:stretch>
             <a:fillRect/>
           </a:stretch>
@@ -16558,7 +17477,7 @@
           <a:bodyPr wrap="square" lIns="0" tIns="0" rIns="0" bIns="0" rtlCol="0" anchor="ctr"/>
           <a:lstStyle/>
           <a:p>
-            <a:pPr indent="0" marL="0">
+            <a:pPr marL="0" indent="0">
               <a:lnSpc>
                 <a:spcPct val="95000"/>
               </a:lnSpc>
@@ -16597,7 +17516,7 @@
           <a:bodyPr wrap="square" lIns="0" tIns="0" rIns="0" bIns="0" rtlCol="0" anchor="ctr"/>
           <a:lstStyle/>
           <a:p>
-            <a:pPr indent="0" marL="0">
+            <a:pPr marL="0" indent="0">
               <a:lnSpc>
                 <a:spcPct val="100000"/>
               </a:lnSpc>
@@ -16641,13 +17560,20 @@
             <a:prstDash val="solid"/>
           </a:ln>
           <a:effectLst>
-            <a:outerShdw sx="100000" sy="100000" kx="0" ky="0" algn="bl" rotWithShape="0" blurRad="114300" dist="38100" dir="8100000">
+            <a:outerShdw blurRad="114300" dist="38100" dir="8100000" algn="bl" rotWithShape="0">
               <a:srgbClr val="0A1722">
                 <a:alpha val="22000"/>
               </a:srgbClr>
             </a:outerShdw>
           </a:effectLst>
         </p:spPr>
+        <p:txBody>
+          <a:bodyPr/>
+          <a:lstStyle/>
+          <a:p>
+            <a:endParaRPr lang="en-US"/>
+          </a:p>
+        </p:txBody>
       </p:sp>
       <p:sp>
         <p:nvSpPr>
@@ -16668,24 +17594,31 @@
           </a:solidFill>
           <a:ln/>
           <a:effectLst>
-            <a:outerShdw sx="100000" sy="100000" kx="0" ky="0" algn="bl" rotWithShape="0" blurRad="88900" dist="25400" dir="8100000">
+            <a:outerShdw blurRad="88900" dist="25400" dir="8100000" algn="bl" rotWithShape="0">
               <a:srgbClr val="1B2A38">
                 <a:alpha val="14000"/>
               </a:srgbClr>
             </a:outerShdw>
           </a:effectLst>
         </p:spPr>
+        <p:txBody>
+          <a:bodyPr/>
+          <a:lstStyle/>
+          <a:p>
+            <a:endParaRPr lang="en-US"/>
+          </a:p>
+        </p:txBody>
       </p:sp>
       <p:pic>
         <p:nvPicPr>
-          <p:cNvPr id="27" name="Image 4" descr="preencoded.png">    </p:cNvPr>
+          <p:cNvPr id="27" name="Image 4" descr="preencoded.png"/>
           <p:cNvPicPr>
             <a:picLocks noChangeAspect="1"/>
           </p:cNvPicPr>
           <p:nvPr/>
         </p:nvPicPr>
         <p:blipFill>
-          <a:blip r:embed="rId5"/>
+          <a:blip r:embed="rId7"/>
           <a:stretch>
             <a:fillRect/>
           </a:stretch>
@@ -16721,7 +17654,7 @@
           <a:bodyPr wrap="square" lIns="0" tIns="0" rIns="0" bIns="0" rtlCol="0" anchor="ctr"/>
           <a:lstStyle/>
           <a:p>
-            <a:pPr indent="0" marL="0">
+            <a:pPr marL="0" indent="0">
               <a:lnSpc>
                 <a:spcPct val="95000"/>
               </a:lnSpc>
@@ -16760,7 +17693,7 @@
           <a:bodyPr wrap="square" lIns="0" tIns="0" rIns="0" bIns="0" rtlCol="0" anchor="ctr"/>
           <a:lstStyle/>
           <a:p>
-            <a:pPr indent="0" marL="0">
+            <a:pPr marL="0" indent="0">
               <a:lnSpc>
                 <a:spcPct val="100000"/>
               </a:lnSpc>
@@ -16804,13 +17737,20 @@
             <a:prstDash val="solid"/>
           </a:ln>
           <a:effectLst>
-            <a:outerShdw sx="100000" sy="100000" kx="0" ky="0" algn="bl" rotWithShape="0" blurRad="114300" dist="38100" dir="8100000">
+            <a:outerShdw blurRad="114300" dist="38100" dir="8100000" algn="bl" rotWithShape="0">
               <a:srgbClr val="0A1722">
                 <a:alpha val="22000"/>
               </a:srgbClr>
             </a:outerShdw>
           </a:effectLst>
         </p:spPr>
+        <p:txBody>
+          <a:bodyPr/>
+          <a:lstStyle/>
+          <a:p>
+            <a:endParaRPr lang="en-US"/>
+          </a:p>
+        </p:txBody>
       </p:sp>
       <p:sp>
         <p:nvSpPr>
@@ -16831,24 +17771,31 @@
           </a:solidFill>
           <a:ln/>
           <a:effectLst>
-            <a:outerShdw sx="100000" sy="100000" kx="0" ky="0" algn="bl" rotWithShape="0" blurRad="88900" dist="25400" dir="8100000">
+            <a:outerShdw blurRad="88900" dist="25400" dir="8100000" algn="bl" rotWithShape="0">
               <a:srgbClr val="1B2A38">
                 <a:alpha val="14000"/>
               </a:srgbClr>
             </a:outerShdw>
           </a:effectLst>
         </p:spPr>
+        <p:txBody>
+          <a:bodyPr/>
+          <a:lstStyle/>
+          <a:p>
+            <a:endParaRPr lang="en-US"/>
+          </a:p>
+        </p:txBody>
       </p:sp>
       <p:pic>
         <p:nvPicPr>
-          <p:cNvPr id="32" name="Image 5" descr="preencoded.png">    </p:cNvPr>
+          <p:cNvPr id="32" name="Image 5" descr="preencoded.png"/>
           <p:cNvPicPr>
             <a:picLocks noChangeAspect="1"/>
           </p:cNvPicPr>
           <p:nvPr/>
         </p:nvPicPr>
         <p:blipFill>
-          <a:blip r:embed="rId6"/>
+          <a:blip r:embed="rId8"/>
           <a:stretch>
             <a:fillRect/>
           </a:stretch>
@@ -16884,7 +17831,7 @@
           <a:bodyPr wrap="square" lIns="0" tIns="0" rIns="0" bIns="0" rtlCol="0" anchor="ctr"/>
           <a:lstStyle/>
           <a:p>
-            <a:pPr indent="0" marL="0">
+            <a:pPr marL="0" indent="0">
               <a:lnSpc>
                 <a:spcPct val="95000"/>
               </a:lnSpc>
@@ -16923,7 +17870,7 @@
           <a:bodyPr wrap="square" lIns="0" tIns="0" rIns="0" bIns="0" rtlCol="0" anchor="ctr"/>
           <a:lstStyle/>
           <a:p>
-            <a:pPr indent="0" marL="0">
+            <a:pPr marL="0" indent="0">
               <a:lnSpc>
                 <a:spcPct val="100000"/>
               </a:lnSpc>
@@ -16935,7 +17882,7 @@
                   <a:srgbClr val="C7D7E2"/>
                 </a:solidFill>
               </a:rPr>
-              <a:t>Covers all parasitic load (1.2 MW) — renewably self-sufficient.</a:t>
+              <a:t>Offsets a significant fraction of auxiliary electricity demand.</a:t>
             </a:r>
             <a:endParaRPr lang="en-US" sz="1000" dirty="0"/>
           </a:p>
@@ -16962,7 +17909,7 @@
           <a:bodyPr wrap="square" lIns="0" tIns="0" rIns="0" bIns="0" rtlCol="0" anchor="ctr"/>
           <a:lstStyle/>
           <a:p>
-            <a:pPr algn="ctr" indent="0" marL="0">
+            <a:pPr marL="0" indent="0" algn="ctr">
               <a:lnSpc>
                 <a:spcPct val="105000"/>
               </a:lnSpc>
@@ -17001,7 +17948,7 @@
           <a:bodyPr wrap="square" lIns="0" tIns="0" rIns="0" bIns="0" rtlCol="0" anchor="ctr"/>
           <a:lstStyle/>
           <a:p>
-            <a:pPr algn="r" indent="0" marL="0">
+            <a:pPr marL="0" indent="0" algn="r">
               <a:buNone/>
             </a:pPr>
             <a:r>
@@ -17037,7 +17984,7 @@
           <a:bodyPr wrap="square" lIns="0" tIns="0" rIns="0" bIns="0" rtlCol="0" anchor="ctr"/>
           <a:lstStyle/>
           <a:p>
-            <a:pPr indent="0" marL="0">
+            <a:pPr marL="0" indent="0">
               <a:buNone/>
             </a:pPr>
             <a:r>
@@ -17353,4 +18300,299 @@
     </a:ext>
   </a:extLst>
 </a:theme>
+</file>
+
+<file path=ppt/theme/theme2.xml><?xml version="1.0" encoding="utf-8"?>
+<a:theme xmlns:a="http://schemas.openxmlformats.org/drawingml/2006/main" name="Office Theme">
+  <a:themeElements>
+    <a:clrScheme name="Office">
+      <a:dk1>
+        <a:sysClr val="windowText" lastClr="000000"/>
+      </a:dk1>
+      <a:lt1>
+        <a:sysClr val="window" lastClr="FFFFFF"/>
+      </a:lt1>
+      <a:dk2>
+        <a:srgbClr val="44546A"/>
+      </a:dk2>
+      <a:lt2>
+        <a:srgbClr val="E7E6E6"/>
+      </a:lt2>
+      <a:accent1>
+        <a:srgbClr val="4472C4"/>
+      </a:accent1>
+      <a:accent2>
+        <a:srgbClr val="ED7D31"/>
+      </a:accent2>
+      <a:accent3>
+        <a:srgbClr val="A5A5A5"/>
+      </a:accent3>
+      <a:accent4>
+        <a:srgbClr val="FFC000"/>
+      </a:accent4>
+      <a:accent5>
+        <a:srgbClr val="5B9BD5"/>
+      </a:accent5>
+      <a:accent6>
+        <a:srgbClr val="70AD47"/>
+      </a:accent6>
+      <a:hlink>
+        <a:srgbClr val="0563C1"/>
+      </a:hlink>
+      <a:folHlink>
+        <a:srgbClr val="954F72"/>
+      </a:folHlink>
+    </a:clrScheme>
+    <a:fontScheme name="Office">
+      <a:majorFont>
+        <a:latin typeface="Calibri Light" panose="020F0302020204030204"/>
+        <a:ea typeface=""/>
+        <a:cs typeface=""/>
+        <a:font script="Jpan" typeface="游ゴシック Light"/>
+        <a:font script="Hang" typeface="맑은 고딕"/>
+        <a:font script="Hans" typeface="等线 Light"/>
+        <a:font script="Hant" typeface="新細明體"/>
+        <a:font script="Arab" typeface="Times New Roman"/>
+        <a:font script="Hebr" typeface="Times New Roman"/>
+        <a:font script="Thai" typeface="Angsana New"/>
+        <a:font script="Ethi" typeface="Nyala"/>
+        <a:font script="Beng" typeface="Vrinda"/>
+        <a:font script="Gujr" typeface="Shruti"/>
+        <a:font script="Khmr" typeface="MoolBoran"/>
+        <a:font script="Knda" typeface="Tunga"/>
+        <a:font script="Guru" typeface="Raavi"/>
+        <a:font script="Cans" typeface="Euphemia"/>
+        <a:font script="Cher" typeface="Plantagenet Cherokee"/>
+        <a:font script="Yiii" typeface="Microsoft Yi Baiti"/>
+        <a:font script="Tibt" typeface="Microsoft Himalaya"/>
+        <a:font script="Thaa" typeface="MV Boli"/>
+        <a:font script="Deva" typeface="Mangal"/>
+        <a:font script="Telu" typeface="Gautami"/>
+        <a:font script="Taml" typeface="Latha"/>
+        <a:font script="Syrc" typeface="Estrangelo Edessa"/>
+        <a:font script="Orya" typeface="Kalinga"/>
+        <a:font script="Mlym" typeface="Kartika"/>
+        <a:font script="Laoo" typeface="DokChampa"/>
+        <a:font script="Sinh" typeface="Iskoola Pota"/>
+        <a:font script="Mong" typeface="Mongolian Baiti"/>
+        <a:font script="Viet" typeface="Times New Roman"/>
+        <a:font script="Uigh" typeface="Microsoft Uighur"/>
+        <a:font script="Geor" typeface="Sylfaen"/>
+        <a:font script="Armn" typeface="Arial"/>
+        <a:font script="Bugi" typeface="Leelawadee UI"/>
+        <a:font script="Bopo" typeface="Microsoft JhengHei"/>
+        <a:font script="Java" typeface="Javanese Text"/>
+        <a:font script="Lisu" typeface="Segoe UI"/>
+        <a:font script="Mymr" typeface="Myanmar Text"/>
+        <a:font script="Nkoo" typeface="Ebrima"/>
+        <a:font script="Olck" typeface="Nirmala UI"/>
+        <a:font script="Osma" typeface="Ebrima"/>
+        <a:font script="Phag" typeface="Phagspa"/>
+        <a:font script="Syrn" typeface="Estrangelo Edessa"/>
+        <a:font script="Syrj" typeface="Estrangelo Edessa"/>
+        <a:font script="Syre" typeface="Estrangelo Edessa"/>
+        <a:font script="Sora" typeface="Nirmala UI"/>
+        <a:font script="Tale" typeface="Microsoft Tai Le"/>
+        <a:font script="Talu" typeface="Microsoft New Tai Lue"/>
+        <a:font script="Tfng" typeface="Ebrima"/>
+      </a:majorFont>
+      <a:minorFont>
+        <a:latin typeface="Calibri" panose="020F0502020204030204"/>
+        <a:ea typeface=""/>
+        <a:cs typeface=""/>
+        <a:font script="Jpan" typeface="游ゴシック"/>
+        <a:font script="Hang" typeface="맑은 고딕"/>
+        <a:font script="Hans" typeface="等线"/>
+        <a:font script="Hant" typeface="新細明體"/>
+        <a:font script="Arab" typeface="Arial"/>
+        <a:font script="Hebr" typeface="Arial"/>
+        <a:font script="Thai" typeface="Cordia New"/>
+        <a:font script="Ethi" typeface="Nyala"/>
+        <a:font script="Beng" typeface="Vrinda"/>
+        <a:font script="Gujr" typeface="Shruti"/>
+        <a:font script="Khmr" typeface="DaunPenh"/>
+        <a:font script="Knda" typeface="Tunga"/>
+        <a:font script="Guru" typeface="Raavi"/>
+        <a:font script="Cans" typeface="Euphemia"/>
+        <a:font script="Cher" typeface="Plantagenet Cherokee"/>
+        <a:font script="Yiii" typeface="Microsoft Yi Baiti"/>
+        <a:font script="Tibt" typeface="Microsoft Himalaya"/>
+        <a:font script="Thaa" typeface="MV Boli"/>
+        <a:font script="Deva" typeface="Mangal"/>
+        <a:font script="Telu" typeface="Gautami"/>
+        <a:font script="Taml" typeface="Latha"/>
+        <a:font script="Syrc" typeface="Estrangelo Edessa"/>
+        <a:font script="Orya" typeface="Kalinga"/>
+        <a:font script="Mlym" typeface="Kartika"/>
+        <a:font script="Laoo" typeface="DokChampa"/>
+        <a:font script="Sinh" typeface="Iskoola Pota"/>
+        <a:font script="Mong" typeface="Mongolian Baiti"/>
+        <a:font script="Viet" typeface="Arial"/>
+        <a:font script="Uigh" typeface="Microsoft Uighur"/>
+        <a:font script="Geor" typeface="Sylfaen"/>
+        <a:font script="Armn" typeface="Arial"/>
+        <a:font script="Bugi" typeface="Leelawadee UI"/>
+        <a:font script="Bopo" typeface="Microsoft JhengHei"/>
+        <a:font script="Java" typeface="Javanese Text"/>
+        <a:font script="Lisu" typeface="Segoe UI"/>
+        <a:font script="Mymr" typeface="Myanmar Text"/>
+        <a:font script="Nkoo" typeface="Ebrima"/>
+        <a:font script="Olck" typeface="Nirmala UI"/>
+        <a:font script="Osma" typeface="Ebrima"/>
+        <a:font script="Phag" typeface="Phagspa"/>
+        <a:font script="Syrn" typeface="Estrangelo Edessa"/>
+        <a:font script="Syrj" typeface="Estrangelo Edessa"/>
+        <a:font script="Syre" typeface="Estrangelo Edessa"/>
+        <a:font script="Sora" typeface="Nirmala UI"/>
+        <a:font script="Tale" typeface="Microsoft Tai Le"/>
+        <a:font script="Talu" typeface="Microsoft New Tai Lue"/>
+        <a:font script="Tfng" typeface="Ebrima"/>
+      </a:minorFont>
+    </a:fontScheme>
+    <a:fmtScheme name="Office">
+      <a:fillStyleLst>
+        <a:solidFill>
+          <a:schemeClr val="phClr"/>
+        </a:solidFill>
+        <a:gradFill rotWithShape="1">
+          <a:gsLst>
+            <a:gs pos="0">
+              <a:schemeClr val="phClr">
+                <a:lumMod val="110000"/>
+                <a:satMod val="105000"/>
+                <a:tint val="67000"/>
+              </a:schemeClr>
+            </a:gs>
+            <a:gs pos="50000">
+              <a:schemeClr val="phClr">
+                <a:lumMod val="105000"/>
+                <a:satMod val="103000"/>
+                <a:tint val="73000"/>
+              </a:schemeClr>
+            </a:gs>
+            <a:gs pos="100000">
+              <a:schemeClr val="phClr">
+                <a:lumMod val="105000"/>
+                <a:satMod val="109000"/>
+                <a:tint val="81000"/>
+              </a:schemeClr>
+            </a:gs>
+          </a:gsLst>
+          <a:lin ang="5400000" scaled="0"/>
+        </a:gradFill>
+        <a:gradFill rotWithShape="1">
+          <a:gsLst>
+            <a:gs pos="0">
+              <a:schemeClr val="phClr">
+                <a:satMod val="103000"/>
+                <a:lumMod val="102000"/>
+                <a:tint val="94000"/>
+              </a:schemeClr>
+            </a:gs>
+            <a:gs pos="50000">
+              <a:schemeClr val="phClr">
+                <a:satMod val="110000"/>
+                <a:lumMod val="100000"/>
+                <a:shade val="100000"/>
+              </a:schemeClr>
+            </a:gs>
+            <a:gs pos="100000">
+              <a:schemeClr val="phClr">
+                <a:lumMod val="99000"/>
+                <a:satMod val="120000"/>
+                <a:shade val="78000"/>
+              </a:schemeClr>
+            </a:gs>
+          </a:gsLst>
+          <a:lin ang="5400000" scaled="0"/>
+        </a:gradFill>
+      </a:fillStyleLst>
+      <a:lnStyleLst>
+        <a:ln w="6350" cap="flat" cmpd="sng" algn="ctr">
+          <a:solidFill>
+            <a:schemeClr val="phClr"/>
+          </a:solidFill>
+          <a:prstDash val="solid"/>
+          <a:miter lim="800000"/>
+        </a:ln>
+        <a:ln w="12700" cap="flat" cmpd="sng" algn="ctr">
+          <a:solidFill>
+            <a:schemeClr val="phClr"/>
+          </a:solidFill>
+          <a:prstDash val="solid"/>
+          <a:miter lim="800000"/>
+        </a:ln>
+        <a:ln w="19050" cap="flat" cmpd="sng" algn="ctr">
+          <a:solidFill>
+            <a:schemeClr val="phClr"/>
+          </a:solidFill>
+          <a:prstDash val="solid"/>
+          <a:miter lim="800000"/>
+        </a:ln>
+      </a:lnStyleLst>
+      <a:effectStyleLst>
+        <a:effectStyle>
+          <a:effectLst/>
+        </a:effectStyle>
+        <a:effectStyle>
+          <a:effectLst/>
+        </a:effectStyle>
+        <a:effectStyle>
+          <a:effectLst>
+            <a:outerShdw blurRad="57150" dist="19050" dir="5400000" algn="ctr" rotWithShape="0">
+              <a:srgbClr val="000000">
+                <a:alpha val="63000"/>
+              </a:srgbClr>
+            </a:outerShdw>
+          </a:effectLst>
+        </a:effectStyle>
+      </a:effectStyleLst>
+      <a:bgFillStyleLst>
+        <a:solidFill>
+          <a:schemeClr val="phClr"/>
+        </a:solidFill>
+        <a:solidFill>
+          <a:schemeClr val="phClr">
+            <a:tint val="95000"/>
+            <a:satMod val="170000"/>
+          </a:schemeClr>
+        </a:solidFill>
+        <a:gradFill rotWithShape="1">
+          <a:gsLst>
+            <a:gs pos="0">
+              <a:schemeClr val="phClr">
+                <a:tint val="93000"/>
+                <a:satMod val="150000"/>
+                <a:shade val="98000"/>
+                <a:lumMod val="102000"/>
+              </a:schemeClr>
+            </a:gs>
+            <a:gs pos="50000">
+              <a:schemeClr val="phClr">
+                <a:tint val="98000"/>
+                <a:satMod val="130000"/>
+                <a:shade val="90000"/>
+                <a:lumMod val="103000"/>
+              </a:schemeClr>
+            </a:gs>
+            <a:gs pos="100000">
+              <a:schemeClr val="phClr">
+                <a:shade val="63000"/>
+                <a:satMod val="120000"/>
+              </a:schemeClr>
+            </a:gs>
+          </a:gsLst>
+          <a:lin ang="5400000" scaled="0"/>
+        </a:gradFill>
+      </a:bgFillStyleLst>
+    </a:fmtScheme>
+  </a:themeElements>
+  <a:objectDefaults/>
+  <a:extraClrSchemeLst/>
+  <a:extLst>
+    <a:ext uri="{05A4C25C-085E-4340-85A3-A5531E510DB2}">
+      <thm15:themeFamily xmlns:thm15="http://schemas.microsoft.com/office/thememl/2012/main" name="Office Theme" id="{62F939B6-93AF-4DB8-9C6B-D6C7DFDC589F}" vid="{4A3C46E8-61CC-4603-A589-7422A47A8E4A}"/>
+    </a:ext>
+  </a:extLst>
+</a:theme>
 </file>